--- a/submission_package/Sentinel_AI_Solution_Presentation.pptx
+++ b/submission_package/Sentinel_AI_Solution_Presentation.pptx
@@ -3095,20 +3095,12 @@
         <p:nvPr/>
       </p:nvGrpSpPr>
       <p:grpSpPr/>
-      <p:pic>
-        <p:nvPicPr>
-          <p:cNvPr id="2" name="Picture 1" descr="slide_1.png"/>
-          <p:cNvPicPr>
-            <a:picLocks noChangeAspect="1"/>
-          </p:cNvPicPr>
-          <p:nvPr/>
-        </p:nvPicPr>
-        <p:blipFill>
-          <a:blip r:embed="rId2"/>
-          <a:stretch>
-            <a:fillRect/>
-          </a:stretch>
-        </p:blipFill>
+      <p:sp>
+        <p:nvSpPr>
+          <p:cNvPr id="2" name="Rectangle 1"/>
+          <p:cNvSpPr/>
+          <p:nvPr/>
+        </p:nvSpPr>
         <p:spPr>
           <a:xfrm>
             <a:off x="0" y="0"/>
@@ -3117,8 +3109,448 @@
           <a:prstGeom prst="rect">
             <a:avLst/>
           </a:prstGeom>
-        </p:spPr>
-      </p:pic>
+          <a:solidFill>
+            <a:srgbClr val="0B0F19"/>
+          </a:solidFill>
+          <a:ln>
+            <a:noFill/>
+          </a:ln>
+        </p:spPr>
+        <p:style>
+          <a:lnRef idx="1">
+            <a:schemeClr val="accent1"/>
+          </a:lnRef>
+          <a:fillRef idx="3">
+            <a:schemeClr val="accent1"/>
+          </a:fillRef>
+          <a:effectRef idx="2">
+            <a:schemeClr val="accent1"/>
+          </a:effectRef>
+          <a:fontRef idx="minor">
+            <a:schemeClr val="lt1"/>
+          </a:fontRef>
+        </p:style>
+        <p:txBody>
+          <a:bodyPr rtlCol="0" anchor="ctr"/>
+          <a:lstStyle/>
+          <a:p>
+            <a:pPr algn="ctr"/>
+          </a:p>
+        </p:txBody>
+      </p:sp>
+      <p:sp>
+        <p:nvSpPr>
+          <p:cNvPr id="3" name="Rounded Rectangle 2"/>
+          <p:cNvSpPr/>
+          <p:nvPr/>
+        </p:nvSpPr>
+        <p:spPr>
+          <a:xfrm>
+            <a:off x="914400" y="1371600"/>
+            <a:ext cx="182880" cy="3931920"/>
+          </a:xfrm>
+          <a:prstGeom prst="roundRect">
+            <a:avLst/>
+          </a:prstGeom>
+          <a:solidFill>
+            <a:srgbClr val="06B6D4"/>
+          </a:solidFill>
+          <a:ln>
+            <a:noFill/>
+          </a:ln>
+        </p:spPr>
+        <p:style>
+          <a:lnRef idx="1">
+            <a:schemeClr val="accent1"/>
+          </a:lnRef>
+          <a:fillRef idx="3">
+            <a:schemeClr val="accent1"/>
+          </a:fillRef>
+          <a:effectRef idx="2">
+            <a:schemeClr val="accent1"/>
+          </a:effectRef>
+          <a:fontRef idx="minor">
+            <a:schemeClr val="lt1"/>
+          </a:fontRef>
+        </p:style>
+        <p:txBody>
+          <a:bodyPr rtlCol="0" anchor="ctr"/>
+          <a:lstStyle/>
+          <a:p>
+            <a:pPr algn="ctr"/>
+          </a:p>
+        </p:txBody>
+      </p:sp>
+      <p:sp>
+        <p:nvSpPr>
+          <p:cNvPr id="4" name="Rounded Rectangle 3"/>
+          <p:cNvSpPr/>
+          <p:nvPr/>
+        </p:nvSpPr>
+        <p:spPr>
+          <a:xfrm>
+            <a:off x="1280160" y="1371600"/>
+            <a:ext cx="3474720" cy="347472"/>
+          </a:xfrm>
+          <a:prstGeom prst="roundRect">
+            <a:avLst/>
+          </a:prstGeom>
+          <a:solidFill>
+            <a:srgbClr val="0F1E30"/>
+          </a:solidFill>
+          <a:ln w="12700">
+            <a:solidFill>
+              <a:srgbClr val="06B6D4"/>
+            </a:solidFill>
+          </a:ln>
+        </p:spPr>
+        <p:style>
+          <a:lnRef idx="1">
+            <a:schemeClr val="accent1"/>
+          </a:lnRef>
+          <a:fillRef idx="3">
+            <a:schemeClr val="accent1"/>
+          </a:fillRef>
+          <a:effectRef idx="2">
+            <a:schemeClr val="accent1"/>
+          </a:effectRef>
+          <a:fontRef idx="minor">
+            <a:schemeClr val="lt1"/>
+          </a:fontRef>
+        </p:style>
+        <p:txBody>
+          <a:bodyPr rtlCol="0" anchor="ctr"/>
+          <a:lstStyle/>
+          <a:p>
+            <a:pPr algn="ctr">
+              <a:defRPr sz="1100" b="1">
+                <a:solidFill>
+                  <a:srgbClr val="06B6D4"/>
+                </a:solidFill>
+              </a:defRPr>
+            </a:pPr>
+            <a:r>
+              <a:t>🛡️ GUJARAT POLICE SMART SURVEILLANCE</a:t>
+            </a:r>
+          </a:p>
+        </p:txBody>
+      </p:sp>
+      <p:sp>
+        <p:nvSpPr>
+          <p:cNvPr id="5" name="TextBox 4"/>
+          <p:cNvSpPr txBox="1"/>
+          <p:nvPr/>
+        </p:nvSpPr>
+        <p:spPr>
+          <a:xfrm>
+            <a:off x="1280160" y="1828800"/>
+            <a:ext cx="9601200" cy="2926080"/>
+          </a:xfrm>
+          <a:prstGeom prst="rect">
+            <a:avLst/>
+          </a:prstGeom>
+          <a:noFill/>
+        </p:spPr>
+        <p:txBody>
+          <a:bodyPr wrap="square">
+            <a:spAutoFit/>
+          </a:bodyPr>
+          <a:lstStyle/>
+          <a:p>
+            <a:pPr>
+              <a:defRPr sz="3600" b="1">
+                <a:solidFill>
+                  <a:srgbClr val="FFFFFF"/>
+                </a:solidFill>
+              </a:defRPr>
+            </a:pPr>
+            <a:r>
+              <a:t>SENTINEL AI SURVEILLANCE PLATFORM</a:t>
+            </a:r>
+          </a:p>
+          <a:p>
+            <a:pPr>
+              <a:spcBef>
+                <a:spcPts val="800"/>
+              </a:spcBef>
+              <a:defRPr sz="1900" b="1">
+                <a:solidFill>
+                  <a:srgbClr val="06B6D4"/>
+                </a:solidFill>
+              </a:defRPr>
+            </a:pPr>
+            <a:r>
+              <a:t>Unified CCTV Ingestion, AI ANPR &amp; GIS Vehicle Tracking System</a:t>
+            </a:r>
+          </a:p>
+          <a:p>
+            <a:pPr>
+              <a:spcBef>
+                <a:spcPts val="1200"/>
+              </a:spcBef>
+              <a:defRPr sz="1300">
+                <a:solidFill>
+                  <a:srgbClr val="94A3B8"/>
+                </a:solidFill>
+              </a:defRPr>
+            </a:pPr>
+            <a:r>
+              <a:t>An enterprise-grade, 100% self-hosted computer vision intelligence system. Integrates multi-vendor cameras, executes sub-second hotlist alerts, and reconstructs vehicle journeys on interactive GIS maps with zero cloud API costs.</a:t>
+            </a:r>
+          </a:p>
+        </p:txBody>
+      </p:sp>
+      <p:sp>
+        <p:nvSpPr>
+          <p:cNvPr id="6" name="Rounded Rectangle 5"/>
+          <p:cNvSpPr/>
+          <p:nvPr/>
+        </p:nvSpPr>
+        <p:spPr>
+          <a:xfrm>
+            <a:off x="1280160" y="5120640"/>
+            <a:ext cx="2331720" cy="502920"/>
+          </a:xfrm>
+          <a:prstGeom prst="roundRect">
+            <a:avLst/>
+          </a:prstGeom>
+          <a:solidFill>
+            <a:srgbClr val="131D31"/>
+          </a:solidFill>
+          <a:ln w="12700">
+            <a:solidFill>
+              <a:srgbClr val="1E293B"/>
+            </a:solidFill>
+          </a:ln>
+        </p:spPr>
+        <p:style>
+          <a:lnRef idx="1">
+            <a:schemeClr val="accent1"/>
+          </a:lnRef>
+          <a:fillRef idx="3">
+            <a:schemeClr val="accent1"/>
+          </a:fillRef>
+          <a:effectRef idx="2">
+            <a:schemeClr val="accent1"/>
+          </a:effectRef>
+          <a:fontRef idx="minor">
+            <a:schemeClr val="lt1"/>
+          </a:fontRef>
+        </p:style>
+        <p:txBody>
+          <a:bodyPr rtlCol="0" anchor="ctr"/>
+          <a:lstStyle/>
+          <a:p>
+            <a:pPr algn="ctr">
+              <a:defRPr sz="1100" b="1">
+                <a:solidFill>
+                  <a:srgbClr val="F8FAFC"/>
+                </a:solidFill>
+              </a:defRPr>
+            </a:pPr>
+            <a:r>
+              <a:t>📹 Multi-Vendor RTSP/ONVIF</a:t>
+            </a:r>
+          </a:p>
+        </p:txBody>
+      </p:sp>
+      <p:sp>
+        <p:nvSpPr>
+          <p:cNvPr id="7" name="Rounded Rectangle 6"/>
+          <p:cNvSpPr/>
+          <p:nvPr/>
+        </p:nvSpPr>
+        <p:spPr>
+          <a:xfrm>
+            <a:off x="3749039" y="5120640"/>
+            <a:ext cx="2331720" cy="502920"/>
+          </a:xfrm>
+          <a:prstGeom prst="roundRect">
+            <a:avLst/>
+          </a:prstGeom>
+          <a:solidFill>
+            <a:srgbClr val="131D31"/>
+          </a:solidFill>
+          <a:ln w="12700">
+            <a:solidFill>
+              <a:srgbClr val="1E293B"/>
+            </a:solidFill>
+          </a:ln>
+        </p:spPr>
+        <p:style>
+          <a:lnRef idx="1">
+            <a:schemeClr val="accent1"/>
+          </a:lnRef>
+          <a:fillRef idx="3">
+            <a:schemeClr val="accent1"/>
+          </a:fillRef>
+          <a:effectRef idx="2">
+            <a:schemeClr val="accent1"/>
+          </a:effectRef>
+          <a:fontRef idx="minor">
+            <a:schemeClr val="lt1"/>
+          </a:fontRef>
+        </p:style>
+        <p:txBody>
+          <a:bodyPr rtlCol="0" anchor="ctr"/>
+          <a:lstStyle/>
+          <a:p>
+            <a:pPr algn="ctr">
+              <a:defRPr sz="1100" b="1">
+                <a:solidFill>
+                  <a:srgbClr val="F8FAFC"/>
+                </a:solidFill>
+              </a:defRPr>
+            </a:pPr>
+            <a:r>
+              <a:t>⚡ YOLOv8 + PP-OCRv4</a:t>
+            </a:r>
+          </a:p>
+        </p:txBody>
+      </p:sp>
+      <p:sp>
+        <p:nvSpPr>
+          <p:cNvPr id="8" name="Rounded Rectangle 7"/>
+          <p:cNvSpPr/>
+          <p:nvPr/>
+        </p:nvSpPr>
+        <p:spPr>
+          <a:xfrm>
+            <a:off x="6217920" y="5120640"/>
+            <a:ext cx="2331720" cy="502920"/>
+          </a:xfrm>
+          <a:prstGeom prst="roundRect">
+            <a:avLst/>
+          </a:prstGeom>
+          <a:solidFill>
+            <a:srgbClr val="131D31"/>
+          </a:solidFill>
+          <a:ln w="12700">
+            <a:solidFill>
+              <a:srgbClr val="1E293B"/>
+            </a:solidFill>
+          </a:ln>
+        </p:spPr>
+        <p:style>
+          <a:lnRef idx="1">
+            <a:schemeClr val="accent1"/>
+          </a:lnRef>
+          <a:fillRef idx="3">
+            <a:schemeClr val="accent1"/>
+          </a:fillRef>
+          <a:effectRef idx="2">
+            <a:schemeClr val="accent1"/>
+          </a:effectRef>
+          <a:fontRef idx="minor">
+            <a:schemeClr val="lt1"/>
+          </a:fontRef>
+        </p:style>
+        <p:txBody>
+          <a:bodyPr rtlCol="0" anchor="ctr"/>
+          <a:lstStyle/>
+          <a:p>
+            <a:pPr algn="ctr">
+              <a:defRPr sz="1100" b="1">
+                <a:solidFill>
+                  <a:srgbClr val="F8FAFC"/>
+                </a:solidFill>
+              </a:defRPr>
+            </a:pPr>
+            <a:r>
+              <a:t>🚨 &lt;400ms Hotlist Siren</a:t>
+            </a:r>
+          </a:p>
+        </p:txBody>
+      </p:sp>
+      <p:sp>
+        <p:nvSpPr>
+          <p:cNvPr id="9" name="Rounded Rectangle 8"/>
+          <p:cNvSpPr/>
+          <p:nvPr/>
+        </p:nvSpPr>
+        <p:spPr>
+          <a:xfrm>
+            <a:off x="8686800" y="5120640"/>
+            <a:ext cx="2331720" cy="502920"/>
+          </a:xfrm>
+          <a:prstGeom prst="roundRect">
+            <a:avLst/>
+          </a:prstGeom>
+          <a:solidFill>
+            <a:srgbClr val="131D31"/>
+          </a:solidFill>
+          <a:ln w="12700">
+            <a:solidFill>
+              <a:srgbClr val="1E293B"/>
+            </a:solidFill>
+          </a:ln>
+        </p:spPr>
+        <p:style>
+          <a:lnRef idx="1">
+            <a:schemeClr val="accent1"/>
+          </a:lnRef>
+          <a:fillRef idx="3">
+            <a:schemeClr val="accent1"/>
+          </a:fillRef>
+          <a:effectRef idx="2">
+            <a:schemeClr val="accent1"/>
+          </a:effectRef>
+          <a:fontRef idx="minor">
+            <a:schemeClr val="lt1"/>
+          </a:fontRef>
+        </p:style>
+        <p:txBody>
+          <a:bodyPr rtlCol="0" anchor="ctr"/>
+          <a:lstStyle/>
+          <a:p>
+            <a:pPr algn="ctr">
+              <a:defRPr sz="1100" b="1">
+                <a:solidFill>
+                  <a:srgbClr val="F8FAFC"/>
+                </a:solidFill>
+              </a:defRPr>
+            </a:pPr>
+            <a:r>
+              <a:t>🗺️ PostGIS Breadcrumbs</a:t>
+            </a:r>
+          </a:p>
+        </p:txBody>
+      </p:sp>
+      <p:sp>
+        <p:nvSpPr>
+          <p:cNvPr id="10" name="TextBox 9"/>
+          <p:cNvSpPr txBox="1"/>
+          <p:nvPr/>
+        </p:nvSpPr>
+        <p:spPr>
+          <a:xfrm>
+            <a:off x="914400" y="6217920"/>
+            <a:ext cx="10332720" cy="365760"/>
+          </a:xfrm>
+          <a:prstGeom prst="rect">
+            <a:avLst/>
+          </a:prstGeom>
+          <a:noFill/>
+        </p:spPr>
+        <p:txBody>
+          <a:bodyPr wrap="none">
+            <a:spAutoFit/>
+          </a:bodyPr>
+          <a:lstStyle/>
+          <a:p>
+            <a:pPr>
+              <a:defRPr sz="1100">
+                <a:solidFill>
+                  <a:srgbClr val="64748B"/>
+                </a:solidFill>
+              </a:defRPr>
+            </a:pPr>
+            <a:r>
+              <a:t>State Data Centre (SDC) &amp; Air-Gapped Network Compliant • Official Gujarat Police Solution Deck</a:t>
+            </a:r>
+          </a:p>
+        </p:txBody>
+      </p:sp>
     </p:spTree>
   </p:cSld>
   <p:clrMapOvr>
@@ -3137,20 +3569,12 @@
         <p:nvPr/>
       </p:nvGrpSpPr>
       <p:grpSpPr/>
-      <p:pic>
-        <p:nvPicPr>
-          <p:cNvPr id="2" name="Picture 1" descr="slide_2.png"/>
-          <p:cNvPicPr>
-            <a:picLocks noChangeAspect="1"/>
-          </p:cNvPicPr>
-          <p:nvPr/>
-        </p:nvPicPr>
-        <p:blipFill>
-          <a:blip r:embed="rId2"/>
-          <a:stretch>
-            <a:fillRect/>
-          </a:stretch>
-        </p:blipFill>
+      <p:sp>
+        <p:nvSpPr>
+          <p:cNvPr id="2" name="Rectangle 1"/>
+          <p:cNvSpPr/>
+          <p:nvPr/>
+        </p:nvSpPr>
         <p:spPr>
           <a:xfrm>
             <a:off x="0" y="0"/>
@@ -3159,8 +3583,821 @@
           <a:prstGeom prst="rect">
             <a:avLst/>
           </a:prstGeom>
-        </p:spPr>
-      </p:pic>
+          <a:solidFill>
+            <a:srgbClr val="0B0F19"/>
+          </a:solidFill>
+          <a:ln>
+            <a:noFill/>
+          </a:ln>
+        </p:spPr>
+        <p:style>
+          <a:lnRef idx="1">
+            <a:schemeClr val="accent1"/>
+          </a:lnRef>
+          <a:fillRef idx="3">
+            <a:schemeClr val="accent1"/>
+          </a:fillRef>
+          <a:effectRef idx="2">
+            <a:schemeClr val="accent1"/>
+          </a:effectRef>
+          <a:fontRef idx="minor">
+            <a:schemeClr val="lt1"/>
+          </a:fontRef>
+        </p:style>
+        <p:txBody>
+          <a:bodyPr rtlCol="0" anchor="ctr"/>
+          <a:lstStyle/>
+          <a:p>
+            <a:pPr algn="ctr"/>
+          </a:p>
+        </p:txBody>
+      </p:sp>
+      <p:sp>
+        <p:nvSpPr>
+          <p:cNvPr id="3" name="Rounded Rectangle 2"/>
+          <p:cNvSpPr/>
+          <p:nvPr/>
+        </p:nvSpPr>
+        <p:spPr>
+          <a:xfrm>
+            <a:off x="731520" y="365760"/>
+            <a:ext cx="2926080" cy="292608"/>
+          </a:xfrm>
+          <a:prstGeom prst="roundRect">
+            <a:avLst/>
+          </a:prstGeom>
+          <a:solidFill>
+            <a:srgbClr val="0F1E30"/>
+          </a:solidFill>
+          <a:ln w="12700">
+            <a:solidFill>
+              <a:srgbClr val="06B6D4"/>
+            </a:solidFill>
+          </a:ln>
+        </p:spPr>
+        <p:style>
+          <a:lnRef idx="1">
+            <a:schemeClr val="accent1"/>
+          </a:lnRef>
+          <a:fillRef idx="3">
+            <a:schemeClr val="accent1"/>
+          </a:fillRef>
+          <a:effectRef idx="2">
+            <a:schemeClr val="accent1"/>
+          </a:effectRef>
+          <a:fontRef idx="minor">
+            <a:schemeClr val="lt1"/>
+          </a:fontRef>
+        </p:style>
+        <p:txBody>
+          <a:bodyPr rtlCol="0" anchor="ctr"/>
+          <a:lstStyle/>
+          <a:p>
+            <a:pPr algn="ctr">
+              <a:defRPr sz="1000" b="1">
+                <a:solidFill>
+                  <a:srgbClr val="06B6D4"/>
+                </a:solidFill>
+              </a:defRPr>
+            </a:pPr>
+            <a:r>
+              <a:t>🛡️ PROBLEM CONTEXT</a:t>
+            </a:r>
+          </a:p>
+        </p:txBody>
+      </p:sp>
+      <p:sp>
+        <p:nvSpPr>
+          <p:cNvPr id="4" name="TextBox 3"/>
+          <p:cNvSpPr txBox="1"/>
+          <p:nvPr/>
+        </p:nvSpPr>
+        <p:spPr>
+          <a:xfrm>
+            <a:off x="731520" y="685800"/>
+            <a:ext cx="10698480" cy="502920"/>
+          </a:xfrm>
+          <a:prstGeom prst="rect">
+            <a:avLst/>
+          </a:prstGeom>
+          <a:noFill/>
+        </p:spPr>
+        <p:txBody>
+          <a:bodyPr wrap="none">
+            <a:spAutoFit/>
+          </a:bodyPr>
+          <a:lstStyle/>
+          <a:p>
+            <a:pPr>
+              <a:defRPr sz="2200" b="1">
+                <a:solidFill>
+                  <a:srgbClr val="FFFFFF"/>
+                </a:solidFill>
+              </a:defRPr>
+            </a:pPr>
+            <a:r>
+              <a:t>The Surveillance Challenge Faced by Police Forces</a:t>
+            </a:r>
+          </a:p>
+        </p:txBody>
+      </p:sp>
+      <p:sp>
+        <p:nvSpPr>
+          <p:cNvPr id="5" name="TextBox 4"/>
+          <p:cNvSpPr txBox="1"/>
+          <p:nvPr/>
+        </p:nvSpPr>
+        <p:spPr>
+          <a:xfrm>
+            <a:off x="731520" y="1188720"/>
+            <a:ext cx="10698480" cy="320040"/>
+          </a:xfrm>
+          <a:prstGeom prst="rect">
+            <a:avLst/>
+          </a:prstGeom>
+          <a:noFill/>
+        </p:spPr>
+        <p:txBody>
+          <a:bodyPr wrap="none">
+            <a:spAutoFit/>
+          </a:bodyPr>
+          <a:lstStyle/>
+          <a:p>
+            <a:pPr>
+              <a:defRPr sz="1200">
+                <a:solidFill>
+                  <a:srgbClr val="94A3B8"/>
+                </a:solidFill>
+              </a:defRPr>
+            </a:pPr>
+            <a:r>
+              <a:t>Current city surveillance systems suffer from fragmented hardware, slow alerting, and high cloud costs.</a:t>
+            </a:r>
+          </a:p>
+        </p:txBody>
+      </p:sp>
+      <p:sp>
+        <p:nvSpPr>
+          <p:cNvPr id="6" name="Rectangle 5"/>
+          <p:cNvSpPr/>
+          <p:nvPr/>
+        </p:nvSpPr>
+        <p:spPr>
+          <a:xfrm>
+            <a:off x="731520" y="6309360"/>
+            <a:ext cx="10698480" cy="18288"/>
+          </a:xfrm>
+          <a:prstGeom prst="rect">
+            <a:avLst/>
+          </a:prstGeom>
+          <a:solidFill>
+            <a:srgbClr val="1E293B"/>
+          </a:solidFill>
+          <a:ln>
+            <a:noFill/>
+          </a:ln>
+        </p:spPr>
+        <p:style>
+          <a:lnRef idx="1">
+            <a:schemeClr val="accent1"/>
+          </a:lnRef>
+          <a:fillRef idx="3">
+            <a:schemeClr val="accent1"/>
+          </a:fillRef>
+          <a:effectRef idx="2">
+            <a:schemeClr val="accent1"/>
+          </a:effectRef>
+          <a:fontRef idx="minor">
+            <a:schemeClr val="lt1"/>
+          </a:fontRef>
+        </p:style>
+        <p:txBody>
+          <a:bodyPr rtlCol="0" anchor="ctr"/>
+          <a:lstStyle/>
+          <a:p>
+            <a:pPr algn="ctr"/>
+          </a:p>
+        </p:txBody>
+      </p:sp>
+      <p:sp>
+        <p:nvSpPr>
+          <p:cNvPr id="7" name="TextBox 6"/>
+          <p:cNvSpPr txBox="1"/>
+          <p:nvPr/>
+        </p:nvSpPr>
+        <p:spPr>
+          <a:xfrm>
+            <a:off x="731520" y="6355080"/>
+            <a:ext cx="10698480" cy="365760"/>
+          </a:xfrm>
+          <a:prstGeom prst="rect">
+            <a:avLst/>
+          </a:prstGeom>
+          <a:noFill/>
+        </p:spPr>
+        <p:txBody>
+          <a:bodyPr wrap="none">
+            <a:spAutoFit/>
+          </a:bodyPr>
+          <a:lstStyle/>
+          <a:p>
+            <a:pPr>
+              <a:defRPr sz="1000">
+                <a:solidFill>
+                  <a:srgbClr val="64748B"/>
+                </a:solidFill>
+              </a:defRPr>
+            </a:pPr>
+            <a:r>
+              <a:t>Sentinel AI Surveillance Platform • 100% Self-Hosted • SDC Compliant</a:t>
+            </a:r>
+          </a:p>
+        </p:txBody>
+      </p:sp>
+      <p:sp>
+        <p:nvSpPr>
+          <p:cNvPr id="8" name="TextBox 7"/>
+          <p:cNvSpPr txBox="1"/>
+          <p:nvPr/>
+        </p:nvSpPr>
+        <p:spPr>
+          <a:xfrm>
+            <a:off x="10058400" y="6355080"/>
+            <a:ext cx="1371600" cy="365760"/>
+          </a:xfrm>
+          <a:prstGeom prst="rect">
+            <a:avLst/>
+          </a:prstGeom>
+          <a:noFill/>
+        </p:spPr>
+        <p:txBody>
+          <a:bodyPr wrap="none">
+            <a:spAutoFit/>
+          </a:bodyPr>
+          <a:lstStyle/>
+          <a:p>
+            <a:pPr algn="r">
+              <a:defRPr sz="1000" b="1">
+                <a:solidFill>
+                  <a:srgbClr val="64748B"/>
+                </a:solidFill>
+              </a:defRPr>
+            </a:pPr>
+            <a:r>
+              <a:t>Slide 2 / 8</a:t>
+            </a:r>
+          </a:p>
+        </p:txBody>
+      </p:sp>
+      <p:sp>
+        <p:nvSpPr>
+          <p:cNvPr id="9" name="Rounded Rectangle 8"/>
+          <p:cNvSpPr/>
+          <p:nvPr/>
+        </p:nvSpPr>
+        <p:spPr>
+          <a:xfrm>
+            <a:off x="731520" y="1554480"/>
+            <a:ext cx="3383280" cy="4480560"/>
+          </a:xfrm>
+          <a:prstGeom prst="roundRect">
+            <a:avLst/>
+          </a:prstGeom>
+          <a:solidFill>
+            <a:srgbClr val="131D31"/>
+          </a:solidFill>
+          <a:ln w="15240">
+            <a:solidFill>
+              <a:srgbClr val="1E293B"/>
+            </a:solidFill>
+          </a:ln>
+        </p:spPr>
+        <p:style>
+          <a:lnRef idx="1">
+            <a:schemeClr val="accent1"/>
+          </a:lnRef>
+          <a:fillRef idx="3">
+            <a:schemeClr val="accent1"/>
+          </a:fillRef>
+          <a:effectRef idx="2">
+            <a:schemeClr val="accent1"/>
+          </a:effectRef>
+          <a:fontRef idx="minor">
+            <a:schemeClr val="lt1"/>
+          </a:fontRef>
+        </p:style>
+        <p:txBody>
+          <a:bodyPr rtlCol="0" anchor="ctr"/>
+          <a:lstStyle/>
+          <a:p>
+            <a:pPr algn="ctr"/>
+          </a:p>
+        </p:txBody>
+      </p:sp>
+      <p:sp>
+        <p:nvSpPr>
+          <p:cNvPr id="10" name="Rounded Rectangle 9"/>
+          <p:cNvSpPr/>
+          <p:nvPr/>
+        </p:nvSpPr>
+        <p:spPr>
+          <a:xfrm>
+            <a:off x="731520" y="1554480"/>
+            <a:ext cx="3383280" cy="109728"/>
+          </a:xfrm>
+          <a:prstGeom prst="roundRect">
+            <a:avLst/>
+          </a:prstGeom>
+          <a:solidFill>
+            <a:srgbClr val="EF4444"/>
+          </a:solidFill>
+          <a:ln>
+            <a:noFill/>
+          </a:ln>
+        </p:spPr>
+        <p:style>
+          <a:lnRef idx="1">
+            <a:schemeClr val="accent1"/>
+          </a:lnRef>
+          <a:fillRef idx="3">
+            <a:schemeClr val="accent1"/>
+          </a:fillRef>
+          <a:effectRef idx="2">
+            <a:schemeClr val="accent1"/>
+          </a:effectRef>
+          <a:fontRef idx="minor">
+            <a:schemeClr val="lt1"/>
+          </a:fontRef>
+        </p:style>
+        <p:txBody>
+          <a:bodyPr rtlCol="0" anchor="ctr"/>
+          <a:lstStyle/>
+          <a:p>
+            <a:pPr algn="ctr"/>
+          </a:p>
+        </p:txBody>
+      </p:sp>
+      <p:sp>
+        <p:nvSpPr>
+          <p:cNvPr id="11" name="TextBox 10"/>
+          <p:cNvSpPr txBox="1"/>
+          <p:nvPr/>
+        </p:nvSpPr>
+        <p:spPr>
+          <a:xfrm>
+            <a:off x="960120" y="1719072"/>
+            <a:ext cx="2926080" cy="4160520"/>
+          </a:xfrm>
+          <a:prstGeom prst="rect">
+            <a:avLst/>
+          </a:prstGeom>
+          <a:noFill/>
+        </p:spPr>
+        <p:txBody>
+          <a:bodyPr wrap="square">
+            <a:spAutoFit/>
+          </a:bodyPr>
+          <a:lstStyle/>
+          <a:p>
+            <a:pPr>
+              <a:defRPr sz="1500" b="1">
+                <a:solidFill>
+                  <a:srgbClr val="FFFFFF"/>
+                </a:solidFill>
+              </a:defRPr>
+            </a:pPr>
+            <a:r>
+              <a:t>📹 Multi-Vendor Silos</a:t>
+            </a:r>
+          </a:p>
+          <a:p>
+            <a:pPr>
+              <a:spcBef>
+                <a:spcPts val="300"/>
+              </a:spcBef>
+              <a:defRPr sz="1050">
+                <a:solidFill>
+                  <a:srgbClr val="94A3B8"/>
+                </a:solidFill>
+              </a:defRPr>
+            </a:pPr>
+            <a:r>
+              <a:t>Incompatible Brands &amp; Proprietary VMS</a:t>
+            </a:r>
+          </a:p>
+          <a:p>
+            <a:pPr>
+              <a:spcBef>
+                <a:spcPts val="800"/>
+              </a:spcBef>
+              <a:defRPr sz="1100">
+                <a:solidFill>
+                  <a:srgbClr val="F8FAFC"/>
+                </a:solidFill>
+              </a:defRPr>
+            </a:pPr>
+            <a:r>
+              <a:t>Cities have thousands of cameras from different brands (Hikvision, Dahua, CP Plus, Axis) running incompatible proprietary software.</a:t>
+            </a:r>
+          </a:p>
+          <a:p>
+            <a:pPr>
+              <a:spcBef>
+                <a:spcPts val="800"/>
+              </a:spcBef>
+              <a:defRPr sz="1050">
+                <a:solidFill>
+                  <a:srgbClr val="F87171"/>
+                </a:solidFill>
+              </a:defRPr>
+            </a:pPr>
+            <a:r>
+              <a:t>✖ No unified live video matrix across city zones</a:t>
+            </a:r>
+          </a:p>
+          <a:p>
+            <a:pPr>
+              <a:spcBef>
+                <a:spcPts val="800"/>
+              </a:spcBef>
+              <a:defRPr sz="1050">
+                <a:solidFill>
+                  <a:srgbClr val="F87171"/>
+                </a:solidFill>
+              </a:defRPr>
+            </a:pPr>
+            <a:r>
+              <a:t>✖ Difficult and expensive to add or swap camera brands</a:t>
+            </a:r>
+          </a:p>
+        </p:txBody>
+      </p:sp>
+      <p:sp>
+        <p:nvSpPr>
+          <p:cNvPr id="12" name="Rounded Rectangle 11"/>
+          <p:cNvSpPr/>
+          <p:nvPr/>
+        </p:nvSpPr>
+        <p:spPr>
+          <a:xfrm>
+            <a:off x="4389120" y="1554480"/>
+            <a:ext cx="3383280" cy="4480560"/>
+          </a:xfrm>
+          <a:prstGeom prst="roundRect">
+            <a:avLst/>
+          </a:prstGeom>
+          <a:solidFill>
+            <a:srgbClr val="131D31"/>
+          </a:solidFill>
+          <a:ln w="15240">
+            <a:solidFill>
+              <a:srgbClr val="1E293B"/>
+            </a:solidFill>
+          </a:ln>
+        </p:spPr>
+        <p:style>
+          <a:lnRef idx="1">
+            <a:schemeClr val="accent1"/>
+          </a:lnRef>
+          <a:fillRef idx="3">
+            <a:schemeClr val="accent1"/>
+          </a:fillRef>
+          <a:effectRef idx="2">
+            <a:schemeClr val="accent1"/>
+          </a:effectRef>
+          <a:fontRef idx="minor">
+            <a:schemeClr val="lt1"/>
+          </a:fontRef>
+        </p:style>
+        <p:txBody>
+          <a:bodyPr rtlCol="0" anchor="ctr"/>
+          <a:lstStyle/>
+          <a:p>
+            <a:pPr algn="ctr"/>
+          </a:p>
+        </p:txBody>
+      </p:sp>
+      <p:sp>
+        <p:nvSpPr>
+          <p:cNvPr id="13" name="Rounded Rectangle 12"/>
+          <p:cNvSpPr/>
+          <p:nvPr/>
+        </p:nvSpPr>
+        <p:spPr>
+          <a:xfrm>
+            <a:off x="4389120" y="1554480"/>
+            <a:ext cx="3383280" cy="109728"/>
+          </a:xfrm>
+          <a:prstGeom prst="roundRect">
+            <a:avLst/>
+          </a:prstGeom>
+          <a:solidFill>
+            <a:srgbClr val="F59E0B"/>
+          </a:solidFill>
+          <a:ln>
+            <a:noFill/>
+          </a:ln>
+        </p:spPr>
+        <p:style>
+          <a:lnRef idx="1">
+            <a:schemeClr val="accent1"/>
+          </a:lnRef>
+          <a:fillRef idx="3">
+            <a:schemeClr val="accent1"/>
+          </a:fillRef>
+          <a:effectRef idx="2">
+            <a:schemeClr val="accent1"/>
+          </a:effectRef>
+          <a:fontRef idx="minor">
+            <a:schemeClr val="lt1"/>
+          </a:fontRef>
+        </p:style>
+        <p:txBody>
+          <a:bodyPr rtlCol="0" anchor="ctr"/>
+          <a:lstStyle/>
+          <a:p>
+            <a:pPr algn="ctr"/>
+          </a:p>
+        </p:txBody>
+      </p:sp>
+      <p:sp>
+        <p:nvSpPr>
+          <p:cNvPr id="14" name="TextBox 13"/>
+          <p:cNvSpPr txBox="1"/>
+          <p:nvPr/>
+        </p:nvSpPr>
+        <p:spPr>
+          <a:xfrm>
+            <a:off x="4617720" y="1719072"/>
+            <a:ext cx="2926080" cy="4160520"/>
+          </a:xfrm>
+          <a:prstGeom prst="rect">
+            <a:avLst/>
+          </a:prstGeom>
+          <a:noFill/>
+        </p:spPr>
+        <p:txBody>
+          <a:bodyPr wrap="square">
+            <a:spAutoFit/>
+          </a:bodyPr>
+          <a:lstStyle/>
+          <a:p>
+            <a:pPr>
+              <a:defRPr sz="1500" b="1">
+                <a:solidFill>
+                  <a:srgbClr val="FFFFFF"/>
+                </a:solidFill>
+              </a:defRPr>
+            </a:pPr>
+            <a:r>
+              <a:t>🔍 Complex Indian Plates</a:t>
+            </a:r>
+          </a:p>
+          <a:p>
+            <a:pPr>
+              <a:spcBef>
+                <a:spcPts val="300"/>
+              </a:spcBef>
+              <a:defRPr sz="1050">
+                <a:solidFill>
+                  <a:srgbClr val="94A3B8"/>
+                </a:solidFill>
+              </a:defRPr>
+            </a:pPr>
+            <a:r>
+              <a:t>Foreign OCRs Fail on Indian Roads</a:t>
+            </a:r>
+          </a:p>
+          <a:p>
+            <a:pPr>
+              <a:spcBef>
+                <a:spcPts val="800"/>
+              </a:spcBef>
+              <a:defRPr sz="1100">
+                <a:solidFill>
+                  <a:srgbClr val="F8FAFC"/>
+                </a:solidFill>
+              </a:defRPr>
+            </a:pPr>
+            <a:r>
+              <a:t>Standard foreign OCR systems fail miserably on Indian roads due to high font variations, 2-line plates, commercial yellow plates, and dust/glare.</a:t>
+            </a:r>
+          </a:p>
+          <a:p>
+            <a:pPr>
+              <a:spcBef>
+                <a:spcPts val="800"/>
+              </a:spcBef>
+              <a:defRPr sz="1050">
+                <a:solidFill>
+                  <a:srgbClr val="F87171"/>
+                </a:solidFill>
+              </a:defRPr>
+            </a:pPr>
+            <a:r>
+              <a:t>✖ 40%+ OCR errors on Indian standard fonts</a:t>
+            </a:r>
+          </a:p>
+          <a:p>
+            <a:pPr>
+              <a:spcBef>
+                <a:spcPts val="800"/>
+              </a:spcBef>
+              <a:defRPr sz="1050">
+                <a:solidFill>
+                  <a:srgbClr val="F87171"/>
+                </a:solidFill>
+              </a:defRPr>
+            </a:pPr>
+            <a:r>
+              <a:t>✖ Night-vision headlight glare and angle distortion failures</a:t>
+            </a:r>
+          </a:p>
+        </p:txBody>
+      </p:sp>
+      <p:sp>
+        <p:nvSpPr>
+          <p:cNvPr id="15" name="Rounded Rectangle 14"/>
+          <p:cNvSpPr/>
+          <p:nvPr/>
+        </p:nvSpPr>
+        <p:spPr>
+          <a:xfrm>
+            <a:off x="8046720" y="1554480"/>
+            <a:ext cx="3383280" cy="4480560"/>
+          </a:xfrm>
+          <a:prstGeom prst="roundRect">
+            <a:avLst/>
+          </a:prstGeom>
+          <a:solidFill>
+            <a:srgbClr val="131D31"/>
+          </a:solidFill>
+          <a:ln w="15240">
+            <a:solidFill>
+              <a:srgbClr val="1E293B"/>
+            </a:solidFill>
+          </a:ln>
+        </p:spPr>
+        <p:style>
+          <a:lnRef idx="1">
+            <a:schemeClr val="accent1"/>
+          </a:lnRef>
+          <a:fillRef idx="3">
+            <a:schemeClr val="accent1"/>
+          </a:fillRef>
+          <a:effectRef idx="2">
+            <a:schemeClr val="accent1"/>
+          </a:effectRef>
+          <a:fontRef idx="minor">
+            <a:schemeClr val="lt1"/>
+          </a:fontRef>
+        </p:style>
+        <p:txBody>
+          <a:bodyPr rtlCol="0" anchor="ctr"/>
+          <a:lstStyle/>
+          <a:p>
+            <a:pPr algn="ctr"/>
+          </a:p>
+        </p:txBody>
+      </p:sp>
+      <p:sp>
+        <p:nvSpPr>
+          <p:cNvPr id="16" name="Rounded Rectangle 15"/>
+          <p:cNvSpPr/>
+          <p:nvPr/>
+        </p:nvSpPr>
+        <p:spPr>
+          <a:xfrm>
+            <a:off x="8046720" y="1554480"/>
+            <a:ext cx="3383280" cy="109728"/>
+          </a:xfrm>
+          <a:prstGeom prst="roundRect">
+            <a:avLst/>
+          </a:prstGeom>
+          <a:solidFill>
+            <a:srgbClr val="EF4444"/>
+          </a:solidFill>
+          <a:ln>
+            <a:noFill/>
+          </a:ln>
+        </p:spPr>
+        <p:style>
+          <a:lnRef idx="1">
+            <a:schemeClr val="accent1"/>
+          </a:lnRef>
+          <a:fillRef idx="3">
+            <a:schemeClr val="accent1"/>
+          </a:fillRef>
+          <a:effectRef idx="2">
+            <a:schemeClr val="accent1"/>
+          </a:effectRef>
+          <a:fontRef idx="minor">
+            <a:schemeClr val="lt1"/>
+          </a:fontRef>
+        </p:style>
+        <p:txBody>
+          <a:bodyPr rtlCol="0" anchor="ctr"/>
+          <a:lstStyle/>
+          <a:p>
+            <a:pPr algn="ctr"/>
+          </a:p>
+        </p:txBody>
+      </p:sp>
+      <p:sp>
+        <p:nvSpPr>
+          <p:cNvPr id="17" name="TextBox 16"/>
+          <p:cNvSpPr txBox="1"/>
+          <p:nvPr/>
+        </p:nvSpPr>
+        <p:spPr>
+          <a:xfrm>
+            <a:off x="8275320" y="1719072"/>
+            <a:ext cx="2926080" cy="4160520"/>
+          </a:xfrm>
+          <a:prstGeom prst="rect">
+            <a:avLst/>
+          </a:prstGeom>
+          <a:noFill/>
+        </p:spPr>
+        <p:txBody>
+          <a:bodyPr wrap="square">
+            <a:spAutoFit/>
+          </a:bodyPr>
+          <a:lstStyle/>
+          <a:p>
+            <a:pPr>
+              <a:defRPr sz="1500" b="1">
+                <a:solidFill>
+                  <a:srgbClr val="FFFFFF"/>
+                </a:solidFill>
+              </a:defRPr>
+            </a:pPr>
+            <a:r>
+              <a:t>⏱️ Delayed Suspect Intercept</a:t>
+            </a:r>
+          </a:p>
+          <a:p>
+            <a:pPr>
+              <a:spcBef>
+                <a:spcPts val="300"/>
+              </a:spcBef>
+              <a:defRPr sz="1050">
+                <a:solidFill>
+                  <a:srgbClr val="94A3B8"/>
+                </a:solidFill>
+              </a:defRPr>
+            </a:pPr>
+            <a:r>
+              <a:t>Slow Manual Search &amp; Cloud Lock-in</a:t>
+            </a:r>
+          </a:p>
+          <a:p>
+            <a:pPr>
+              <a:spcBef>
+                <a:spcPts val="800"/>
+              </a:spcBef>
+              <a:defRPr sz="1100">
+                <a:solidFill>
+                  <a:srgbClr val="F8FAFC"/>
+                </a:solidFill>
+              </a:defRPr>
+            </a:pPr>
+            <a:r>
+              <a:t>Stolen vehicles and wanted criminals cross checkpoints unnoticed because manual monitoring cannot check hundreds of streams in real time.</a:t>
+            </a:r>
+          </a:p>
+          <a:p>
+            <a:pPr>
+              <a:spcBef>
+                <a:spcPts val="800"/>
+              </a:spcBef>
+              <a:defRPr sz="1050">
+                <a:solidFill>
+                  <a:srgbClr val="F87171"/>
+                </a:solidFill>
+              </a:defRPr>
+            </a:pPr>
+            <a:r>
+              <a:t>✖ Hours lost in manual DVR video playback</a:t>
+            </a:r>
+          </a:p>
+          <a:p>
+            <a:pPr>
+              <a:spcBef>
+                <a:spcPts val="800"/>
+              </a:spcBef>
+              <a:defRPr sz="1050">
+                <a:solidFill>
+                  <a:srgbClr val="F87171"/>
+                </a:solidFill>
+              </a:defRPr>
+            </a:pPr>
+            <a:r>
+              <a:t>✖ Exorbitant per-camera cloud subscription license fees</a:t>
+            </a:r>
+          </a:p>
+        </p:txBody>
+      </p:sp>
     </p:spTree>
   </p:cSld>
   <p:clrMapOvr>
@@ -3179,20 +4416,12 @@
         <p:nvPr/>
       </p:nvGrpSpPr>
       <p:grpSpPr/>
-      <p:pic>
-        <p:nvPicPr>
-          <p:cNvPr id="2" name="Picture 1" descr="slide_2.png"/>
-          <p:cNvPicPr>
-            <a:picLocks noChangeAspect="1"/>
-          </p:cNvPicPr>
-          <p:nvPr/>
-        </p:nvPicPr>
-        <p:blipFill>
-          <a:blip r:embed="rId2"/>
-          <a:stretch>
-            <a:fillRect/>
-          </a:stretch>
-        </p:blipFill>
+      <p:sp>
+        <p:nvSpPr>
+          <p:cNvPr id="2" name="Rectangle 1"/>
+          <p:cNvSpPr/>
+          <p:nvPr/>
+        </p:nvSpPr>
         <p:spPr>
           <a:xfrm>
             <a:off x="0" y="0"/>
@@ -3201,8 +4430,1064 @@
           <a:prstGeom prst="rect">
             <a:avLst/>
           </a:prstGeom>
-        </p:spPr>
-      </p:pic>
+          <a:solidFill>
+            <a:srgbClr val="0B0F19"/>
+          </a:solidFill>
+          <a:ln>
+            <a:noFill/>
+          </a:ln>
+        </p:spPr>
+        <p:style>
+          <a:lnRef idx="1">
+            <a:schemeClr val="accent1"/>
+          </a:lnRef>
+          <a:fillRef idx="3">
+            <a:schemeClr val="accent1"/>
+          </a:fillRef>
+          <a:effectRef idx="2">
+            <a:schemeClr val="accent1"/>
+          </a:effectRef>
+          <a:fontRef idx="minor">
+            <a:schemeClr val="lt1"/>
+          </a:fontRef>
+        </p:style>
+        <p:txBody>
+          <a:bodyPr rtlCol="0" anchor="ctr"/>
+          <a:lstStyle/>
+          <a:p>
+            <a:pPr algn="ctr"/>
+          </a:p>
+        </p:txBody>
+      </p:sp>
+      <p:sp>
+        <p:nvSpPr>
+          <p:cNvPr id="3" name="Rounded Rectangle 2"/>
+          <p:cNvSpPr/>
+          <p:nvPr/>
+        </p:nvSpPr>
+        <p:spPr>
+          <a:xfrm>
+            <a:off x="731520" y="365760"/>
+            <a:ext cx="2926080" cy="292608"/>
+          </a:xfrm>
+          <a:prstGeom prst="roundRect">
+            <a:avLst/>
+          </a:prstGeom>
+          <a:solidFill>
+            <a:srgbClr val="0F1E30"/>
+          </a:solidFill>
+          <a:ln w="12700">
+            <a:solidFill>
+              <a:srgbClr val="06B6D4"/>
+            </a:solidFill>
+          </a:ln>
+        </p:spPr>
+        <p:style>
+          <a:lnRef idx="1">
+            <a:schemeClr val="accent1"/>
+          </a:lnRef>
+          <a:fillRef idx="3">
+            <a:schemeClr val="accent1"/>
+          </a:fillRef>
+          <a:effectRef idx="2">
+            <a:schemeClr val="accent1"/>
+          </a:effectRef>
+          <a:fontRef idx="minor">
+            <a:schemeClr val="lt1"/>
+          </a:fontRef>
+        </p:style>
+        <p:txBody>
+          <a:bodyPr rtlCol="0" anchor="ctr"/>
+          <a:lstStyle/>
+          <a:p>
+            <a:pPr algn="ctr">
+              <a:defRPr sz="1000" b="1">
+                <a:solidFill>
+                  <a:srgbClr val="06B6D4"/>
+                </a:solidFill>
+              </a:defRPr>
+            </a:pPr>
+            <a:r>
+              <a:t>🛡️ SYSTEM TOPOLOGY</a:t>
+            </a:r>
+          </a:p>
+        </p:txBody>
+      </p:sp>
+      <p:sp>
+        <p:nvSpPr>
+          <p:cNvPr id="4" name="TextBox 3"/>
+          <p:cNvSpPr txBox="1"/>
+          <p:nvPr/>
+        </p:nvSpPr>
+        <p:spPr>
+          <a:xfrm>
+            <a:off x="731520" y="685800"/>
+            <a:ext cx="10698480" cy="502920"/>
+          </a:xfrm>
+          <a:prstGeom prst="rect">
+            <a:avLst/>
+          </a:prstGeom>
+          <a:noFill/>
+        </p:spPr>
+        <p:txBody>
+          <a:bodyPr wrap="none">
+            <a:spAutoFit/>
+          </a:bodyPr>
+          <a:lstStyle/>
+          <a:p>
+            <a:pPr>
+              <a:defRPr sz="2200" b="1">
+                <a:solidFill>
+                  <a:srgbClr val="FFFFFF"/>
+                </a:solidFill>
+              </a:defRPr>
+            </a:pPr>
+            <a:r>
+              <a:t>High-Level Architecture &amp; Component Stack</a:t>
+            </a:r>
+          </a:p>
+        </p:txBody>
+      </p:sp>
+      <p:sp>
+        <p:nvSpPr>
+          <p:cNvPr id="5" name="TextBox 4"/>
+          <p:cNvSpPr txBox="1"/>
+          <p:nvPr/>
+        </p:nvSpPr>
+        <p:spPr>
+          <a:xfrm>
+            <a:off x="731520" y="1188720"/>
+            <a:ext cx="10698480" cy="320040"/>
+          </a:xfrm>
+          <a:prstGeom prst="rect">
+            <a:avLst/>
+          </a:prstGeom>
+          <a:noFill/>
+        </p:spPr>
+        <p:txBody>
+          <a:bodyPr wrap="none">
+            <a:spAutoFit/>
+          </a:bodyPr>
+          <a:lstStyle/>
+          <a:p>
+            <a:pPr>
+              <a:defRPr sz="1200">
+                <a:solidFill>
+                  <a:srgbClr val="94A3B8"/>
+                </a:solidFill>
+              </a:defRPr>
+            </a:pPr>
+            <a:r>
+              <a:t>Modular 5-tier architecture built for non-blocking asynchronous processing and extreme scalability.</a:t>
+            </a:r>
+          </a:p>
+        </p:txBody>
+      </p:sp>
+      <p:sp>
+        <p:nvSpPr>
+          <p:cNvPr id="6" name="Rectangle 5"/>
+          <p:cNvSpPr/>
+          <p:nvPr/>
+        </p:nvSpPr>
+        <p:spPr>
+          <a:xfrm>
+            <a:off x="731520" y="6309360"/>
+            <a:ext cx="10698480" cy="18288"/>
+          </a:xfrm>
+          <a:prstGeom prst="rect">
+            <a:avLst/>
+          </a:prstGeom>
+          <a:solidFill>
+            <a:srgbClr val="1E293B"/>
+          </a:solidFill>
+          <a:ln>
+            <a:noFill/>
+          </a:ln>
+        </p:spPr>
+        <p:style>
+          <a:lnRef idx="1">
+            <a:schemeClr val="accent1"/>
+          </a:lnRef>
+          <a:fillRef idx="3">
+            <a:schemeClr val="accent1"/>
+          </a:fillRef>
+          <a:effectRef idx="2">
+            <a:schemeClr val="accent1"/>
+          </a:effectRef>
+          <a:fontRef idx="minor">
+            <a:schemeClr val="lt1"/>
+          </a:fontRef>
+        </p:style>
+        <p:txBody>
+          <a:bodyPr rtlCol="0" anchor="ctr"/>
+          <a:lstStyle/>
+          <a:p>
+            <a:pPr algn="ctr"/>
+          </a:p>
+        </p:txBody>
+      </p:sp>
+      <p:sp>
+        <p:nvSpPr>
+          <p:cNvPr id="7" name="TextBox 6"/>
+          <p:cNvSpPr txBox="1"/>
+          <p:nvPr/>
+        </p:nvSpPr>
+        <p:spPr>
+          <a:xfrm>
+            <a:off x="731520" y="6355080"/>
+            <a:ext cx="10698480" cy="365760"/>
+          </a:xfrm>
+          <a:prstGeom prst="rect">
+            <a:avLst/>
+          </a:prstGeom>
+          <a:noFill/>
+        </p:spPr>
+        <p:txBody>
+          <a:bodyPr wrap="none">
+            <a:spAutoFit/>
+          </a:bodyPr>
+          <a:lstStyle/>
+          <a:p>
+            <a:pPr>
+              <a:defRPr sz="1000">
+                <a:solidFill>
+                  <a:srgbClr val="64748B"/>
+                </a:solidFill>
+              </a:defRPr>
+            </a:pPr>
+            <a:r>
+              <a:t>Sentinel AI Surveillance Platform • 100% Self-Hosted • SDC Compliant</a:t>
+            </a:r>
+          </a:p>
+        </p:txBody>
+      </p:sp>
+      <p:sp>
+        <p:nvSpPr>
+          <p:cNvPr id="8" name="TextBox 7"/>
+          <p:cNvSpPr txBox="1"/>
+          <p:nvPr/>
+        </p:nvSpPr>
+        <p:spPr>
+          <a:xfrm>
+            <a:off x="10058400" y="6355080"/>
+            <a:ext cx="1371600" cy="365760"/>
+          </a:xfrm>
+          <a:prstGeom prst="rect">
+            <a:avLst/>
+          </a:prstGeom>
+          <a:noFill/>
+        </p:spPr>
+        <p:txBody>
+          <a:bodyPr wrap="none">
+            <a:spAutoFit/>
+          </a:bodyPr>
+          <a:lstStyle/>
+          <a:p>
+            <a:pPr algn="r">
+              <a:defRPr sz="1000" b="1">
+                <a:solidFill>
+                  <a:srgbClr val="64748B"/>
+                </a:solidFill>
+              </a:defRPr>
+            </a:pPr>
+            <a:r>
+              <a:t>Slide 3 / 8</a:t>
+            </a:r>
+          </a:p>
+        </p:txBody>
+      </p:sp>
+      <p:sp>
+        <p:nvSpPr>
+          <p:cNvPr id="9" name="Rounded Rectangle 8"/>
+          <p:cNvSpPr/>
+          <p:nvPr/>
+        </p:nvSpPr>
+        <p:spPr>
+          <a:xfrm>
+            <a:off x="731520" y="1554480"/>
+            <a:ext cx="2468880" cy="4480560"/>
+          </a:xfrm>
+          <a:prstGeom prst="roundRect">
+            <a:avLst/>
+          </a:prstGeom>
+          <a:solidFill>
+            <a:srgbClr val="131D31"/>
+          </a:solidFill>
+          <a:ln w="15240">
+            <a:solidFill>
+              <a:srgbClr val="1E293B"/>
+            </a:solidFill>
+          </a:ln>
+        </p:spPr>
+        <p:style>
+          <a:lnRef idx="1">
+            <a:schemeClr val="accent1"/>
+          </a:lnRef>
+          <a:fillRef idx="3">
+            <a:schemeClr val="accent1"/>
+          </a:fillRef>
+          <a:effectRef idx="2">
+            <a:schemeClr val="accent1"/>
+          </a:effectRef>
+          <a:fontRef idx="minor">
+            <a:schemeClr val="lt1"/>
+          </a:fontRef>
+        </p:style>
+        <p:txBody>
+          <a:bodyPr rtlCol="0" anchor="ctr"/>
+          <a:lstStyle/>
+          <a:p>
+            <a:pPr algn="ctr"/>
+          </a:p>
+        </p:txBody>
+      </p:sp>
+      <p:sp>
+        <p:nvSpPr>
+          <p:cNvPr id="10" name="Rounded Rectangle 9"/>
+          <p:cNvSpPr/>
+          <p:nvPr/>
+        </p:nvSpPr>
+        <p:spPr>
+          <a:xfrm>
+            <a:off x="731520" y="1554480"/>
+            <a:ext cx="2468880" cy="109728"/>
+          </a:xfrm>
+          <a:prstGeom prst="roundRect">
+            <a:avLst/>
+          </a:prstGeom>
+          <a:solidFill>
+            <a:srgbClr val="06B6D4"/>
+          </a:solidFill>
+          <a:ln>
+            <a:noFill/>
+          </a:ln>
+        </p:spPr>
+        <p:style>
+          <a:lnRef idx="1">
+            <a:schemeClr val="accent1"/>
+          </a:lnRef>
+          <a:fillRef idx="3">
+            <a:schemeClr val="accent1"/>
+          </a:fillRef>
+          <a:effectRef idx="2">
+            <a:schemeClr val="accent1"/>
+          </a:effectRef>
+          <a:fontRef idx="minor">
+            <a:schemeClr val="lt1"/>
+          </a:fontRef>
+        </p:style>
+        <p:txBody>
+          <a:bodyPr rtlCol="0" anchor="ctr"/>
+          <a:lstStyle/>
+          <a:p>
+            <a:pPr algn="ctr"/>
+          </a:p>
+        </p:txBody>
+      </p:sp>
+      <p:sp>
+        <p:nvSpPr>
+          <p:cNvPr id="11" name="TextBox 10"/>
+          <p:cNvSpPr txBox="1"/>
+          <p:nvPr/>
+        </p:nvSpPr>
+        <p:spPr>
+          <a:xfrm>
+            <a:off x="960120" y="1719072"/>
+            <a:ext cx="2011680" cy="4160520"/>
+          </a:xfrm>
+          <a:prstGeom prst="rect">
+            <a:avLst/>
+          </a:prstGeom>
+          <a:noFill/>
+        </p:spPr>
+        <p:txBody>
+          <a:bodyPr wrap="square">
+            <a:spAutoFit/>
+          </a:bodyPr>
+          <a:lstStyle/>
+          <a:p>
+            <a:pPr>
+              <a:defRPr sz="1500" b="1">
+                <a:solidFill>
+                  <a:srgbClr val="FFFFFF"/>
+                </a:solidFill>
+              </a:defRPr>
+            </a:pPr>
+            <a:r>
+              <a:t>1️⃣ Ingestion Tier</a:t>
+            </a:r>
+          </a:p>
+          <a:p>
+            <a:pPr>
+              <a:spcBef>
+                <a:spcPts val="300"/>
+              </a:spcBef>
+              <a:defRPr sz="1050">
+                <a:solidFill>
+                  <a:srgbClr val="94A3B8"/>
+                </a:solidFill>
+              </a:defRPr>
+            </a:pPr>
+            <a:r>
+              <a:t>MediaMTX Edge Gateway</a:t>
+            </a:r>
+          </a:p>
+          <a:p>
+            <a:pPr>
+              <a:spcBef>
+                <a:spcPts val="1000"/>
+              </a:spcBef>
+              <a:defRPr sz="1100">
+                <a:solidFill>
+                  <a:srgbClr val="F8FAFC"/>
+                </a:solidFill>
+              </a:defRPr>
+            </a:pPr>
+            <a:r>
+              <a:t>• Multi-Vendor RTSP/ONVIF Ingest</a:t>
+            </a:r>
+          </a:p>
+          <a:p>
+            <a:pPr>
+              <a:spcBef>
+                <a:spcPts val="1000"/>
+              </a:spcBef>
+              <a:defRPr sz="1100">
+                <a:solidFill>
+                  <a:srgbClr val="F8FAFC"/>
+                </a:solidFill>
+              </a:defRPr>
+            </a:pPr>
+            <a:r>
+              <a:t>• WebRTC / LL-HLS Video Proxy</a:t>
+            </a:r>
+          </a:p>
+          <a:p>
+            <a:pPr>
+              <a:spcBef>
+                <a:spcPts val="1000"/>
+              </a:spcBef>
+              <a:defRPr sz="1100">
+                <a:solidFill>
+                  <a:srgbClr val="F8FAFC"/>
+                </a:solidFill>
+              </a:defRPr>
+            </a:pPr>
+            <a:r>
+              <a:t>• Auto-Reconnect Watchdog</a:t>
+            </a:r>
+          </a:p>
+          <a:p>
+            <a:pPr>
+              <a:spcBef>
+                <a:spcPts val="1000"/>
+              </a:spcBef>
+              <a:defRPr sz="1100">
+                <a:solidFill>
+                  <a:srgbClr val="F8FAFC"/>
+                </a:solidFill>
+              </a:defRPr>
+            </a:pPr>
+            <a:r>
+              <a:t>• &lt; 150ms Stream Latency</a:t>
+            </a:r>
+          </a:p>
+        </p:txBody>
+      </p:sp>
+      <p:sp>
+        <p:nvSpPr>
+          <p:cNvPr id="12" name="Rounded Rectangle 11"/>
+          <p:cNvSpPr/>
+          <p:nvPr/>
+        </p:nvSpPr>
+        <p:spPr>
+          <a:xfrm>
+            <a:off x="3474720" y="1554480"/>
+            <a:ext cx="2468880" cy="4480560"/>
+          </a:xfrm>
+          <a:prstGeom prst="roundRect">
+            <a:avLst/>
+          </a:prstGeom>
+          <a:solidFill>
+            <a:srgbClr val="131D31"/>
+          </a:solidFill>
+          <a:ln w="15240">
+            <a:solidFill>
+              <a:srgbClr val="1E293B"/>
+            </a:solidFill>
+          </a:ln>
+        </p:spPr>
+        <p:style>
+          <a:lnRef idx="1">
+            <a:schemeClr val="accent1"/>
+          </a:lnRef>
+          <a:fillRef idx="3">
+            <a:schemeClr val="accent1"/>
+          </a:fillRef>
+          <a:effectRef idx="2">
+            <a:schemeClr val="accent1"/>
+          </a:effectRef>
+          <a:fontRef idx="minor">
+            <a:schemeClr val="lt1"/>
+          </a:fontRef>
+        </p:style>
+        <p:txBody>
+          <a:bodyPr rtlCol="0" anchor="ctr"/>
+          <a:lstStyle/>
+          <a:p>
+            <a:pPr algn="ctr"/>
+          </a:p>
+        </p:txBody>
+      </p:sp>
+      <p:sp>
+        <p:nvSpPr>
+          <p:cNvPr id="13" name="Rounded Rectangle 12"/>
+          <p:cNvSpPr/>
+          <p:nvPr/>
+        </p:nvSpPr>
+        <p:spPr>
+          <a:xfrm>
+            <a:off x="3474720" y="1554480"/>
+            <a:ext cx="2468880" cy="109728"/>
+          </a:xfrm>
+          <a:prstGeom prst="roundRect">
+            <a:avLst/>
+          </a:prstGeom>
+          <a:solidFill>
+            <a:srgbClr val="A855F7"/>
+          </a:solidFill>
+          <a:ln>
+            <a:noFill/>
+          </a:ln>
+        </p:spPr>
+        <p:style>
+          <a:lnRef idx="1">
+            <a:schemeClr val="accent1"/>
+          </a:lnRef>
+          <a:fillRef idx="3">
+            <a:schemeClr val="accent1"/>
+          </a:fillRef>
+          <a:effectRef idx="2">
+            <a:schemeClr val="accent1"/>
+          </a:effectRef>
+          <a:fontRef idx="minor">
+            <a:schemeClr val="lt1"/>
+          </a:fontRef>
+        </p:style>
+        <p:txBody>
+          <a:bodyPr rtlCol="0" anchor="ctr"/>
+          <a:lstStyle/>
+          <a:p>
+            <a:pPr algn="ctr"/>
+          </a:p>
+        </p:txBody>
+      </p:sp>
+      <p:sp>
+        <p:nvSpPr>
+          <p:cNvPr id="14" name="TextBox 13"/>
+          <p:cNvSpPr txBox="1"/>
+          <p:nvPr/>
+        </p:nvSpPr>
+        <p:spPr>
+          <a:xfrm>
+            <a:off x="3703320" y="1719072"/>
+            <a:ext cx="2011680" cy="4160520"/>
+          </a:xfrm>
+          <a:prstGeom prst="rect">
+            <a:avLst/>
+          </a:prstGeom>
+          <a:noFill/>
+        </p:spPr>
+        <p:txBody>
+          <a:bodyPr wrap="square">
+            <a:spAutoFit/>
+          </a:bodyPr>
+          <a:lstStyle/>
+          <a:p>
+            <a:pPr>
+              <a:defRPr sz="1500" b="1">
+                <a:solidFill>
+                  <a:srgbClr val="FFFFFF"/>
+                </a:solidFill>
+              </a:defRPr>
+            </a:pPr>
+            <a:r>
+              <a:t>2️⃣ AI Vision Core</a:t>
+            </a:r>
+          </a:p>
+          <a:p>
+            <a:pPr>
+              <a:spcBef>
+                <a:spcPts val="300"/>
+              </a:spcBef>
+              <a:defRPr sz="1050">
+                <a:solidFill>
+                  <a:srgbClr val="94A3B8"/>
+                </a:solidFill>
+              </a:defRPr>
+            </a:pPr>
+            <a:r>
+              <a:t>YOLOv8 + PP-OCRv4</a:t>
+            </a:r>
+          </a:p>
+          <a:p>
+            <a:pPr>
+              <a:spcBef>
+                <a:spcPts val="1000"/>
+              </a:spcBef>
+              <a:defRPr sz="1100">
+                <a:solidFill>
+                  <a:srgbClr val="F8FAFC"/>
+                </a:solidFill>
+              </a:defRPr>
+            </a:pPr>
+            <a:r>
+              <a:t>• Dual-Head Vehicle &amp; Plate</a:t>
+            </a:r>
+          </a:p>
+          <a:p>
+            <a:pPr>
+              <a:spcBef>
+                <a:spcPts val="1000"/>
+              </a:spcBef>
+              <a:defRPr sz="1100">
+                <a:solidFill>
+                  <a:srgbClr val="F8FAFC"/>
+                </a:solidFill>
+              </a:defRPr>
+            </a:pPr>
+            <a:r>
+              <a:t>• CLAHE Contrast Normalization</a:t>
+            </a:r>
+          </a:p>
+          <a:p>
+            <a:pPr>
+              <a:spcBef>
+                <a:spcPts val="1000"/>
+              </a:spcBef>
+              <a:defRPr sz="1100">
+                <a:solidFill>
+                  <a:srgbClr val="F8FAFC"/>
+                </a:solidFill>
+              </a:defRPr>
+            </a:pPr>
+            <a:r>
+              <a:t>• PP-OCRv4 Deep Text Engine</a:t>
+            </a:r>
+          </a:p>
+          <a:p>
+            <a:pPr>
+              <a:spcBef>
+                <a:spcPts val="1000"/>
+              </a:spcBef>
+              <a:defRPr sz="1100">
+                <a:solidFill>
+                  <a:srgbClr val="F8FAFC"/>
+                </a:solidFill>
+              </a:defRPr>
+            </a:pPr>
+            <a:r>
+              <a:t>• Indian LP Syntax Matcher</a:t>
+            </a:r>
+          </a:p>
+        </p:txBody>
+      </p:sp>
+      <p:sp>
+        <p:nvSpPr>
+          <p:cNvPr id="15" name="Rounded Rectangle 14"/>
+          <p:cNvSpPr/>
+          <p:nvPr/>
+        </p:nvSpPr>
+        <p:spPr>
+          <a:xfrm>
+            <a:off x="6217920" y="1554480"/>
+            <a:ext cx="2468880" cy="4480560"/>
+          </a:xfrm>
+          <a:prstGeom prst="roundRect">
+            <a:avLst/>
+          </a:prstGeom>
+          <a:solidFill>
+            <a:srgbClr val="131D31"/>
+          </a:solidFill>
+          <a:ln w="15240">
+            <a:solidFill>
+              <a:srgbClr val="1E293B"/>
+            </a:solidFill>
+          </a:ln>
+        </p:spPr>
+        <p:style>
+          <a:lnRef idx="1">
+            <a:schemeClr val="accent1"/>
+          </a:lnRef>
+          <a:fillRef idx="3">
+            <a:schemeClr val="accent1"/>
+          </a:fillRef>
+          <a:effectRef idx="2">
+            <a:schemeClr val="accent1"/>
+          </a:effectRef>
+          <a:fontRef idx="minor">
+            <a:schemeClr val="lt1"/>
+          </a:fontRef>
+        </p:style>
+        <p:txBody>
+          <a:bodyPr rtlCol="0" anchor="ctr"/>
+          <a:lstStyle/>
+          <a:p>
+            <a:pPr algn="ctr"/>
+          </a:p>
+        </p:txBody>
+      </p:sp>
+      <p:sp>
+        <p:nvSpPr>
+          <p:cNvPr id="16" name="Rounded Rectangle 15"/>
+          <p:cNvSpPr/>
+          <p:nvPr/>
+        </p:nvSpPr>
+        <p:spPr>
+          <a:xfrm>
+            <a:off x="6217920" y="1554480"/>
+            <a:ext cx="2468880" cy="109728"/>
+          </a:xfrm>
+          <a:prstGeom prst="roundRect">
+            <a:avLst/>
+          </a:prstGeom>
+          <a:solidFill>
+            <a:srgbClr val="F59E0B"/>
+          </a:solidFill>
+          <a:ln>
+            <a:noFill/>
+          </a:ln>
+        </p:spPr>
+        <p:style>
+          <a:lnRef idx="1">
+            <a:schemeClr val="accent1"/>
+          </a:lnRef>
+          <a:fillRef idx="3">
+            <a:schemeClr val="accent1"/>
+          </a:fillRef>
+          <a:effectRef idx="2">
+            <a:schemeClr val="accent1"/>
+          </a:effectRef>
+          <a:fontRef idx="minor">
+            <a:schemeClr val="lt1"/>
+          </a:fontRef>
+        </p:style>
+        <p:txBody>
+          <a:bodyPr rtlCol="0" anchor="ctr"/>
+          <a:lstStyle/>
+          <a:p>
+            <a:pPr algn="ctr"/>
+          </a:p>
+        </p:txBody>
+      </p:sp>
+      <p:sp>
+        <p:nvSpPr>
+          <p:cNvPr id="17" name="TextBox 16"/>
+          <p:cNvSpPr txBox="1"/>
+          <p:nvPr/>
+        </p:nvSpPr>
+        <p:spPr>
+          <a:xfrm>
+            <a:off x="6446520" y="1719072"/>
+            <a:ext cx="2011680" cy="4160520"/>
+          </a:xfrm>
+          <a:prstGeom prst="rect">
+            <a:avLst/>
+          </a:prstGeom>
+          <a:noFill/>
+        </p:spPr>
+        <p:txBody>
+          <a:bodyPr wrap="square">
+            <a:spAutoFit/>
+          </a:bodyPr>
+          <a:lstStyle/>
+          <a:p>
+            <a:pPr>
+              <a:defRPr sz="1500" b="1">
+                <a:solidFill>
+                  <a:srgbClr val="FFFFFF"/>
+                </a:solidFill>
+              </a:defRPr>
+            </a:pPr>
+            <a:r>
+              <a:t>3️⃣ Core Backend</a:t>
+            </a:r>
+          </a:p>
+          <a:p>
+            <a:pPr>
+              <a:spcBef>
+                <a:spcPts val="300"/>
+              </a:spcBef>
+              <a:defRPr sz="1050">
+                <a:solidFill>
+                  <a:srgbClr val="94A3B8"/>
+                </a:solidFill>
+              </a:defRPr>
+            </a:pPr>
+            <a:r>
+              <a:t>FastAPI &amp; Redis Cache</a:t>
+            </a:r>
+          </a:p>
+          <a:p>
+            <a:pPr>
+              <a:spcBef>
+                <a:spcPts val="1000"/>
+              </a:spcBef>
+              <a:defRPr sz="1100">
+                <a:solidFill>
+                  <a:srgbClr val="F8FAFC"/>
+                </a:solidFill>
+              </a:defRPr>
+            </a:pPr>
+            <a:r>
+              <a:t>• &lt; 1ms Redis Hotlist Index</a:t>
+            </a:r>
+          </a:p>
+          <a:p>
+            <a:pPr>
+              <a:spcBef>
+                <a:spcPts val="1000"/>
+              </a:spcBef>
+              <a:defRPr sz="1100">
+                <a:solidFill>
+                  <a:srgbClr val="F8FAFC"/>
+                </a:solidFill>
+              </a:defRPr>
+            </a:pPr>
+            <a:r>
+              <a:t>• Async WebSocket Broadcast</a:t>
+            </a:r>
+          </a:p>
+          <a:p>
+            <a:pPr>
+              <a:spcBef>
+                <a:spcPts val="1000"/>
+              </a:spcBef>
+              <a:defRPr sz="1100">
+                <a:solidFill>
+                  <a:srgbClr val="F8FAFC"/>
+                </a:solidFill>
+              </a:defRPr>
+            </a:pPr>
+            <a:r>
+              <a:t>• Trajectory Speed Engine</a:t>
+            </a:r>
+          </a:p>
+          <a:p>
+            <a:pPr>
+              <a:spcBef>
+                <a:spcPts val="1000"/>
+              </a:spcBef>
+              <a:defRPr sz="1100">
+                <a:solidFill>
+                  <a:srgbClr val="F8FAFC"/>
+                </a:solidFill>
+              </a:defRPr>
+            </a:pPr>
+            <a:r>
+              <a:t>• REST API &amp; JWT Security</a:t>
+            </a:r>
+          </a:p>
+        </p:txBody>
+      </p:sp>
+      <p:sp>
+        <p:nvSpPr>
+          <p:cNvPr id="18" name="Rounded Rectangle 17"/>
+          <p:cNvSpPr/>
+          <p:nvPr/>
+        </p:nvSpPr>
+        <p:spPr>
+          <a:xfrm>
+            <a:off x="8961120" y="1554480"/>
+            <a:ext cx="2468880" cy="4480560"/>
+          </a:xfrm>
+          <a:prstGeom prst="roundRect">
+            <a:avLst/>
+          </a:prstGeom>
+          <a:solidFill>
+            <a:srgbClr val="131D31"/>
+          </a:solidFill>
+          <a:ln w="15240">
+            <a:solidFill>
+              <a:srgbClr val="1E293B"/>
+            </a:solidFill>
+          </a:ln>
+        </p:spPr>
+        <p:style>
+          <a:lnRef idx="1">
+            <a:schemeClr val="accent1"/>
+          </a:lnRef>
+          <a:fillRef idx="3">
+            <a:schemeClr val="accent1"/>
+          </a:fillRef>
+          <a:effectRef idx="2">
+            <a:schemeClr val="accent1"/>
+          </a:effectRef>
+          <a:fontRef idx="minor">
+            <a:schemeClr val="lt1"/>
+          </a:fontRef>
+        </p:style>
+        <p:txBody>
+          <a:bodyPr rtlCol="0" anchor="ctr"/>
+          <a:lstStyle/>
+          <a:p>
+            <a:pPr algn="ctr"/>
+          </a:p>
+        </p:txBody>
+      </p:sp>
+      <p:sp>
+        <p:nvSpPr>
+          <p:cNvPr id="19" name="Rounded Rectangle 18"/>
+          <p:cNvSpPr/>
+          <p:nvPr/>
+        </p:nvSpPr>
+        <p:spPr>
+          <a:xfrm>
+            <a:off x="8961120" y="1554480"/>
+            <a:ext cx="2468880" cy="109728"/>
+          </a:xfrm>
+          <a:prstGeom prst="roundRect">
+            <a:avLst/>
+          </a:prstGeom>
+          <a:solidFill>
+            <a:srgbClr val="10B981"/>
+          </a:solidFill>
+          <a:ln>
+            <a:noFill/>
+          </a:ln>
+        </p:spPr>
+        <p:style>
+          <a:lnRef idx="1">
+            <a:schemeClr val="accent1"/>
+          </a:lnRef>
+          <a:fillRef idx="3">
+            <a:schemeClr val="accent1"/>
+          </a:fillRef>
+          <a:effectRef idx="2">
+            <a:schemeClr val="accent1"/>
+          </a:effectRef>
+          <a:fontRef idx="minor">
+            <a:schemeClr val="lt1"/>
+          </a:fontRef>
+        </p:style>
+        <p:txBody>
+          <a:bodyPr rtlCol="0" anchor="ctr"/>
+          <a:lstStyle/>
+          <a:p>
+            <a:pPr algn="ctr"/>
+          </a:p>
+        </p:txBody>
+      </p:sp>
+      <p:sp>
+        <p:nvSpPr>
+          <p:cNvPr id="20" name="TextBox 19"/>
+          <p:cNvSpPr txBox="1"/>
+          <p:nvPr/>
+        </p:nvSpPr>
+        <p:spPr>
+          <a:xfrm>
+            <a:off x="9189720" y="1719072"/>
+            <a:ext cx="2011680" cy="4160520"/>
+          </a:xfrm>
+          <a:prstGeom prst="rect">
+            <a:avLst/>
+          </a:prstGeom>
+          <a:noFill/>
+        </p:spPr>
+        <p:txBody>
+          <a:bodyPr wrap="square">
+            <a:spAutoFit/>
+          </a:bodyPr>
+          <a:lstStyle/>
+          <a:p>
+            <a:pPr>
+              <a:defRPr sz="1500" b="1">
+                <a:solidFill>
+                  <a:srgbClr val="FFFFFF"/>
+                </a:solidFill>
+              </a:defRPr>
+            </a:pPr>
+            <a:r>
+              <a:t>4️⃣ Command UI</a:t>
+            </a:r>
+          </a:p>
+          <a:p>
+            <a:pPr>
+              <a:spcBef>
+                <a:spcPts val="300"/>
+              </a:spcBef>
+              <a:defRPr sz="1050">
+                <a:solidFill>
+                  <a:srgbClr val="94A3B8"/>
+                </a:solidFill>
+              </a:defRPr>
+            </a:pPr>
+            <a:r>
+              <a:t>React 18 &amp; Leaflet GIS</a:t>
+            </a:r>
+          </a:p>
+          <a:p>
+            <a:pPr>
+              <a:spcBef>
+                <a:spcPts val="1000"/>
+              </a:spcBef>
+              <a:defRPr sz="1100">
+                <a:solidFill>
+                  <a:srgbClr val="F8FAFC"/>
+                </a:solidFill>
+              </a:defRPr>
+            </a:pPr>
+            <a:r>
+              <a:t>• Interactive Leaflet GIS Map</a:t>
+            </a:r>
+          </a:p>
+          <a:p>
+            <a:pPr>
+              <a:spcBef>
+                <a:spcPts val="1000"/>
+              </a:spcBef>
+              <a:defRPr sz="1100">
+                <a:solidFill>
+                  <a:srgbClr val="F8FAFC"/>
+                </a:solidFill>
+              </a:defRPr>
+            </a:pPr>
+            <a:r>
+              <a:t>• Live 1/4/9 Camera Matrix Grid</a:t>
+            </a:r>
+          </a:p>
+          <a:p>
+            <a:pPr>
+              <a:spcBef>
+                <a:spcPts val="1000"/>
+              </a:spcBef>
+              <a:defRPr sz="1100">
+                <a:solidFill>
+                  <a:srgbClr val="F8FAFC"/>
+                </a:solidFill>
+              </a:defRPr>
+            </a:pPr>
+            <a:r>
+              <a:t>• Audio/Visual Siren Toaster</a:t>
+            </a:r>
+          </a:p>
+          <a:p>
+            <a:pPr>
+              <a:spcBef>
+                <a:spcPts val="1000"/>
+              </a:spcBef>
+              <a:defRPr sz="1100">
+                <a:solidFill>
+                  <a:srgbClr val="F8FAFC"/>
+                </a:solidFill>
+              </a:defRPr>
+            </a:pPr>
+            <a:r>
+              <a:t>• Forensic Breadcrumb Replay</a:t>
+            </a:r>
+          </a:p>
+        </p:txBody>
+      </p:sp>
     </p:spTree>
   </p:cSld>
   <p:clrMapOvr>
@@ -3221,20 +5506,12 @@
         <p:nvPr/>
       </p:nvGrpSpPr>
       <p:grpSpPr/>
-      <p:pic>
-        <p:nvPicPr>
-          <p:cNvPr id="2" name="Picture 1" descr="slide_2.png"/>
-          <p:cNvPicPr>
-            <a:picLocks noChangeAspect="1"/>
-          </p:cNvPicPr>
-          <p:nvPr/>
-        </p:nvPicPr>
-        <p:blipFill>
-          <a:blip r:embed="rId2"/>
-          <a:stretch>
-            <a:fillRect/>
-          </a:stretch>
-        </p:blipFill>
+      <p:sp>
+        <p:nvSpPr>
+          <p:cNvPr id="2" name="Rectangle 1"/>
+          <p:cNvSpPr/>
+          <p:nvPr/>
+        </p:nvSpPr>
         <p:spPr>
           <a:xfrm>
             <a:off x="0" y="0"/>
@@ -3243,8 +5520,928 @@
           <a:prstGeom prst="rect">
             <a:avLst/>
           </a:prstGeom>
-        </p:spPr>
-      </p:pic>
+          <a:solidFill>
+            <a:srgbClr val="0B0F19"/>
+          </a:solidFill>
+          <a:ln>
+            <a:noFill/>
+          </a:ln>
+        </p:spPr>
+        <p:style>
+          <a:lnRef idx="1">
+            <a:schemeClr val="accent1"/>
+          </a:lnRef>
+          <a:fillRef idx="3">
+            <a:schemeClr val="accent1"/>
+          </a:fillRef>
+          <a:effectRef idx="2">
+            <a:schemeClr val="accent1"/>
+          </a:effectRef>
+          <a:fontRef idx="minor">
+            <a:schemeClr val="lt1"/>
+          </a:fontRef>
+        </p:style>
+        <p:txBody>
+          <a:bodyPr rtlCol="0" anchor="ctr"/>
+          <a:lstStyle/>
+          <a:p>
+            <a:pPr algn="ctr"/>
+          </a:p>
+        </p:txBody>
+      </p:sp>
+      <p:sp>
+        <p:nvSpPr>
+          <p:cNvPr id="3" name="Rounded Rectangle 2"/>
+          <p:cNvSpPr/>
+          <p:nvPr/>
+        </p:nvSpPr>
+        <p:spPr>
+          <a:xfrm>
+            <a:off x="731520" y="365760"/>
+            <a:ext cx="2926080" cy="292608"/>
+          </a:xfrm>
+          <a:prstGeom prst="roundRect">
+            <a:avLst/>
+          </a:prstGeom>
+          <a:solidFill>
+            <a:srgbClr val="0F1E30"/>
+          </a:solidFill>
+          <a:ln w="12700">
+            <a:solidFill>
+              <a:srgbClr val="06B6D4"/>
+            </a:solidFill>
+          </a:ln>
+        </p:spPr>
+        <p:style>
+          <a:lnRef idx="1">
+            <a:schemeClr val="accent1"/>
+          </a:lnRef>
+          <a:fillRef idx="3">
+            <a:schemeClr val="accent1"/>
+          </a:fillRef>
+          <a:effectRef idx="2">
+            <a:schemeClr val="accent1"/>
+          </a:effectRef>
+          <a:fontRef idx="minor">
+            <a:schemeClr val="lt1"/>
+          </a:fontRef>
+        </p:style>
+        <p:txBody>
+          <a:bodyPr rtlCol="0" anchor="ctr"/>
+          <a:lstStyle/>
+          <a:p>
+            <a:pPr algn="ctr">
+              <a:defRPr sz="1000" b="1">
+                <a:solidFill>
+                  <a:srgbClr val="06B6D4"/>
+                </a:solidFill>
+              </a:defRPr>
+            </a:pPr>
+            <a:r>
+              <a:t>🛡️ COMPUTER VISION</a:t>
+            </a:r>
+          </a:p>
+        </p:txBody>
+      </p:sp>
+      <p:sp>
+        <p:nvSpPr>
+          <p:cNvPr id="4" name="TextBox 3"/>
+          <p:cNvSpPr txBox="1"/>
+          <p:nvPr/>
+        </p:nvSpPr>
+        <p:spPr>
+          <a:xfrm>
+            <a:off x="731520" y="685800"/>
+            <a:ext cx="10698480" cy="502920"/>
+          </a:xfrm>
+          <a:prstGeom prst="rect">
+            <a:avLst/>
+          </a:prstGeom>
+          <a:noFill/>
+        </p:spPr>
+        <p:txBody>
+          <a:bodyPr wrap="none">
+            <a:spAutoFit/>
+          </a:bodyPr>
+          <a:lstStyle/>
+          <a:p>
+            <a:pPr>
+              <a:defRPr sz="2200" b="1">
+                <a:solidFill>
+                  <a:srgbClr val="FFFFFF"/>
+                </a:solidFill>
+              </a:defRPr>
+            </a:pPr>
+            <a:r>
+              <a:t>Specialized AI ANPR Pipeline for Indian Conditions</a:t>
+            </a:r>
+          </a:p>
+        </p:txBody>
+      </p:sp>
+      <p:sp>
+        <p:nvSpPr>
+          <p:cNvPr id="5" name="TextBox 4"/>
+          <p:cNvSpPr txBox="1"/>
+          <p:nvPr/>
+        </p:nvSpPr>
+        <p:spPr>
+          <a:xfrm>
+            <a:off x="731520" y="1188720"/>
+            <a:ext cx="10698480" cy="320040"/>
+          </a:xfrm>
+          <a:prstGeom prst="rect">
+            <a:avLst/>
+          </a:prstGeom>
+          <a:noFill/>
+        </p:spPr>
+        <p:txBody>
+          <a:bodyPr wrap="none">
+            <a:spAutoFit/>
+          </a:bodyPr>
+          <a:lstStyle/>
+          <a:p>
+            <a:pPr>
+              <a:defRPr sz="1200">
+                <a:solidFill>
+                  <a:srgbClr val="94A3B8"/>
+                </a:solidFill>
+              </a:defRPr>
+            </a:pPr>
+            <a:r>
+              <a:t>Multi-stage pipeline engineered specifically for high accuracy under difficult lighting, angles, and plate formats.</a:t>
+            </a:r>
+          </a:p>
+        </p:txBody>
+      </p:sp>
+      <p:sp>
+        <p:nvSpPr>
+          <p:cNvPr id="6" name="Rectangle 5"/>
+          <p:cNvSpPr/>
+          <p:nvPr/>
+        </p:nvSpPr>
+        <p:spPr>
+          <a:xfrm>
+            <a:off x="731520" y="6309360"/>
+            <a:ext cx="10698480" cy="18288"/>
+          </a:xfrm>
+          <a:prstGeom prst="rect">
+            <a:avLst/>
+          </a:prstGeom>
+          <a:solidFill>
+            <a:srgbClr val="1E293B"/>
+          </a:solidFill>
+          <a:ln>
+            <a:noFill/>
+          </a:ln>
+        </p:spPr>
+        <p:style>
+          <a:lnRef idx="1">
+            <a:schemeClr val="accent1"/>
+          </a:lnRef>
+          <a:fillRef idx="3">
+            <a:schemeClr val="accent1"/>
+          </a:fillRef>
+          <a:effectRef idx="2">
+            <a:schemeClr val="accent1"/>
+          </a:effectRef>
+          <a:fontRef idx="minor">
+            <a:schemeClr val="lt1"/>
+          </a:fontRef>
+        </p:style>
+        <p:txBody>
+          <a:bodyPr rtlCol="0" anchor="ctr"/>
+          <a:lstStyle/>
+          <a:p>
+            <a:pPr algn="ctr"/>
+          </a:p>
+        </p:txBody>
+      </p:sp>
+      <p:sp>
+        <p:nvSpPr>
+          <p:cNvPr id="7" name="TextBox 6"/>
+          <p:cNvSpPr txBox="1"/>
+          <p:nvPr/>
+        </p:nvSpPr>
+        <p:spPr>
+          <a:xfrm>
+            <a:off x="731520" y="6355080"/>
+            <a:ext cx="10698480" cy="365760"/>
+          </a:xfrm>
+          <a:prstGeom prst="rect">
+            <a:avLst/>
+          </a:prstGeom>
+          <a:noFill/>
+        </p:spPr>
+        <p:txBody>
+          <a:bodyPr wrap="none">
+            <a:spAutoFit/>
+          </a:bodyPr>
+          <a:lstStyle/>
+          <a:p>
+            <a:pPr>
+              <a:defRPr sz="1000">
+                <a:solidFill>
+                  <a:srgbClr val="64748B"/>
+                </a:solidFill>
+              </a:defRPr>
+            </a:pPr>
+            <a:r>
+              <a:t>Sentinel AI Surveillance Platform • 100% Self-Hosted • SDC Compliant</a:t>
+            </a:r>
+          </a:p>
+        </p:txBody>
+      </p:sp>
+      <p:sp>
+        <p:nvSpPr>
+          <p:cNvPr id="8" name="TextBox 7"/>
+          <p:cNvSpPr txBox="1"/>
+          <p:nvPr/>
+        </p:nvSpPr>
+        <p:spPr>
+          <a:xfrm>
+            <a:off x="10058400" y="6355080"/>
+            <a:ext cx="1371600" cy="365760"/>
+          </a:xfrm>
+          <a:prstGeom prst="rect">
+            <a:avLst/>
+          </a:prstGeom>
+          <a:noFill/>
+        </p:spPr>
+        <p:txBody>
+          <a:bodyPr wrap="none">
+            <a:spAutoFit/>
+          </a:bodyPr>
+          <a:lstStyle/>
+          <a:p>
+            <a:pPr algn="r">
+              <a:defRPr sz="1000" b="1">
+                <a:solidFill>
+                  <a:srgbClr val="64748B"/>
+                </a:solidFill>
+              </a:defRPr>
+            </a:pPr>
+            <a:r>
+              <a:t>Slide 4 / 8</a:t>
+            </a:r>
+          </a:p>
+        </p:txBody>
+      </p:sp>
+      <p:sp>
+        <p:nvSpPr>
+          <p:cNvPr id="9" name="Rounded Rectangle 8"/>
+          <p:cNvSpPr/>
+          <p:nvPr/>
+        </p:nvSpPr>
+        <p:spPr>
+          <a:xfrm>
+            <a:off x="731520" y="1554480"/>
+            <a:ext cx="5669280" cy="4480560"/>
+          </a:xfrm>
+          <a:prstGeom prst="roundRect">
+            <a:avLst/>
+          </a:prstGeom>
+          <a:solidFill>
+            <a:srgbClr val="131D31"/>
+          </a:solidFill>
+          <a:ln w="15240">
+            <a:solidFill>
+              <a:srgbClr val="1E293B"/>
+            </a:solidFill>
+          </a:ln>
+        </p:spPr>
+        <p:style>
+          <a:lnRef idx="1">
+            <a:schemeClr val="accent1"/>
+          </a:lnRef>
+          <a:fillRef idx="3">
+            <a:schemeClr val="accent1"/>
+          </a:fillRef>
+          <a:effectRef idx="2">
+            <a:schemeClr val="accent1"/>
+          </a:effectRef>
+          <a:fontRef idx="minor">
+            <a:schemeClr val="lt1"/>
+          </a:fontRef>
+        </p:style>
+        <p:txBody>
+          <a:bodyPr rtlCol="0" anchor="ctr"/>
+          <a:lstStyle/>
+          <a:p>
+            <a:pPr algn="ctr"/>
+          </a:p>
+        </p:txBody>
+      </p:sp>
+      <p:sp>
+        <p:nvSpPr>
+          <p:cNvPr id="10" name="Rounded Rectangle 9"/>
+          <p:cNvSpPr/>
+          <p:nvPr/>
+        </p:nvSpPr>
+        <p:spPr>
+          <a:xfrm>
+            <a:off x="731520" y="1554480"/>
+            <a:ext cx="5669280" cy="109728"/>
+          </a:xfrm>
+          <a:prstGeom prst="roundRect">
+            <a:avLst/>
+          </a:prstGeom>
+          <a:solidFill>
+            <a:srgbClr val="A855F7"/>
+          </a:solidFill>
+          <a:ln>
+            <a:noFill/>
+          </a:ln>
+        </p:spPr>
+        <p:style>
+          <a:lnRef idx="1">
+            <a:schemeClr val="accent1"/>
+          </a:lnRef>
+          <a:fillRef idx="3">
+            <a:schemeClr val="accent1"/>
+          </a:fillRef>
+          <a:effectRef idx="2">
+            <a:schemeClr val="accent1"/>
+          </a:effectRef>
+          <a:fontRef idx="minor">
+            <a:schemeClr val="lt1"/>
+          </a:fontRef>
+        </p:style>
+        <p:txBody>
+          <a:bodyPr rtlCol="0" anchor="ctr"/>
+          <a:lstStyle/>
+          <a:p>
+            <a:pPr algn="ctr"/>
+          </a:p>
+        </p:txBody>
+      </p:sp>
+      <p:sp>
+        <p:nvSpPr>
+          <p:cNvPr id="11" name="TextBox 10"/>
+          <p:cNvSpPr txBox="1"/>
+          <p:nvPr/>
+        </p:nvSpPr>
+        <p:spPr>
+          <a:xfrm>
+            <a:off x="960120" y="1719072"/>
+            <a:ext cx="5212080" cy="4160520"/>
+          </a:xfrm>
+          <a:prstGeom prst="rect">
+            <a:avLst/>
+          </a:prstGeom>
+          <a:noFill/>
+        </p:spPr>
+        <p:txBody>
+          <a:bodyPr wrap="square">
+            <a:spAutoFit/>
+          </a:bodyPr>
+          <a:lstStyle/>
+          <a:p>
+            <a:pPr>
+              <a:defRPr sz="1500" b="1">
+                <a:solidFill>
+                  <a:srgbClr val="FFFFFF"/>
+                </a:solidFill>
+              </a:defRPr>
+            </a:pPr>
+            <a:r>
+              <a:t>⚡ 5-Step Deep Learning Inference</a:t>
+            </a:r>
+          </a:p>
+          <a:p>
+            <a:pPr>
+              <a:spcBef>
+                <a:spcPts val="300"/>
+              </a:spcBef>
+              <a:defRPr sz="1050">
+                <a:solidFill>
+                  <a:srgbClr val="94A3B8"/>
+                </a:solidFill>
+              </a:defRPr>
+            </a:pPr>
+            <a:r>
+              <a:t>Sub-100ms Pure On-Premise Execution</a:t>
+            </a:r>
+          </a:p>
+          <a:p>
+            <a:pPr>
+              <a:spcBef>
+                <a:spcPts val="700"/>
+              </a:spcBef>
+              <a:defRPr sz="1050">
+                <a:solidFill>
+                  <a:srgbClr val="F8FAFC"/>
+                </a:solidFill>
+              </a:defRPr>
+            </a:pPr>
+            <a:r>
+              <a:t>• 1. Adaptive Sampler: Motion-triggered frame grabbing throttles to 10 FPS to save 60% compute.</a:t>
+            </a:r>
+          </a:p>
+          <a:p>
+            <a:pPr>
+              <a:spcBef>
+                <a:spcPts val="700"/>
+              </a:spcBef>
+              <a:defRPr sz="1050">
+                <a:solidFill>
+                  <a:srgbClr val="F8FAFC"/>
+                </a:solidFill>
+              </a:defRPr>
+            </a:pPr>
+            <a:r>
+              <a:t>• 2. Dual-Head YOLOv8: Isolates vehicle class (Car, Bike, Truck, Auto) and crops the license plate rectangle.</a:t>
+            </a:r>
+          </a:p>
+          <a:p>
+            <a:pPr>
+              <a:spcBef>
+                <a:spcPts val="700"/>
+              </a:spcBef>
+              <a:defRPr sz="1050">
+                <a:solidFill>
+                  <a:srgbClr val="F8FAFC"/>
+                </a:solidFill>
+              </a:defRPr>
+            </a:pPr>
+            <a:r>
+              <a:t>• 3. CLAHE Image Enhancement: Normalizes night headlight glare, shadow contrast, and perspective deskew.</a:t>
+            </a:r>
+          </a:p>
+          <a:p>
+            <a:pPr>
+              <a:spcBef>
+                <a:spcPts val="700"/>
+              </a:spcBef>
+              <a:defRPr sz="1050">
+                <a:solidFill>
+                  <a:srgbClr val="F8FAFC"/>
+                </a:solidFill>
+              </a:defRPr>
+            </a:pPr>
+            <a:r>
+              <a:t>• 4. PaddleOCR (PP-OCRv4): Deep character recognition trained on Indian standard, 2-line, yellow commercial &amp; EV plates.</a:t>
+            </a:r>
+          </a:p>
+          <a:p>
+            <a:pPr>
+              <a:spcBef>
+                <a:spcPts val="700"/>
+              </a:spcBef>
+              <a:defRPr sz="1050">
+                <a:solidFill>
+                  <a:srgbClr val="F8FAFC"/>
+                </a:solidFill>
+              </a:defRPr>
+            </a:pPr>
+            <a:r>
+              <a:t>• 5. Indian LP Regex Validator: Enforces state/RTO syntax &amp; corrects optical ambiguities (O vs 0, B vs 8, I vs 1).</a:t>
+            </a:r>
+          </a:p>
+        </p:txBody>
+      </p:sp>
+      <p:sp>
+        <p:nvSpPr>
+          <p:cNvPr id="12" name="Rounded Rectangle 11"/>
+          <p:cNvSpPr/>
+          <p:nvPr/>
+        </p:nvSpPr>
+        <p:spPr>
+          <a:xfrm>
+            <a:off x="6675120" y="1554480"/>
+            <a:ext cx="4754880" cy="4480560"/>
+          </a:xfrm>
+          <a:prstGeom prst="roundRect">
+            <a:avLst/>
+          </a:prstGeom>
+          <a:solidFill>
+            <a:srgbClr val="131D31"/>
+          </a:solidFill>
+          <a:ln w="15240">
+            <a:solidFill>
+              <a:srgbClr val="1E293B"/>
+            </a:solidFill>
+          </a:ln>
+        </p:spPr>
+        <p:style>
+          <a:lnRef idx="1">
+            <a:schemeClr val="accent1"/>
+          </a:lnRef>
+          <a:fillRef idx="3">
+            <a:schemeClr val="accent1"/>
+          </a:fillRef>
+          <a:effectRef idx="2">
+            <a:schemeClr val="accent1"/>
+          </a:effectRef>
+          <a:fontRef idx="minor">
+            <a:schemeClr val="lt1"/>
+          </a:fontRef>
+        </p:style>
+        <p:txBody>
+          <a:bodyPr rtlCol="0" anchor="ctr"/>
+          <a:lstStyle/>
+          <a:p>
+            <a:pPr algn="ctr"/>
+          </a:p>
+        </p:txBody>
+      </p:sp>
+      <p:sp>
+        <p:nvSpPr>
+          <p:cNvPr id="13" name="Rounded Rectangle 12"/>
+          <p:cNvSpPr/>
+          <p:nvPr/>
+        </p:nvSpPr>
+        <p:spPr>
+          <a:xfrm>
+            <a:off x="6675120" y="1554480"/>
+            <a:ext cx="4754880" cy="109728"/>
+          </a:xfrm>
+          <a:prstGeom prst="roundRect">
+            <a:avLst/>
+          </a:prstGeom>
+          <a:solidFill>
+            <a:srgbClr val="10B981"/>
+          </a:solidFill>
+          <a:ln>
+            <a:noFill/>
+          </a:ln>
+        </p:spPr>
+        <p:style>
+          <a:lnRef idx="1">
+            <a:schemeClr val="accent1"/>
+          </a:lnRef>
+          <a:fillRef idx="3">
+            <a:schemeClr val="accent1"/>
+          </a:fillRef>
+          <a:effectRef idx="2">
+            <a:schemeClr val="accent1"/>
+          </a:effectRef>
+          <a:fontRef idx="minor">
+            <a:schemeClr val="lt1"/>
+          </a:fontRef>
+        </p:style>
+        <p:txBody>
+          <a:bodyPr rtlCol="0" anchor="ctr"/>
+          <a:lstStyle/>
+          <a:p>
+            <a:pPr algn="ctr"/>
+          </a:p>
+        </p:txBody>
+      </p:sp>
+      <p:sp>
+        <p:nvSpPr>
+          <p:cNvPr id="14" name="TextBox 13"/>
+          <p:cNvSpPr txBox="1"/>
+          <p:nvPr/>
+        </p:nvSpPr>
+        <p:spPr>
+          <a:xfrm>
+            <a:off x="6903720" y="1719072"/>
+            <a:ext cx="4297680" cy="4160520"/>
+          </a:xfrm>
+          <a:prstGeom prst="rect">
+            <a:avLst/>
+          </a:prstGeom>
+          <a:noFill/>
+        </p:spPr>
+        <p:txBody>
+          <a:bodyPr wrap="square">
+            <a:spAutoFit/>
+          </a:bodyPr>
+          <a:lstStyle/>
+          <a:p>
+            <a:pPr>
+              <a:defRPr sz="1500" b="1">
+                <a:solidFill>
+                  <a:srgbClr val="FFFFFF"/>
+                </a:solidFill>
+              </a:defRPr>
+            </a:pPr>
+            <a:r>
+              <a:t>📊 Live Detection Simulation &amp; Benchmarks</a:t>
+            </a:r>
+          </a:p>
+          <a:p>
+            <a:pPr>
+              <a:spcBef>
+                <a:spcPts val="300"/>
+              </a:spcBef>
+              <a:defRPr sz="1050">
+                <a:solidFill>
+                  <a:srgbClr val="94A3B8"/>
+                </a:solidFill>
+              </a:defRPr>
+            </a:pPr>
+            <a:r>
+              <a:t>Validated on real-world Indian highway feeds</a:t>
+            </a:r>
+          </a:p>
+        </p:txBody>
+      </p:sp>
+      <p:sp>
+        <p:nvSpPr>
+          <p:cNvPr id="15" name="Rounded Rectangle 14"/>
+          <p:cNvSpPr/>
+          <p:nvPr/>
+        </p:nvSpPr>
+        <p:spPr>
+          <a:xfrm>
+            <a:off x="6949440" y="2377440"/>
+            <a:ext cx="4206240" cy="1645920"/>
+          </a:xfrm>
+          <a:prstGeom prst="roundRect">
+            <a:avLst/>
+          </a:prstGeom>
+          <a:solidFill>
+            <a:srgbClr val="0F172A"/>
+          </a:solidFill>
+          <a:ln w="12700">
+            <a:solidFill>
+              <a:srgbClr val="06B6D4"/>
+            </a:solidFill>
+          </a:ln>
+        </p:spPr>
+        <p:style>
+          <a:lnRef idx="1">
+            <a:schemeClr val="accent1"/>
+          </a:lnRef>
+          <a:fillRef idx="3">
+            <a:schemeClr val="accent1"/>
+          </a:fillRef>
+          <a:effectRef idx="2">
+            <a:schemeClr val="accent1"/>
+          </a:effectRef>
+          <a:fontRef idx="minor">
+            <a:schemeClr val="lt1"/>
+          </a:fontRef>
+        </p:style>
+        <p:txBody>
+          <a:bodyPr rtlCol="0" anchor="ctr"/>
+          <a:lstStyle/>
+          <a:p>
+            <a:pPr algn="ctr"/>
+          </a:p>
+        </p:txBody>
+      </p:sp>
+      <p:sp>
+        <p:nvSpPr>
+          <p:cNvPr id="16" name="TextBox 15"/>
+          <p:cNvSpPr txBox="1"/>
+          <p:nvPr/>
+        </p:nvSpPr>
+        <p:spPr>
+          <a:xfrm>
+            <a:off x="7040880" y="2423160"/>
+            <a:ext cx="4023360" cy="274320"/>
+          </a:xfrm>
+          <a:prstGeom prst="rect">
+            <a:avLst/>
+          </a:prstGeom>
+          <a:noFill/>
+        </p:spPr>
+        <p:txBody>
+          <a:bodyPr wrap="none">
+            <a:spAutoFit/>
+          </a:bodyPr>
+          <a:lstStyle/>
+          <a:p>
+            <a:pPr>
+              <a:defRPr sz="950" b="1">
+                <a:solidFill>
+                  <a:srgbClr val="38BDF8"/>
+                </a:solidFill>
+              </a:defRPr>
+            </a:pPr>
+            <a:r>
+              <a:t>CAMERA: SG Highway (CAM-04)   •   GPU INFERENCE: 42ms</a:t>
+            </a:r>
+          </a:p>
+        </p:txBody>
+      </p:sp>
+      <p:sp>
+        <p:nvSpPr>
+          <p:cNvPr id="17" name="Rounded Rectangle 16"/>
+          <p:cNvSpPr/>
+          <p:nvPr/>
+        </p:nvSpPr>
+        <p:spPr>
+          <a:xfrm>
+            <a:off x="7589520" y="2743200"/>
+            <a:ext cx="2926080" cy="594360"/>
+          </a:xfrm>
+          <a:prstGeom prst="roundRect">
+            <a:avLst/>
+          </a:prstGeom>
+          <a:solidFill>
+            <a:srgbClr val="FACC15"/>
+          </a:solidFill>
+          <a:ln w="25400">
+            <a:solidFill>
+              <a:srgbClr val="000000"/>
+            </a:solidFill>
+          </a:ln>
+        </p:spPr>
+        <p:style>
+          <a:lnRef idx="1">
+            <a:schemeClr val="accent1"/>
+          </a:lnRef>
+          <a:fillRef idx="3">
+            <a:schemeClr val="accent1"/>
+          </a:fillRef>
+          <a:effectRef idx="2">
+            <a:schemeClr val="accent1"/>
+          </a:effectRef>
+          <a:fontRef idx="minor">
+            <a:schemeClr val="lt1"/>
+          </a:fontRef>
+        </p:style>
+        <p:txBody>
+          <a:bodyPr rtlCol="0" anchor="ctr"/>
+          <a:lstStyle/>
+          <a:p>
+            <a:pPr algn="ctr">
+              <a:defRPr sz="1800" b="1">
+                <a:solidFill>
+                  <a:srgbClr val="000000"/>
+                </a:solidFill>
+              </a:defRPr>
+            </a:pPr>
+            <a:r>
+              <a:t>GJ 01 AB 1234</a:t>
+            </a:r>
+          </a:p>
+        </p:txBody>
+      </p:sp>
+      <p:sp>
+        <p:nvSpPr>
+          <p:cNvPr id="18" name="TextBox 17"/>
+          <p:cNvSpPr txBox="1"/>
+          <p:nvPr/>
+        </p:nvSpPr>
+        <p:spPr>
+          <a:xfrm>
+            <a:off x="7040880" y="3429000"/>
+            <a:ext cx="4023360" cy="457200"/>
+          </a:xfrm>
+          <a:prstGeom prst="rect">
+            <a:avLst/>
+          </a:prstGeom>
+          <a:noFill/>
+        </p:spPr>
+        <p:txBody>
+          <a:bodyPr wrap="none">
+            <a:spAutoFit/>
+          </a:bodyPr>
+          <a:lstStyle/>
+          <a:p>
+            <a:pPr algn="ctr">
+              <a:defRPr sz="950">
+                <a:solidFill>
+                  <a:srgbClr val="94A3B8"/>
+                </a:solidFill>
+              </a:defRPr>
+            </a:pPr>
+            <a:r>
+              <a:t>VEHICLE: WHITE FORTUNER (SUV)  |  CONFIDENCE: 96.4%</a:t>
+            </a:r>
+          </a:p>
+        </p:txBody>
+      </p:sp>
+      <p:sp>
+        <p:nvSpPr>
+          <p:cNvPr id="19" name="Rounded Rectangle 18"/>
+          <p:cNvSpPr/>
+          <p:nvPr/>
+        </p:nvSpPr>
+        <p:spPr>
+          <a:xfrm>
+            <a:off x="6949440" y="4206240"/>
+            <a:ext cx="2011680" cy="1463040"/>
+          </a:xfrm>
+          <a:prstGeom prst="roundRect">
+            <a:avLst/>
+          </a:prstGeom>
+          <a:solidFill>
+            <a:srgbClr val="0F172A"/>
+          </a:solidFill>
+          <a:ln>
+            <a:solidFill>
+              <a:srgbClr val="1E293B"/>
+            </a:solidFill>
+          </a:ln>
+        </p:spPr>
+        <p:style>
+          <a:lnRef idx="1">
+            <a:schemeClr val="accent1"/>
+          </a:lnRef>
+          <a:fillRef idx="3">
+            <a:schemeClr val="accent1"/>
+          </a:fillRef>
+          <a:effectRef idx="2">
+            <a:schemeClr val="accent1"/>
+          </a:effectRef>
+          <a:fontRef idx="minor">
+            <a:schemeClr val="lt1"/>
+          </a:fontRef>
+        </p:style>
+        <p:txBody>
+          <a:bodyPr rtlCol="0" anchor="ctr"/>
+          <a:lstStyle/>
+          <a:p>
+            <a:pPr algn="ctr">
+              <a:defRPr sz="2200" b="1">
+                <a:solidFill>
+                  <a:srgbClr val="38BDF8"/>
+                </a:solidFill>
+              </a:defRPr>
+            </a:pPr>
+            <a:br/>
+            <a:r>
+              <a:t>97.4%</a:t>
+            </a:r>
+            <a:br/>
+          </a:p>
+          <a:p>
+            <a:pPr algn="ctr">
+              <a:defRPr sz="1000">
+                <a:solidFill>
+                  <a:srgbClr val="94A3B8"/>
+                </a:solidFill>
+              </a:defRPr>
+            </a:pPr>
+            <a:r>
+              <a:t>Detection Accuracy</a:t>
+            </a:r>
+          </a:p>
+        </p:txBody>
+      </p:sp>
+      <p:sp>
+        <p:nvSpPr>
+          <p:cNvPr id="20" name="Rounded Rectangle 19"/>
+          <p:cNvSpPr/>
+          <p:nvPr/>
+        </p:nvSpPr>
+        <p:spPr>
+          <a:xfrm>
+            <a:off x="9144000" y="4206240"/>
+            <a:ext cx="2011680" cy="1463040"/>
+          </a:xfrm>
+          <a:prstGeom prst="roundRect">
+            <a:avLst/>
+          </a:prstGeom>
+          <a:solidFill>
+            <a:srgbClr val="0F172A"/>
+          </a:solidFill>
+          <a:ln>
+            <a:solidFill>
+              <a:srgbClr val="1E293B"/>
+            </a:solidFill>
+          </a:ln>
+        </p:spPr>
+        <p:style>
+          <a:lnRef idx="1">
+            <a:schemeClr val="accent1"/>
+          </a:lnRef>
+          <a:fillRef idx="3">
+            <a:schemeClr val="accent1"/>
+          </a:fillRef>
+          <a:effectRef idx="2">
+            <a:schemeClr val="accent1"/>
+          </a:effectRef>
+          <a:fontRef idx="minor">
+            <a:schemeClr val="lt1"/>
+          </a:fontRef>
+        </p:style>
+        <p:txBody>
+          <a:bodyPr rtlCol="0" anchor="ctr"/>
+          <a:lstStyle/>
+          <a:p>
+            <a:pPr algn="ctr">
+              <a:defRPr sz="2200" b="1">
+                <a:solidFill>
+                  <a:srgbClr val="34D399"/>
+                </a:solidFill>
+              </a:defRPr>
+            </a:pPr>
+            <a:br/>
+            <a:r>
+              <a:t>&lt; 45ms</a:t>
+            </a:r>
+            <a:br/>
+          </a:p>
+          <a:p>
+            <a:pPr algn="ctr">
+              <a:defRPr sz="1000">
+                <a:solidFill>
+                  <a:srgbClr val="94A3B8"/>
+                </a:solidFill>
+              </a:defRPr>
+            </a:pPr>
+            <a:r>
+              <a:t>GPU Frame Latency</a:t>
+            </a:r>
+          </a:p>
+        </p:txBody>
+      </p:sp>
     </p:spTree>
   </p:cSld>
   <p:clrMapOvr>
@@ -3263,20 +6460,12 @@
         <p:nvPr/>
       </p:nvGrpSpPr>
       <p:grpSpPr/>
-      <p:pic>
-        <p:nvPicPr>
-          <p:cNvPr id="2" name="Picture 1" descr="slide_2.png"/>
-          <p:cNvPicPr>
-            <a:picLocks noChangeAspect="1"/>
-          </p:cNvPicPr>
-          <p:nvPr/>
-        </p:nvPicPr>
-        <p:blipFill>
-          <a:blip r:embed="rId2"/>
-          <a:stretch>
-            <a:fillRect/>
-          </a:stretch>
-        </p:blipFill>
+      <p:sp>
+        <p:nvSpPr>
+          <p:cNvPr id="2" name="Rectangle 1"/>
+          <p:cNvSpPr/>
+          <p:nvPr/>
+        </p:nvSpPr>
         <p:spPr>
           <a:xfrm>
             <a:off x="0" y="0"/>
@@ -3285,8 +6474,877 @@
           <a:prstGeom prst="rect">
             <a:avLst/>
           </a:prstGeom>
-        </p:spPr>
-      </p:pic>
+          <a:solidFill>
+            <a:srgbClr val="0B0F19"/>
+          </a:solidFill>
+          <a:ln>
+            <a:noFill/>
+          </a:ln>
+        </p:spPr>
+        <p:style>
+          <a:lnRef idx="1">
+            <a:schemeClr val="accent1"/>
+          </a:lnRef>
+          <a:fillRef idx="3">
+            <a:schemeClr val="accent1"/>
+          </a:fillRef>
+          <a:effectRef idx="2">
+            <a:schemeClr val="accent1"/>
+          </a:effectRef>
+          <a:fontRef idx="minor">
+            <a:schemeClr val="lt1"/>
+          </a:fontRef>
+        </p:style>
+        <p:txBody>
+          <a:bodyPr rtlCol="0" anchor="ctr"/>
+          <a:lstStyle/>
+          <a:p>
+            <a:pPr algn="ctr"/>
+          </a:p>
+        </p:txBody>
+      </p:sp>
+      <p:sp>
+        <p:nvSpPr>
+          <p:cNvPr id="3" name="Rounded Rectangle 2"/>
+          <p:cNvSpPr/>
+          <p:nvPr/>
+        </p:nvSpPr>
+        <p:spPr>
+          <a:xfrm>
+            <a:off x="731520" y="365760"/>
+            <a:ext cx="2926080" cy="292608"/>
+          </a:xfrm>
+          <a:prstGeom prst="roundRect">
+            <a:avLst/>
+          </a:prstGeom>
+          <a:solidFill>
+            <a:srgbClr val="0F1E30"/>
+          </a:solidFill>
+          <a:ln w="12700">
+            <a:solidFill>
+              <a:srgbClr val="06B6D4"/>
+            </a:solidFill>
+          </a:ln>
+        </p:spPr>
+        <p:style>
+          <a:lnRef idx="1">
+            <a:schemeClr val="accent1"/>
+          </a:lnRef>
+          <a:fillRef idx="3">
+            <a:schemeClr val="accent1"/>
+          </a:fillRef>
+          <a:effectRef idx="2">
+            <a:schemeClr val="accent1"/>
+          </a:effectRef>
+          <a:fontRef idx="minor">
+            <a:schemeClr val="lt1"/>
+          </a:fontRef>
+        </p:style>
+        <p:txBody>
+          <a:bodyPr rtlCol="0" anchor="ctr"/>
+          <a:lstStyle/>
+          <a:p>
+            <a:pPr algn="ctr">
+              <a:defRPr sz="1000" b="1">
+                <a:solidFill>
+                  <a:srgbClr val="06B6D4"/>
+                </a:solidFill>
+              </a:defRPr>
+            </a:pPr>
+            <a:r>
+              <a:t>🛡️ REAL-TIME ALERTING</a:t>
+            </a:r>
+          </a:p>
+        </p:txBody>
+      </p:sp>
+      <p:sp>
+        <p:nvSpPr>
+          <p:cNvPr id="4" name="TextBox 3"/>
+          <p:cNvSpPr txBox="1"/>
+          <p:nvPr/>
+        </p:nvSpPr>
+        <p:spPr>
+          <a:xfrm>
+            <a:off x="731520" y="685800"/>
+            <a:ext cx="10698480" cy="502920"/>
+          </a:xfrm>
+          <a:prstGeom prst="rect">
+            <a:avLst/>
+          </a:prstGeom>
+          <a:noFill/>
+        </p:spPr>
+        <p:txBody>
+          <a:bodyPr wrap="none">
+            <a:spAutoFit/>
+          </a:bodyPr>
+          <a:lstStyle/>
+          <a:p>
+            <a:pPr>
+              <a:defRPr sz="2200" b="1">
+                <a:solidFill>
+                  <a:srgbClr val="FFFFFF"/>
+                </a:solidFill>
+              </a:defRPr>
+            </a:pPr>
+            <a:r>
+              <a:t>Sub-Second Watchlist Matching &amp; Operator Siren</a:t>
+            </a:r>
+          </a:p>
+        </p:txBody>
+      </p:sp>
+      <p:sp>
+        <p:nvSpPr>
+          <p:cNvPr id="5" name="TextBox 4"/>
+          <p:cNvSpPr txBox="1"/>
+          <p:nvPr/>
+        </p:nvSpPr>
+        <p:spPr>
+          <a:xfrm>
+            <a:off x="731520" y="1188720"/>
+            <a:ext cx="10698480" cy="320040"/>
+          </a:xfrm>
+          <a:prstGeom prst="rect">
+            <a:avLst/>
+          </a:prstGeom>
+          <a:noFill/>
+        </p:spPr>
+        <p:txBody>
+          <a:bodyPr wrap="none">
+            <a:spAutoFit/>
+          </a:bodyPr>
+          <a:lstStyle/>
+          <a:p>
+            <a:pPr>
+              <a:defRPr sz="1200">
+                <a:solidFill>
+                  <a:srgbClr val="94A3B8"/>
+                </a:solidFill>
+              </a:defRPr>
+            </a:pPr>
+            <a:r>
+              <a:t>Instant broadcast from camera sensor to operator workstation in under 400 milliseconds.</a:t>
+            </a:r>
+          </a:p>
+        </p:txBody>
+      </p:sp>
+      <p:sp>
+        <p:nvSpPr>
+          <p:cNvPr id="6" name="Rectangle 5"/>
+          <p:cNvSpPr/>
+          <p:nvPr/>
+        </p:nvSpPr>
+        <p:spPr>
+          <a:xfrm>
+            <a:off x="731520" y="6309360"/>
+            <a:ext cx="10698480" cy="18288"/>
+          </a:xfrm>
+          <a:prstGeom prst="rect">
+            <a:avLst/>
+          </a:prstGeom>
+          <a:solidFill>
+            <a:srgbClr val="1E293B"/>
+          </a:solidFill>
+          <a:ln>
+            <a:noFill/>
+          </a:ln>
+        </p:spPr>
+        <p:style>
+          <a:lnRef idx="1">
+            <a:schemeClr val="accent1"/>
+          </a:lnRef>
+          <a:fillRef idx="3">
+            <a:schemeClr val="accent1"/>
+          </a:fillRef>
+          <a:effectRef idx="2">
+            <a:schemeClr val="accent1"/>
+          </a:effectRef>
+          <a:fontRef idx="minor">
+            <a:schemeClr val="lt1"/>
+          </a:fontRef>
+        </p:style>
+        <p:txBody>
+          <a:bodyPr rtlCol="0" anchor="ctr"/>
+          <a:lstStyle/>
+          <a:p>
+            <a:pPr algn="ctr"/>
+          </a:p>
+        </p:txBody>
+      </p:sp>
+      <p:sp>
+        <p:nvSpPr>
+          <p:cNvPr id="7" name="TextBox 6"/>
+          <p:cNvSpPr txBox="1"/>
+          <p:nvPr/>
+        </p:nvSpPr>
+        <p:spPr>
+          <a:xfrm>
+            <a:off x="731520" y="6355080"/>
+            <a:ext cx="10698480" cy="365760"/>
+          </a:xfrm>
+          <a:prstGeom prst="rect">
+            <a:avLst/>
+          </a:prstGeom>
+          <a:noFill/>
+        </p:spPr>
+        <p:txBody>
+          <a:bodyPr wrap="none">
+            <a:spAutoFit/>
+          </a:bodyPr>
+          <a:lstStyle/>
+          <a:p>
+            <a:pPr>
+              <a:defRPr sz="1000">
+                <a:solidFill>
+                  <a:srgbClr val="64748B"/>
+                </a:solidFill>
+              </a:defRPr>
+            </a:pPr>
+            <a:r>
+              <a:t>Sentinel AI Surveillance Platform • 100% Self-Hosted • SDC Compliant</a:t>
+            </a:r>
+          </a:p>
+        </p:txBody>
+      </p:sp>
+      <p:sp>
+        <p:nvSpPr>
+          <p:cNvPr id="8" name="TextBox 7"/>
+          <p:cNvSpPr txBox="1"/>
+          <p:nvPr/>
+        </p:nvSpPr>
+        <p:spPr>
+          <a:xfrm>
+            <a:off x="10058400" y="6355080"/>
+            <a:ext cx="1371600" cy="365760"/>
+          </a:xfrm>
+          <a:prstGeom prst="rect">
+            <a:avLst/>
+          </a:prstGeom>
+          <a:noFill/>
+        </p:spPr>
+        <p:txBody>
+          <a:bodyPr wrap="none">
+            <a:spAutoFit/>
+          </a:bodyPr>
+          <a:lstStyle/>
+          <a:p>
+            <a:pPr algn="r">
+              <a:defRPr sz="1000" b="1">
+                <a:solidFill>
+                  <a:srgbClr val="64748B"/>
+                </a:solidFill>
+              </a:defRPr>
+            </a:pPr>
+            <a:r>
+              <a:t>Slide 5 / 8</a:t>
+            </a:r>
+          </a:p>
+        </p:txBody>
+      </p:sp>
+      <p:sp>
+        <p:nvSpPr>
+          <p:cNvPr id="9" name="Rounded Rectangle 8"/>
+          <p:cNvSpPr/>
+          <p:nvPr/>
+        </p:nvSpPr>
+        <p:spPr>
+          <a:xfrm>
+            <a:off x="731520" y="1554480"/>
+            <a:ext cx="5120640" cy="4480560"/>
+          </a:xfrm>
+          <a:prstGeom prst="roundRect">
+            <a:avLst/>
+          </a:prstGeom>
+          <a:solidFill>
+            <a:srgbClr val="131D31"/>
+          </a:solidFill>
+          <a:ln w="15240">
+            <a:solidFill>
+              <a:srgbClr val="1E293B"/>
+            </a:solidFill>
+          </a:ln>
+        </p:spPr>
+        <p:style>
+          <a:lnRef idx="1">
+            <a:schemeClr val="accent1"/>
+          </a:lnRef>
+          <a:fillRef idx="3">
+            <a:schemeClr val="accent1"/>
+          </a:fillRef>
+          <a:effectRef idx="2">
+            <a:schemeClr val="accent1"/>
+          </a:effectRef>
+          <a:fontRef idx="minor">
+            <a:schemeClr val="lt1"/>
+          </a:fontRef>
+        </p:style>
+        <p:txBody>
+          <a:bodyPr rtlCol="0" anchor="ctr"/>
+          <a:lstStyle/>
+          <a:p>
+            <a:pPr algn="ctr"/>
+          </a:p>
+        </p:txBody>
+      </p:sp>
+      <p:sp>
+        <p:nvSpPr>
+          <p:cNvPr id="10" name="Rounded Rectangle 9"/>
+          <p:cNvSpPr/>
+          <p:nvPr/>
+        </p:nvSpPr>
+        <p:spPr>
+          <a:xfrm>
+            <a:off x="731520" y="1554480"/>
+            <a:ext cx="5120640" cy="109728"/>
+          </a:xfrm>
+          <a:prstGeom prst="roundRect">
+            <a:avLst/>
+          </a:prstGeom>
+          <a:solidFill>
+            <a:srgbClr val="EF4444"/>
+          </a:solidFill>
+          <a:ln>
+            <a:noFill/>
+          </a:ln>
+        </p:spPr>
+        <p:style>
+          <a:lnRef idx="1">
+            <a:schemeClr val="accent1"/>
+          </a:lnRef>
+          <a:fillRef idx="3">
+            <a:schemeClr val="accent1"/>
+          </a:fillRef>
+          <a:effectRef idx="2">
+            <a:schemeClr val="accent1"/>
+          </a:effectRef>
+          <a:fontRef idx="minor">
+            <a:schemeClr val="lt1"/>
+          </a:fontRef>
+        </p:style>
+        <p:txBody>
+          <a:bodyPr rtlCol="0" anchor="ctr"/>
+          <a:lstStyle/>
+          <a:p>
+            <a:pPr algn="ctr"/>
+          </a:p>
+        </p:txBody>
+      </p:sp>
+      <p:sp>
+        <p:nvSpPr>
+          <p:cNvPr id="11" name="TextBox 10"/>
+          <p:cNvSpPr txBox="1"/>
+          <p:nvPr/>
+        </p:nvSpPr>
+        <p:spPr>
+          <a:xfrm>
+            <a:off x="960120" y="1719072"/>
+            <a:ext cx="4663440" cy="4160520"/>
+          </a:xfrm>
+          <a:prstGeom prst="rect">
+            <a:avLst/>
+          </a:prstGeom>
+          <a:noFill/>
+        </p:spPr>
+        <p:txBody>
+          <a:bodyPr wrap="square">
+            <a:spAutoFit/>
+          </a:bodyPr>
+          <a:lstStyle/>
+          <a:p>
+            <a:pPr>
+              <a:defRPr sz="1500" b="1">
+                <a:solidFill>
+                  <a:srgbClr val="FFFFFF"/>
+                </a:solidFill>
+              </a:defRPr>
+            </a:pPr>
+            <a:r>
+              <a:t>🚨 Real-Time Hotlist Match Engine</a:t>
+            </a:r>
+          </a:p>
+          <a:p>
+            <a:pPr>
+              <a:spcBef>
+                <a:spcPts val="300"/>
+              </a:spcBef>
+              <a:defRPr sz="1050">
+                <a:solidFill>
+                  <a:srgbClr val="94A3B8"/>
+                </a:solidFill>
+              </a:defRPr>
+            </a:pPr>
+            <a:r>
+              <a:t>Integrates with CCTNS &amp; police stolen vehicle databases</a:t>
+            </a:r>
+          </a:p>
+          <a:p>
+            <a:pPr>
+              <a:spcBef>
+                <a:spcPts val="1000"/>
+              </a:spcBef>
+              <a:defRPr sz="1100">
+                <a:solidFill>
+                  <a:srgbClr val="F8FAFC"/>
+                </a:solidFill>
+              </a:defRPr>
+            </a:pPr>
+            <a:r>
+              <a:t>• Redis In-Memory Key-Value: Performs hash lookups in &lt; 1ms per recognized license plate.</a:t>
+            </a:r>
+          </a:p>
+          <a:p>
+            <a:pPr>
+              <a:spcBef>
+                <a:spcPts val="1000"/>
+              </a:spcBef>
+              <a:defRPr sz="1100">
+                <a:solidFill>
+                  <a:srgbClr val="F8FAFC"/>
+                </a:solidFill>
+              </a:defRPr>
+            </a:pPr>
+            <a:r>
+              <a:t>• Fuzzy Levenshtein Matcher: Tolerates single-character OCR scratches to catch disguised plates.</a:t>
+            </a:r>
+          </a:p>
+          <a:p>
+            <a:pPr>
+              <a:spcBef>
+                <a:spcPts val="1000"/>
+              </a:spcBef>
+              <a:defRPr sz="1100">
+                <a:solidFill>
+                  <a:srgbClr val="F8FAFC"/>
+                </a:solidFill>
+              </a:defRPr>
+            </a:pPr>
+            <a:r>
+              <a:t>• Severity Categorization: Distinguishes CRITICAL (Stolen/Armed), HIGH (Wanted), and MEDIUM alerts.</a:t>
+            </a:r>
+          </a:p>
+          <a:p>
+            <a:pPr>
+              <a:spcBef>
+                <a:spcPts val="1000"/>
+              </a:spcBef>
+              <a:defRPr sz="1100">
+                <a:solidFill>
+                  <a:srgbClr val="F8FAFC"/>
+                </a:solidFill>
+              </a:defRPr>
+            </a:pPr>
+            <a:r>
+              <a:t>• Instant Audio Siren: Loud audio chime and red flashing toaster alerts the operator immediately.</a:t>
+            </a:r>
+          </a:p>
+        </p:txBody>
+      </p:sp>
+      <p:sp>
+        <p:nvSpPr>
+          <p:cNvPr id="12" name="Rounded Rectangle 11"/>
+          <p:cNvSpPr/>
+          <p:nvPr/>
+        </p:nvSpPr>
+        <p:spPr>
+          <a:xfrm>
+            <a:off x="6217920" y="1554480"/>
+            <a:ext cx="5212080" cy="4480560"/>
+          </a:xfrm>
+          <a:prstGeom prst="roundRect">
+            <a:avLst/>
+          </a:prstGeom>
+          <a:solidFill>
+            <a:srgbClr val="131D31"/>
+          </a:solidFill>
+          <a:ln w="15240">
+            <a:solidFill>
+              <a:srgbClr val="1E293B"/>
+            </a:solidFill>
+          </a:ln>
+        </p:spPr>
+        <p:style>
+          <a:lnRef idx="1">
+            <a:schemeClr val="accent1"/>
+          </a:lnRef>
+          <a:fillRef idx="3">
+            <a:schemeClr val="accent1"/>
+          </a:fillRef>
+          <a:effectRef idx="2">
+            <a:schemeClr val="accent1"/>
+          </a:effectRef>
+          <a:fontRef idx="minor">
+            <a:schemeClr val="lt1"/>
+          </a:fontRef>
+        </p:style>
+        <p:txBody>
+          <a:bodyPr rtlCol="0" anchor="ctr"/>
+          <a:lstStyle/>
+          <a:p>
+            <a:pPr algn="ctr"/>
+          </a:p>
+        </p:txBody>
+      </p:sp>
+      <p:sp>
+        <p:nvSpPr>
+          <p:cNvPr id="13" name="Rounded Rectangle 12"/>
+          <p:cNvSpPr/>
+          <p:nvPr/>
+        </p:nvSpPr>
+        <p:spPr>
+          <a:xfrm>
+            <a:off x="6217920" y="1554480"/>
+            <a:ext cx="5212080" cy="109728"/>
+          </a:xfrm>
+          <a:prstGeom prst="roundRect">
+            <a:avLst/>
+          </a:prstGeom>
+          <a:solidFill>
+            <a:srgbClr val="06B6D4"/>
+          </a:solidFill>
+          <a:ln>
+            <a:noFill/>
+          </a:ln>
+        </p:spPr>
+        <p:style>
+          <a:lnRef idx="1">
+            <a:schemeClr val="accent1"/>
+          </a:lnRef>
+          <a:fillRef idx="3">
+            <a:schemeClr val="accent1"/>
+          </a:fillRef>
+          <a:effectRef idx="2">
+            <a:schemeClr val="accent1"/>
+          </a:effectRef>
+          <a:fontRef idx="minor">
+            <a:schemeClr val="lt1"/>
+          </a:fontRef>
+        </p:style>
+        <p:txBody>
+          <a:bodyPr rtlCol="0" anchor="ctr"/>
+          <a:lstStyle/>
+          <a:p>
+            <a:pPr algn="ctr"/>
+          </a:p>
+        </p:txBody>
+      </p:sp>
+      <p:sp>
+        <p:nvSpPr>
+          <p:cNvPr id="14" name="TextBox 13"/>
+          <p:cNvSpPr txBox="1"/>
+          <p:nvPr/>
+        </p:nvSpPr>
+        <p:spPr>
+          <a:xfrm>
+            <a:off x="6446520" y="1719072"/>
+            <a:ext cx="4754880" cy="4160520"/>
+          </a:xfrm>
+          <a:prstGeom prst="rect">
+            <a:avLst/>
+          </a:prstGeom>
+          <a:noFill/>
+        </p:spPr>
+        <p:txBody>
+          <a:bodyPr wrap="square">
+            <a:spAutoFit/>
+          </a:bodyPr>
+          <a:lstStyle/>
+          <a:p>
+            <a:pPr>
+              <a:defRPr sz="1500" b="1">
+                <a:solidFill>
+                  <a:srgbClr val="FFFFFF"/>
+                </a:solidFill>
+              </a:defRPr>
+            </a:pPr>
+            <a:r>
+              <a:t>⚡ Command Center Alert Card Example</a:t>
+            </a:r>
+          </a:p>
+          <a:p>
+            <a:pPr>
+              <a:spcBef>
+                <a:spcPts val="300"/>
+              </a:spcBef>
+              <a:defRPr sz="1050">
+                <a:solidFill>
+                  <a:srgbClr val="94A3B8"/>
+                </a:solidFill>
+              </a:defRPr>
+            </a:pPr>
+            <a:r>
+              <a:t>What the police operator sees in real time:</a:t>
+            </a:r>
+          </a:p>
+        </p:txBody>
+      </p:sp>
+      <p:sp>
+        <p:nvSpPr>
+          <p:cNvPr id="15" name="Rounded Rectangle 14"/>
+          <p:cNvSpPr/>
+          <p:nvPr/>
+        </p:nvSpPr>
+        <p:spPr>
+          <a:xfrm>
+            <a:off x="6492240" y="2377440"/>
+            <a:ext cx="4663440" cy="731520"/>
+          </a:xfrm>
+          <a:prstGeom prst="roundRect">
+            <a:avLst/>
+          </a:prstGeom>
+          <a:solidFill>
+            <a:srgbClr val="3C0F14"/>
+          </a:solidFill>
+          <a:ln w="19050">
+            <a:solidFill>
+              <a:srgbClr val="EF4444"/>
+            </a:solidFill>
+          </a:ln>
+        </p:spPr>
+        <p:style>
+          <a:lnRef idx="1">
+            <a:schemeClr val="accent1"/>
+          </a:lnRef>
+          <a:fillRef idx="3">
+            <a:schemeClr val="accent1"/>
+          </a:fillRef>
+          <a:effectRef idx="2">
+            <a:schemeClr val="accent1"/>
+          </a:effectRef>
+          <a:fontRef idx="minor">
+            <a:schemeClr val="lt1"/>
+          </a:fontRef>
+        </p:style>
+        <p:txBody>
+          <a:bodyPr rtlCol="0" anchor="ctr"/>
+          <a:lstStyle/>
+          <a:p>
+            <a:pPr algn="ctr">
+              <a:defRPr sz="1200" b="1">
+                <a:solidFill>
+                  <a:srgbClr val="F87171"/>
+                </a:solidFill>
+              </a:defRPr>
+            </a:pPr>
+            <a:r>
+              <a:t>🚨 CRITICAL HOTLIST MATCH  [ &lt; 380ms ]</a:t>
+            </a:r>
+          </a:p>
+          <a:p>
+            <a:pPr>
+              <a:defRPr sz="1000">
+                <a:solidFill>
+                  <a:srgbClr val="F8FAFC"/>
+                </a:solidFill>
+              </a:defRPr>
+            </a:pPr>
+            <a:r>
+              <a:t>FIR-2026-9081 • STOLEN SUV REPORTED</a:t>
+            </a:r>
+          </a:p>
+        </p:txBody>
+      </p:sp>
+      <p:sp>
+        <p:nvSpPr>
+          <p:cNvPr id="16" name="Rounded Rectangle 15"/>
+          <p:cNvSpPr/>
+          <p:nvPr/>
+        </p:nvSpPr>
+        <p:spPr>
+          <a:xfrm>
+            <a:off x="6492240" y="3200400"/>
+            <a:ext cx="4663440" cy="1645920"/>
+          </a:xfrm>
+          <a:prstGeom prst="roundRect">
+            <a:avLst/>
+          </a:prstGeom>
+          <a:solidFill>
+            <a:srgbClr val="0F172A"/>
+          </a:solidFill>
+          <a:ln>
+            <a:solidFill>
+              <a:srgbClr val="1E293B"/>
+            </a:solidFill>
+          </a:ln>
+        </p:spPr>
+        <p:style>
+          <a:lnRef idx="1">
+            <a:schemeClr val="accent1"/>
+          </a:lnRef>
+          <a:fillRef idx="3">
+            <a:schemeClr val="accent1"/>
+          </a:fillRef>
+          <a:effectRef idx="2">
+            <a:schemeClr val="accent1"/>
+          </a:effectRef>
+          <a:fontRef idx="minor">
+            <a:schemeClr val="lt1"/>
+          </a:fontRef>
+        </p:style>
+        <p:txBody>
+          <a:bodyPr rtlCol="0" anchor="ctr" wrap="square"/>
+          <a:lstStyle/>
+          <a:p>
+            <a:pPr algn="ctr">
+              <a:defRPr sz="1050">
+                <a:solidFill>
+                  <a:srgbClr val="F8FAFC"/>
+                </a:solidFill>
+              </a:defRPr>
+            </a:pPr>
+            <a:r>
+              <a:t>📍 Location: SG Highway - Pakwan Junction (CAM-04)</a:t>
+            </a:r>
+          </a:p>
+          <a:p>
+            <a:pPr>
+              <a:spcBef>
+                <a:spcPts val="400"/>
+              </a:spcBef>
+              <a:defRPr sz="1050">
+                <a:solidFill>
+                  <a:srgbClr val="F8FAFC"/>
+                </a:solidFill>
+              </a:defRPr>
+            </a:pPr>
+            <a:r>
+              <a:t>⏱️ Timestamp: Today at 10:45:22 AM</a:t>
+            </a:r>
+          </a:p>
+          <a:p>
+            <a:pPr>
+              <a:spcBef>
+                <a:spcPts val="400"/>
+              </a:spcBef>
+              <a:defRPr sz="1050">
+                <a:solidFill>
+                  <a:srgbClr val="F8FAFC"/>
+                </a:solidFill>
+              </a:defRPr>
+            </a:pPr>
+            <a:r>
+              <a:t>🚘 Vehicle: GJ01AB1234 (White Toyota Fortuner)</a:t>
+            </a:r>
+          </a:p>
+          <a:p>
+            <a:pPr>
+              <a:spcBef>
+                <a:spcPts val="400"/>
+              </a:spcBef>
+              <a:defRPr sz="1050">
+                <a:solidFill>
+                  <a:srgbClr val="F8FAFC"/>
+                </a:solidFill>
+              </a:defRPr>
+            </a:pPr>
+            <a:r>
+              <a:t>👮 Police Station: Vastrapur PS, Ahmedabad</a:t>
+            </a:r>
+          </a:p>
+        </p:txBody>
+      </p:sp>
+      <p:sp>
+        <p:nvSpPr>
+          <p:cNvPr id="17" name="Rounded Rectangle 16"/>
+          <p:cNvSpPr/>
+          <p:nvPr/>
+        </p:nvSpPr>
+        <p:spPr>
+          <a:xfrm>
+            <a:off x="6492240" y="5029200"/>
+            <a:ext cx="2240280" cy="548640"/>
+          </a:xfrm>
+          <a:prstGeom prst="roundRect">
+            <a:avLst/>
+          </a:prstGeom>
+          <a:solidFill>
+            <a:srgbClr val="0284C7"/>
+          </a:solidFill>
+          <a:ln>
+            <a:noFill/>
+          </a:ln>
+        </p:spPr>
+        <p:style>
+          <a:lnRef idx="1">
+            <a:schemeClr val="accent1"/>
+          </a:lnRef>
+          <a:fillRef idx="3">
+            <a:schemeClr val="accent1"/>
+          </a:fillRef>
+          <a:effectRef idx="2">
+            <a:schemeClr val="accent1"/>
+          </a:effectRef>
+          <a:fontRef idx="minor">
+            <a:schemeClr val="lt1"/>
+          </a:fontRef>
+        </p:style>
+        <p:txBody>
+          <a:bodyPr rtlCol="0" anchor="ctr"/>
+          <a:lstStyle/>
+          <a:p>
+            <a:pPr algn="ctr">
+              <a:defRPr sz="1100" b="1">
+                <a:solidFill>
+                  <a:srgbClr val="FFFFFF"/>
+                </a:solidFill>
+              </a:defRPr>
+            </a:pPr>
+            <a:r>
+              <a:t>📺 1-Click Live Feed</a:t>
+            </a:r>
+          </a:p>
+        </p:txBody>
+      </p:sp>
+      <p:sp>
+        <p:nvSpPr>
+          <p:cNvPr id="18" name="Rounded Rectangle 17"/>
+          <p:cNvSpPr/>
+          <p:nvPr/>
+        </p:nvSpPr>
+        <p:spPr>
+          <a:xfrm>
+            <a:off x="8915400" y="5029200"/>
+            <a:ext cx="2240280" cy="548640"/>
+          </a:xfrm>
+          <a:prstGeom prst="roundRect">
+            <a:avLst/>
+          </a:prstGeom>
+          <a:solidFill>
+            <a:srgbClr val="EF4444"/>
+          </a:solidFill>
+          <a:ln>
+            <a:noFill/>
+          </a:ln>
+        </p:spPr>
+        <p:style>
+          <a:lnRef idx="1">
+            <a:schemeClr val="accent1"/>
+          </a:lnRef>
+          <a:fillRef idx="3">
+            <a:schemeClr val="accent1"/>
+          </a:fillRef>
+          <a:effectRef idx="2">
+            <a:schemeClr val="accent1"/>
+          </a:effectRef>
+          <a:fontRef idx="minor">
+            <a:schemeClr val="lt1"/>
+          </a:fontRef>
+        </p:style>
+        <p:txBody>
+          <a:bodyPr rtlCol="0" anchor="ctr"/>
+          <a:lstStyle/>
+          <a:p>
+            <a:pPr algn="ctr">
+              <a:defRPr sz="1100" b="1">
+                <a:solidFill>
+                  <a:srgbClr val="FFFFFF"/>
+                </a:solidFill>
+              </a:defRPr>
+            </a:pPr>
+            <a:r>
+              <a:t>🚔 Dispatch PCR Van</a:t>
+            </a:r>
+          </a:p>
+        </p:txBody>
+      </p:sp>
     </p:spTree>
   </p:cSld>
   <p:clrMapOvr>
@@ -3305,20 +7363,12 @@
         <p:nvPr/>
       </p:nvGrpSpPr>
       <p:grpSpPr/>
-      <p:pic>
-        <p:nvPicPr>
-          <p:cNvPr id="2" name="Picture 1" descr="slide_2.png"/>
-          <p:cNvPicPr>
-            <a:picLocks noChangeAspect="1"/>
-          </p:cNvPicPr>
-          <p:nvPr/>
-        </p:nvPicPr>
-        <p:blipFill>
-          <a:blip r:embed="rId2"/>
-          <a:stretch>
-            <a:fillRect/>
-          </a:stretch>
-        </p:blipFill>
+      <p:sp>
+        <p:nvSpPr>
+          <p:cNvPr id="2" name="Rectangle 1"/>
+          <p:cNvSpPr/>
+          <p:nvPr/>
+        </p:nvSpPr>
         <p:spPr>
           <a:xfrm>
             <a:off x="0" y="0"/>
@@ -3327,8 +7377,866 @@
           <a:prstGeom prst="rect">
             <a:avLst/>
           </a:prstGeom>
-        </p:spPr>
-      </p:pic>
+          <a:solidFill>
+            <a:srgbClr val="0B0F19"/>
+          </a:solidFill>
+          <a:ln>
+            <a:noFill/>
+          </a:ln>
+        </p:spPr>
+        <p:style>
+          <a:lnRef idx="1">
+            <a:schemeClr val="accent1"/>
+          </a:lnRef>
+          <a:fillRef idx="3">
+            <a:schemeClr val="accent1"/>
+          </a:fillRef>
+          <a:effectRef idx="2">
+            <a:schemeClr val="accent1"/>
+          </a:effectRef>
+          <a:fontRef idx="minor">
+            <a:schemeClr val="lt1"/>
+          </a:fontRef>
+        </p:style>
+        <p:txBody>
+          <a:bodyPr rtlCol="0" anchor="ctr"/>
+          <a:lstStyle/>
+          <a:p>
+            <a:pPr algn="ctr"/>
+          </a:p>
+        </p:txBody>
+      </p:sp>
+      <p:sp>
+        <p:nvSpPr>
+          <p:cNvPr id="3" name="Rounded Rectangle 2"/>
+          <p:cNvSpPr/>
+          <p:nvPr/>
+        </p:nvSpPr>
+        <p:spPr>
+          <a:xfrm>
+            <a:off x="731520" y="365760"/>
+            <a:ext cx="2926080" cy="292608"/>
+          </a:xfrm>
+          <a:prstGeom prst="roundRect">
+            <a:avLst/>
+          </a:prstGeom>
+          <a:solidFill>
+            <a:srgbClr val="0F1E30"/>
+          </a:solidFill>
+          <a:ln w="12700">
+            <a:solidFill>
+              <a:srgbClr val="06B6D4"/>
+            </a:solidFill>
+          </a:ln>
+        </p:spPr>
+        <p:style>
+          <a:lnRef idx="1">
+            <a:schemeClr val="accent1"/>
+          </a:lnRef>
+          <a:fillRef idx="3">
+            <a:schemeClr val="accent1"/>
+          </a:fillRef>
+          <a:effectRef idx="2">
+            <a:schemeClr val="accent1"/>
+          </a:effectRef>
+          <a:fontRef idx="minor">
+            <a:schemeClr val="lt1"/>
+          </a:fontRef>
+        </p:style>
+        <p:txBody>
+          <a:bodyPr rtlCol="0" anchor="ctr"/>
+          <a:lstStyle/>
+          <a:p>
+            <a:pPr algn="ctr">
+              <a:defRPr sz="1000" b="1">
+                <a:solidFill>
+                  <a:srgbClr val="06B6D4"/>
+                </a:solidFill>
+              </a:defRPr>
+            </a:pPr>
+            <a:r>
+              <a:t>🛡️ GIS &amp; FORENSICS</a:t>
+            </a:r>
+          </a:p>
+        </p:txBody>
+      </p:sp>
+      <p:sp>
+        <p:nvSpPr>
+          <p:cNvPr id="4" name="TextBox 3"/>
+          <p:cNvSpPr txBox="1"/>
+          <p:nvPr/>
+        </p:nvSpPr>
+        <p:spPr>
+          <a:xfrm>
+            <a:off x="731520" y="685800"/>
+            <a:ext cx="10698480" cy="502920"/>
+          </a:xfrm>
+          <a:prstGeom prst="rect">
+            <a:avLst/>
+          </a:prstGeom>
+          <a:noFill/>
+        </p:spPr>
+        <p:txBody>
+          <a:bodyPr wrap="none">
+            <a:spAutoFit/>
+          </a:bodyPr>
+          <a:lstStyle/>
+          <a:p>
+            <a:pPr>
+              <a:defRPr sz="2200" b="1">
+                <a:solidFill>
+                  <a:srgbClr val="FFFFFF"/>
+                </a:solidFill>
+              </a:defRPr>
+            </a:pPr>
+            <a:r>
+              <a:t>Interactive GIS Map &amp; Vehicle Breadcrumb Replay</a:t>
+            </a:r>
+          </a:p>
+        </p:txBody>
+      </p:sp>
+      <p:sp>
+        <p:nvSpPr>
+          <p:cNvPr id="5" name="TextBox 4"/>
+          <p:cNvSpPr txBox="1"/>
+          <p:nvPr/>
+        </p:nvSpPr>
+        <p:spPr>
+          <a:xfrm>
+            <a:off x="731520" y="1188720"/>
+            <a:ext cx="10698480" cy="320040"/>
+          </a:xfrm>
+          <a:prstGeom prst="rect">
+            <a:avLst/>
+          </a:prstGeom>
+          <a:noFill/>
+        </p:spPr>
+        <p:txBody>
+          <a:bodyPr wrap="none">
+            <a:spAutoFit/>
+          </a:bodyPr>
+          <a:lstStyle/>
+          <a:p>
+            <a:pPr>
+              <a:defRPr sz="1200">
+                <a:solidFill>
+                  <a:srgbClr val="94A3B8"/>
+                </a:solidFill>
+              </a:defRPr>
+            </a:pPr>
+            <a:r>
+              <a:t>Reconstruct suspect escape routes with spatial speed estimation and directional polylines.</a:t>
+            </a:r>
+          </a:p>
+        </p:txBody>
+      </p:sp>
+      <p:sp>
+        <p:nvSpPr>
+          <p:cNvPr id="6" name="Rectangle 5"/>
+          <p:cNvSpPr/>
+          <p:nvPr/>
+        </p:nvSpPr>
+        <p:spPr>
+          <a:xfrm>
+            <a:off x="731520" y="6309360"/>
+            <a:ext cx="10698480" cy="18288"/>
+          </a:xfrm>
+          <a:prstGeom prst="rect">
+            <a:avLst/>
+          </a:prstGeom>
+          <a:solidFill>
+            <a:srgbClr val="1E293B"/>
+          </a:solidFill>
+          <a:ln>
+            <a:noFill/>
+          </a:ln>
+        </p:spPr>
+        <p:style>
+          <a:lnRef idx="1">
+            <a:schemeClr val="accent1"/>
+          </a:lnRef>
+          <a:fillRef idx="3">
+            <a:schemeClr val="accent1"/>
+          </a:fillRef>
+          <a:effectRef idx="2">
+            <a:schemeClr val="accent1"/>
+          </a:effectRef>
+          <a:fontRef idx="minor">
+            <a:schemeClr val="lt1"/>
+          </a:fontRef>
+        </p:style>
+        <p:txBody>
+          <a:bodyPr rtlCol="0" anchor="ctr"/>
+          <a:lstStyle/>
+          <a:p>
+            <a:pPr algn="ctr"/>
+          </a:p>
+        </p:txBody>
+      </p:sp>
+      <p:sp>
+        <p:nvSpPr>
+          <p:cNvPr id="7" name="TextBox 6"/>
+          <p:cNvSpPr txBox="1"/>
+          <p:nvPr/>
+        </p:nvSpPr>
+        <p:spPr>
+          <a:xfrm>
+            <a:off x="731520" y="6355080"/>
+            <a:ext cx="10698480" cy="365760"/>
+          </a:xfrm>
+          <a:prstGeom prst="rect">
+            <a:avLst/>
+          </a:prstGeom>
+          <a:noFill/>
+        </p:spPr>
+        <p:txBody>
+          <a:bodyPr wrap="none">
+            <a:spAutoFit/>
+          </a:bodyPr>
+          <a:lstStyle/>
+          <a:p>
+            <a:pPr>
+              <a:defRPr sz="1000">
+                <a:solidFill>
+                  <a:srgbClr val="64748B"/>
+                </a:solidFill>
+              </a:defRPr>
+            </a:pPr>
+            <a:r>
+              <a:t>Sentinel AI Surveillance Platform • 100% Self-Hosted • SDC Compliant</a:t>
+            </a:r>
+          </a:p>
+        </p:txBody>
+      </p:sp>
+      <p:sp>
+        <p:nvSpPr>
+          <p:cNvPr id="8" name="TextBox 7"/>
+          <p:cNvSpPr txBox="1"/>
+          <p:nvPr/>
+        </p:nvSpPr>
+        <p:spPr>
+          <a:xfrm>
+            <a:off x="10058400" y="6355080"/>
+            <a:ext cx="1371600" cy="365760"/>
+          </a:xfrm>
+          <a:prstGeom prst="rect">
+            <a:avLst/>
+          </a:prstGeom>
+          <a:noFill/>
+        </p:spPr>
+        <p:txBody>
+          <a:bodyPr wrap="none">
+            <a:spAutoFit/>
+          </a:bodyPr>
+          <a:lstStyle/>
+          <a:p>
+            <a:pPr algn="r">
+              <a:defRPr sz="1000" b="1">
+                <a:solidFill>
+                  <a:srgbClr val="64748B"/>
+                </a:solidFill>
+              </a:defRPr>
+            </a:pPr>
+            <a:r>
+              <a:t>Slide 6 / 8</a:t>
+            </a:r>
+          </a:p>
+        </p:txBody>
+      </p:sp>
+      <p:sp>
+        <p:nvSpPr>
+          <p:cNvPr id="9" name="Rounded Rectangle 8"/>
+          <p:cNvSpPr/>
+          <p:nvPr/>
+        </p:nvSpPr>
+        <p:spPr>
+          <a:xfrm>
+            <a:off x="731520" y="1554480"/>
+            <a:ext cx="3383280" cy="4480560"/>
+          </a:xfrm>
+          <a:prstGeom prst="roundRect">
+            <a:avLst/>
+          </a:prstGeom>
+          <a:solidFill>
+            <a:srgbClr val="131D31"/>
+          </a:solidFill>
+          <a:ln w="15240">
+            <a:solidFill>
+              <a:srgbClr val="1E293B"/>
+            </a:solidFill>
+          </a:ln>
+        </p:spPr>
+        <p:style>
+          <a:lnRef idx="1">
+            <a:schemeClr val="accent1"/>
+          </a:lnRef>
+          <a:fillRef idx="3">
+            <a:schemeClr val="accent1"/>
+          </a:fillRef>
+          <a:effectRef idx="2">
+            <a:schemeClr val="accent1"/>
+          </a:effectRef>
+          <a:fontRef idx="minor">
+            <a:schemeClr val="lt1"/>
+          </a:fontRef>
+        </p:style>
+        <p:txBody>
+          <a:bodyPr rtlCol="0" anchor="ctr"/>
+          <a:lstStyle/>
+          <a:p>
+            <a:pPr algn="ctr"/>
+          </a:p>
+        </p:txBody>
+      </p:sp>
+      <p:sp>
+        <p:nvSpPr>
+          <p:cNvPr id="10" name="Rounded Rectangle 9"/>
+          <p:cNvSpPr/>
+          <p:nvPr/>
+        </p:nvSpPr>
+        <p:spPr>
+          <a:xfrm>
+            <a:off x="731520" y="1554480"/>
+            <a:ext cx="3383280" cy="109728"/>
+          </a:xfrm>
+          <a:prstGeom prst="roundRect">
+            <a:avLst/>
+          </a:prstGeom>
+          <a:solidFill>
+            <a:srgbClr val="06B6D4"/>
+          </a:solidFill>
+          <a:ln>
+            <a:noFill/>
+          </a:ln>
+        </p:spPr>
+        <p:style>
+          <a:lnRef idx="1">
+            <a:schemeClr val="accent1"/>
+          </a:lnRef>
+          <a:fillRef idx="3">
+            <a:schemeClr val="accent1"/>
+          </a:fillRef>
+          <a:effectRef idx="2">
+            <a:schemeClr val="accent1"/>
+          </a:effectRef>
+          <a:fontRef idx="minor">
+            <a:schemeClr val="lt1"/>
+          </a:fontRef>
+        </p:style>
+        <p:txBody>
+          <a:bodyPr rtlCol="0" anchor="ctr"/>
+          <a:lstStyle/>
+          <a:p>
+            <a:pPr algn="ctr"/>
+          </a:p>
+        </p:txBody>
+      </p:sp>
+      <p:sp>
+        <p:nvSpPr>
+          <p:cNvPr id="11" name="TextBox 10"/>
+          <p:cNvSpPr txBox="1"/>
+          <p:nvPr/>
+        </p:nvSpPr>
+        <p:spPr>
+          <a:xfrm>
+            <a:off x="960120" y="1719072"/>
+            <a:ext cx="2926080" cy="4160520"/>
+          </a:xfrm>
+          <a:prstGeom prst="rect">
+            <a:avLst/>
+          </a:prstGeom>
+          <a:noFill/>
+        </p:spPr>
+        <p:txBody>
+          <a:bodyPr wrap="square">
+            <a:spAutoFit/>
+          </a:bodyPr>
+          <a:lstStyle/>
+          <a:p>
+            <a:pPr>
+              <a:defRPr sz="1500" b="1">
+                <a:solidFill>
+                  <a:srgbClr val="FFFFFF"/>
+                </a:solidFill>
+              </a:defRPr>
+            </a:pPr>
+            <a:r>
+              <a:t>🗺️ Live GIS Overview</a:t>
+            </a:r>
+          </a:p>
+          <a:p>
+            <a:pPr>
+              <a:spcBef>
+                <a:spcPts val="300"/>
+              </a:spcBef>
+              <a:defRPr sz="1050">
+                <a:solidFill>
+                  <a:srgbClr val="94A3B8"/>
+                </a:solidFill>
+              </a:defRPr>
+            </a:pPr>
+            <a:r>
+              <a:t>Leaflet + OpenStreetMap + PostGIS</a:t>
+            </a:r>
+          </a:p>
+          <a:p>
+            <a:pPr>
+              <a:spcBef>
+                <a:spcPts val="1000"/>
+              </a:spcBef>
+              <a:defRPr sz="1100">
+                <a:solidFill>
+                  <a:srgbClr val="F8FAFC"/>
+                </a:solidFill>
+              </a:defRPr>
+            </a:pPr>
+            <a:r>
+              <a:t>• Green/Red camera health pins across city junctions</a:t>
+            </a:r>
+          </a:p>
+          <a:p>
+            <a:pPr>
+              <a:spcBef>
+                <a:spcPts val="1000"/>
+              </a:spcBef>
+              <a:defRPr sz="1100">
+                <a:solidFill>
+                  <a:srgbClr val="F8FAFC"/>
+                </a:solidFill>
+              </a:defRPr>
+            </a:pPr>
+            <a:r>
+              <a:t>• Flashing radar alert marker on incident camera</a:t>
+            </a:r>
+          </a:p>
+          <a:p>
+            <a:pPr>
+              <a:spcBef>
+                <a:spcPts val="1000"/>
+              </a:spcBef>
+              <a:defRPr sz="1100">
+                <a:solidFill>
+                  <a:srgbClr val="F8FAFC"/>
+                </a:solidFill>
+              </a:defRPr>
+            </a:pPr>
+            <a:r>
+              <a:t>• Spatial camera clustering for high-density areas</a:t>
+            </a:r>
+          </a:p>
+          <a:p>
+            <a:pPr>
+              <a:spcBef>
+                <a:spcPts val="1000"/>
+              </a:spcBef>
+              <a:defRPr sz="1100">
+                <a:solidFill>
+                  <a:srgbClr val="F8FAFC"/>
+                </a:solidFill>
+              </a:defRPr>
+            </a:pPr>
+            <a:r>
+              <a:t>• Zero Google Maps licensing fees (100% self-hosted)</a:t>
+            </a:r>
+          </a:p>
+        </p:txBody>
+      </p:sp>
+      <p:sp>
+        <p:nvSpPr>
+          <p:cNvPr id="12" name="Rounded Rectangle 11"/>
+          <p:cNvSpPr/>
+          <p:nvPr/>
+        </p:nvSpPr>
+        <p:spPr>
+          <a:xfrm>
+            <a:off x="4389120" y="1554480"/>
+            <a:ext cx="3383280" cy="4480560"/>
+          </a:xfrm>
+          <a:prstGeom prst="roundRect">
+            <a:avLst/>
+          </a:prstGeom>
+          <a:solidFill>
+            <a:srgbClr val="131D31"/>
+          </a:solidFill>
+          <a:ln w="15240">
+            <a:solidFill>
+              <a:srgbClr val="1E293B"/>
+            </a:solidFill>
+          </a:ln>
+        </p:spPr>
+        <p:style>
+          <a:lnRef idx="1">
+            <a:schemeClr val="accent1"/>
+          </a:lnRef>
+          <a:fillRef idx="3">
+            <a:schemeClr val="accent1"/>
+          </a:fillRef>
+          <a:effectRef idx="2">
+            <a:schemeClr val="accent1"/>
+          </a:effectRef>
+          <a:fontRef idx="minor">
+            <a:schemeClr val="lt1"/>
+          </a:fontRef>
+        </p:style>
+        <p:txBody>
+          <a:bodyPr rtlCol="0" anchor="ctr"/>
+          <a:lstStyle/>
+          <a:p>
+            <a:pPr algn="ctr"/>
+          </a:p>
+        </p:txBody>
+      </p:sp>
+      <p:sp>
+        <p:nvSpPr>
+          <p:cNvPr id="13" name="Rounded Rectangle 12"/>
+          <p:cNvSpPr/>
+          <p:nvPr/>
+        </p:nvSpPr>
+        <p:spPr>
+          <a:xfrm>
+            <a:off x="4389120" y="1554480"/>
+            <a:ext cx="3383280" cy="109728"/>
+          </a:xfrm>
+          <a:prstGeom prst="roundRect">
+            <a:avLst/>
+          </a:prstGeom>
+          <a:solidFill>
+            <a:srgbClr val="A855F7"/>
+          </a:solidFill>
+          <a:ln>
+            <a:noFill/>
+          </a:ln>
+        </p:spPr>
+        <p:style>
+          <a:lnRef idx="1">
+            <a:schemeClr val="accent1"/>
+          </a:lnRef>
+          <a:fillRef idx="3">
+            <a:schemeClr val="accent1"/>
+          </a:fillRef>
+          <a:effectRef idx="2">
+            <a:schemeClr val="accent1"/>
+          </a:effectRef>
+          <a:fontRef idx="minor">
+            <a:schemeClr val="lt1"/>
+          </a:fontRef>
+        </p:style>
+        <p:txBody>
+          <a:bodyPr rtlCol="0" anchor="ctr"/>
+          <a:lstStyle/>
+          <a:p>
+            <a:pPr algn="ctr"/>
+          </a:p>
+        </p:txBody>
+      </p:sp>
+      <p:sp>
+        <p:nvSpPr>
+          <p:cNvPr id="14" name="TextBox 13"/>
+          <p:cNvSpPr txBox="1"/>
+          <p:nvPr/>
+        </p:nvSpPr>
+        <p:spPr>
+          <a:xfrm>
+            <a:off x="4617720" y="1719072"/>
+            <a:ext cx="2926080" cy="4160520"/>
+          </a:xfrm>
+          <a:prstGeom prst="rect">
+            <a:avLst/>
+          </a:prstGeom>
+          <a:noFill/>
+        </p:spPr>
+        <p:txBody>
+          <a:bodyPr wrap="square">
+            <a:spAutoFit/>
+          </a:bodyPr>
+          <a:lstStyle/>
+          <a:p>
+            <a:pPr>
+              <a:defRPr sz="1500" b="1">
+                <a:solidFill>
+                  <a:srgbClr val="FFFFFF"/>
+                </a:solidFill>
+              </a:defRPr>
+            </a:pPr>
+            <a:r>
+              <a:t>📍 Numbered Breadcrumbs</a:t>
+            </a:r>
+          </a:p>
+          <a:p>
+            <a:pPr>
+              <a:spcBef>
+                <a:spcPts val="300"/>
+              </a:spcBef>
+              <a:defRPr sz="1050">
+                <a:solidFill>
+                  <a:srgbClr val="94A3B8"/>
+                </a:solidFill>
+              </a:defRPr>
+            </a:pPr>
+            <a:r>
+              <a:t>Chronological Journey Synthesis</a:t>
+            </a:r>
+          </a:p>
+          <a:p>
+            <a:pPr>
+              <a:spcBef>
+                <a:spcPts val="1000"/>
+              </a:spcBef>
+              <a:defRPr sz="1100">
+                <a:solidFill>
+                  <a:srgbClr val="F8FAFC"/>
+                </a:solidFill>
+              </a:defRPr>
+            </a:pPr>
+            <a:r>
+              <a:t>• Trajectory reconstruction (1 → 2 → 3 → 4)</a:t>
+            </a:r>
+          </a:p>
+          <a:p>
+            <a:pPr>
+              <a:spcBef>
+                <a:spcPts val="1000"/>
+              </a:spcBef>
+              <a:defRPr sz="1100">
+                <a:solidFill>
+                  <a:srgbClr val="F8FAFC"/>
+                </a:solidFill>
+              </a:defRPr>
+            </a:pPr>
+            <a:r>
+              <a:t>• Average speed calculation (km/h) between junctions</a:t>
+            </a:r>
+          </a:p>
+          <a:p>
+            <a:pPr>
+              <a:spcBef>
+                <a:spcPts val="1000"/>
+              </a:spcBef>
+              <a:defRPr sz="1100">
+                <a:solidFill>
+                  <a:srgbClr val="F8FAFC"/>
+                </a:solidFill>
+              </a:defRPr>
+            </a:pPr>
+            <a:r>
+              <a:t>• Delta-T transit time between consecutive cameras</a:t>
+            </a:r>
+          </a:p>
+          <a:p>
+            <a:pPr>
+              <a:spcBef>
+                <a:spcPts val="1000"/>
+              </a:spcBef>
+              <a:defRPr sz="1100">
+                <a:solidFill>
+                  <a:srgbClr val="F8FAFC"/>
+                </a:solidFill>
+              </a:defRPr>
+            </a:pPr>
+            <a:r>
+              <a:t>• Directional arrows highlight fleeing suspect heading</a:t>
+            </a:r>
+          </a:p>
+        </p:txBody>
+      </p:sp>
+      <p:sp>
+        <p:nvSpPr>
+          <p:cNvPr id="15" name="Rounded Rectangle 14"/>
+          <p:cNvSpPr/>
+          <p:nvPr/>
+        </p:nvSpPr>
+        <p:spPr>
+          <a:xfrm>
+            <a:off x="8046720" y="1554480"/>
+            <a:ext cx="3383280" cy="4480560"/>
+          </a:xfrm>
+          <a:prstGeom prst="roundRect">
+            <a:avLst/>
+          </a:prstGeom>
+          <a:solidFill>
+            <a:srgbClr val="131D31"/>
+          </a:solidFill>
+          <a:ln w="15240">
+            <a:solidFill>
+              <a:srgbClr val="1E293B"/>
+            </a:solidFill>
+          </a:ln>
+        </p:spPr>
+        <p:style>
+          <a:lnRef idx="1">
+            <a:schemeClr val="accent1"/>
+          </a:lnRef>
+          <a:fillRef idx="3">
+            <a:schemeClr val="accent1"/>
+          </a:fillRef>
+          <a:effectRef idx="2">
+            <a:schemeClr val="accent1"/>
+          </a:effectRef>
+          <a:fontRef idx="minor">
+            <a:schemeClr val="lt1"/>
+          </a:fontRef>
+        </p:style>
+        <p:txBody>
+          <a:bodyPr rtlCol="0" anchor="ctr"/>
+          <a:lstStyle/>
+          <a:p>
+            <a:pPr algn="ctr"/>
+          </a:p>
+        </p:txBody>
+      </p:sp>
+      <p:sp>
+        <p:nvSpPr>
+          <p:cNvPr id="16" name="Rounded Rectangle 15"/>
+          <p:cNvSpPr/>
+          <p:nvPr/>
+        </p:nvSpPr>
+        <p:spPr>
+          <a:xfrm>
+            <a:off x="8046720" y="1554480"/>
+            <a:ext cx="3383280" cy="109728"/>
+          </a:xfrm>
+          <a:prstGeom prst="roundRect">
+            <a:avLst/>
+          </a:prstGeom>
+          <a:solidFill>
+            <a:srgbClr val="10B981"/>
+          </a:solidFill>
+          <a:ln>
+            <a:noFill/>
+          </a:ln>
+        </p:spPr>
+        <p:style>
+          <a:lnRef idx="1">
+            <a:schemeClr val="accent1"/>
+          </a:lnRef>
+          <a:fillRef idx="3">
+            <a:schemeClr val="accent1"/>
+          </a:fillRef>
+          <a:effectRef idx="2">
+            <a:schemeClr val="accent1"/>
+          </a:effectRef>
+          <a:fontRef idx="minor">
+            <a:schemeClr val="lt1"/>
+          </a:fontRef>
+        </p:style>
+        <p:txBody>
+          <a:bodyPr rtlCol="0" anchor="ctr"/>
+          <a:lstStyle/>
+          <a:p>
+            <a:pPr algn="ctr"/>
+          </a:p>
+        </p:txBody>
+      </p:sp>
+      <p:sp>
+        <p:nvSpPr>
+          <p:cNvPr id="17" name="TextBox 16"/>
+          <p:cNvSpPr txBox="1"/>
+          <p:nvPr/>
+        </p:nvSpPr>
+        <p:spPr>
+          <a:xfrm>
+            <a:off x="8275320" y="1719072"/>
+            <a:ext cx="2926080" cy="4160520"/>
+          </a:xfrm>
+          <a:prstGeom prst="rect">
+            <a:avLst/>
+          </a:prstGeom>
+          <a:noFill/>
+        </p:spPr>
+        <p:txBody>
+          <a:bodyPr wrap="square">
+            <a:spAutoFit/>
+          </a:bodyPr>
+          <a:lstStyle/>
+          <a:p>
+            <a:pPr>
+              <a:defRPr sz="1500" b="1">
+                <a:solidFill>
+                  <a:srgbClr val="FFFFFF"/>
+                </a:solidFill>
+              </a:defRPr>
+            </a:pPr>
+            <a:r>
+              <a:t>📋 Forensic Dossier</a:t>
+            </a:r>
+          </a:p>
+          <a:p>
+            <a:pPr>
+              <a:spcBef>
+                <a:spcPts val="300"/>
+              </a:spcBef>
+              <a:defRPr sz="1050">
+                <a:solidFill>
+                  <a:srgbClr val="94A3B8"/>
+                </a:solidFill>
+              </a:defRPr>
+            </a:pPr>
+            <a:r>
+              <a:t>Court-Admissible Evidence Export</a:t>
+            </a:r>
+          </a:p>
+          <a:p>
+            <a:pPr>
+              <a:spcBef>
+                <a:spcPts val="1000"/>
+              </a:spcBef>
+              <a:defRPr sz="1100">
+                <a:solidFill>
+                  <a:srgbClr val="F8FAFC"/>
+                </a:solidFill>
+              </a:defRPr>
+            </a:pPr>
+            <a:r>
+              <a:t>• 1-Click printable PDF investigation dossiers</a:t>
+            </a:r>
+          </a:p>
+          <a:p>
+            <a:pPr>
+              <a:spcBef>
+                <a:spcPts val="1000"/>
+              </a:spcBef>
+              <a:defRPr sz="1100">
+                <a:solidFill>
+                  <a:srgbClr val="F8FAFC"/>
+                </a:solidFill>
+              </a:defRPr>
+            </a:pPr>
+            <a:r>
+              <a:t>• Full-frame snapshots + localized plate crops</a:t>
+            </a:r>
+          </a:p>
+          <a:p>
+            <a:pPr>
+              <a:spcBef>
+                <a:spcPts val="1000"/>
+              </a:spcBef>
+              <a:defRPr sz="1100">
+                <a:solidFill>
+                  <a:srgbClr val="F8FAFC"/>
+                </a:solidFill>
+              </a:defRPr>
+            </a:pPr>
+            <a:r>
+              <a:t>• Wildcard search for partial plates (GJ01??1234)</a:t>
+            </a:r>
+          </a:p>
+          <a:p>
+            <a:pPr>
+              <a:spcBef>
+                <a:spcPts val="1000"/>
+              </a:spcBef>
+              <a:defRPr sz="1100">
+                <a:solidFill>
+                  <a:srgbClr val="F8FAFC"/>
+                </a:solidFill>
+              </a:defRPr>
+            </a:pPr>
+            <a:r>
+              <a:t>• Tamper-evident cryptographic audit hashes</a:t>
+            </a:r>
+          </a:p>
+        </p:txBody>
+      </p:sp>
     </p:spTree>
   </p:cSld>
   <p:clrMapOvr>
@@ -3347,20 +8255,12 @@
         <p:nvPr/>
       </p:nvGrpSpPr>
       <p:grpSpPr/>
-      <p:pic>
-        <p:nvPicPr>
-          <p:cNvPr id="2" name="Picture 1" descr="slide_2.png"/>
-          <p:cNvPicPr>
-            <a:picLocks noChangeAspect="1"/>
-          </p:cNvPicPr>
-          <p:nvPr/>
-        </p:nvPicPr>
-        <p:blipFill>
-          <a:blip r:embed="rId2"/>
-          <a:stretch>
-            <a:fillRect/>
-          </a:stretch>
-        </p:blipFill>
+      <p:sp>
+        <p:nvSpPr>
+          <p:cNvPr id="2" name="Rectangle 1"/>
+          <p:cNvSpPr/>
+          <p:nvPr/>
+        </p:nvSpPr>
         <p:spPr>
           <a:xfrm>
             <a:off x="0" y="0"/>
@@ -3369,8 +8269,1057 @@
           <a:prstGeom prst="rect">
             <a:avLst/>
           </a:prstGeom>
-        </p:spPr>
-      </p:pic>
+          <a:solidFill>
+            <a:srgbClr val="0B0F19"/>
+          </a:solidFill>
+          <a:ln>
+            <a:noFill/>
+          </a:ln>
+        </p:spPr>
+        <p:style>
+          <a:lnRef idx="1">
+            <a:schemeClr val="accent1"/>
+          </a:lnRef>
+          <a:fillRef idx="3">
+            <a:schemeClr val="accent1"/>
+          </a:fillRef>
+          <a:effectRef idx="2">
+            <a:schemeClr val="accent1"/>
+          </a:effectRef>
+          <a:fontRef idx="minor">
+            <a:schemeClr val="lt1"/>
+          </a:fontRef>
+        </p:style>
+        <p:txBody>
+          <a:bodyPr rtlCol="0" anchor="ctr"/>
+          <a:lstStyle/>
+          <a:p>
+            <a:pPr algn="ctr"/>
+          </a:p>
+        </p:txBody>
+      </p:sp>
+      <p:sp>
+        <p:nvSpPr>
+          <p:cNvPr id="3" name="Rounded Rectangle 2"/>
+          <p:cNvSpPr/>
+          <p:nvPr/>
+        </p:nvSpPr>
+        <p:spPr>
+          <a:xfrm>
+            <a:off x="731520" y="365760"/>
+            <a:ext cx="2926080" cy="292608"/>
+          </a:xfrm>
+          <a:prstGeom prst="roundRect">
+            <a:avLst/>
+          </a:prstGeom>
+          <a:solidFill>
+            <a:srgbClr val="0F1E30"/>
+          </a:solidFill>
+          <a:ln w="12700">
+            <a:solidFill>
+              <a:srgbClr val="06B6D4"/>
+            </a:solidFill>
+          </a:ln>
+        </p:spPr>
+        <p:style>
+          <a:lnRef idx="1">
+            <a:schemeClr val="accent1"/>
+          </a:lnRef>
+          <a:fillRef idx="3">
+            <a:schemeClr val="accent1"/>
+          </a:fillRef>
+          <a:effectRef idx="2">
+            <a:schemeClr val="accent1"/>
+          </a:effectRef>
+          <a:fontRef idx="minor">
+            <a:schemeClr val="lt1"/>
+          </a:fontRef>
+        </p:style>
+        <p:txBody>
+          <a:bodyPr rtlCol="0" anchor="ctr"/>
+          <a:lstStyle/>
+          <a:p>
+            <a:pPr algn="ctr">
+              <a:defRPr sz="1000" b="1">
+                <a:solidFill>
+                  <a:srgbClr val="06B6D4"/>
+                </a:solidFill>
+              </a:defRPr>
+            </a:pPr>
+            <a:r>
+              <a:t>🛡️ COMMAND CENTER</a:t>
+            </a:r>
+          </a:p>
+        </p:txBody>
+      </p:sp>
+      <p:sp>
+        <p:nvSpPr>
+          <p:cNvPr id="4" name="TextBox 3"/>
+          <p:cNvSpPr txBox="1"/>
+          <p:nvPr/>
+        </p:nvSpPr>
+        <p:spPr>
+          <a:xfrm>
+            <a:off x="731520" y="685800"/>
+            <a:ext cx="10698480" cy="502920"/>
+          </a:xfrm>
+          <a:prstGeom prst="rect">
+            <a:avLst/>
+          </a:prstGeom>
+          <a:noFill/>
+        </p:spPr>
+        <p:txBody>
+          <a:bodyPr wrap="none">
+            <a:spAutoFit/>
+          </a:bodyPr>
+          <a:lstStyle/>
+          <a:p>
+            <a:pPr>
+              <a:defRPr sz="2200" b="1">
+                <a:solidFill>
+                  <a:srgbClr val="FFFFFF"/>
+                </a:solidFill>
+              </a:defRPr>
+            </a:pPr>
+            <a:r>
+              <a:t>Unified Web Command Center Capabilities</a:t>
+            </a:r>
+          </a:p>
+        </p:txBody>
+      </p:sp>
+      <p:sp>
+        <p:nvSpPr>
+          <p:cNvPr id="5" name="TextBox 4"/>
+          <p:cNvSpPr txBox="1"/>
+          <p:nvPr/>
+        </p:nvSpPr>
+        <p:spPr>
+          <a:xfrm>
+            <a:off x="731520" y="1188720"/>
+            <a:ext cx="10698480" cy="320040"/>
+          </a:xfrm>
+          <a:prstGeom prst="rect">
+            <a:avLst/>
+          </a:prstGeom>
+          <a:noFill/>
+        </p:spPr>
+        <p:txBody>
+          <a:bodyPr wrap="none">
+            <a:spAutoFit/>
+          </a:bodyPr>
+          <a:lstStyle/>
+          <a:p>
+            <a:pPr>
+              <a:defRPr sz="1200">
+                <a:solidFill>
+                  <a:srgbClr val="94A3B8"/>
+                </a:solidFill>
+              </a:defRPr>
+            </a:pPr>
+            <a:r>
+              <a:t>Modern React 18 interface designed specifically for fast-paced police control room operations.</a:t>
+            </a:r>
+          </a:p>
+        </p:txBody>
+      </p:sp>
+      <p:sp>
+        <p:nvSpPr>
+          <p:cNvPr id="6" name="Rectangle 5"/>
+          <p:cNvSpPr/>
+          <p:nvPr/>
+        </p:nvSpPr>
+        <p:spPr>
+          <a:xfrm>
+            <a:off x="731520" y="6309360"/>
+            <a:ext cx="10698480" cy="18288"/>
+          </a:xfrm>
+          <a:prstGeom prst="rect">
+            <a:avLst/>
+          </a:prstGeom>
+          <a:solidFill>
+            <a:srgbClr val="1E293B"/>
+          </a:solidFill>
+          <a:ln>
+            <a:noFill/>
+          </a:ln>
+        </p:spPr>
+        <p:style>
+          <a:lnRef idx="1">
+            <a:schemeClr val="accent1"/>
+          </a:lnRef>
+          <a:fillRef idx="3">
+            <a:schemeClr val="accent1"/>
+          </a:fillRef>
+          <a:effectRef idx="2">
+            <a:schemeClr val="accent1"/>
+          </a:effectRef>
+          <a:fontRef idx="minor">
+            <a:schemeClr val="lt1"/>
+          </a:fontRef>
+        </p:style>
+        <p:txBody>
+          <a:bodyPr rtlCol="0" anchor="ctr"/>
+          <a:lstStyle/>
+          <a:p>
+            <a:pPr algn="ctr"/>
+          </a:p>
+        </p:txBody>
+      </p:sp>
+      <p:sp>
+        <p:nvSpPr>
+          <p:cNvPr id="7" name="TextBox 6"/>
+          <p:cNvSpPr txBox="1"/>
+          <p:nvPr/>
+        </p:nvSpPr>
+        <p:spPr>
+          <a:xfrm>
+            <a:off x="731520" y="6355080"/>
+            <a:ext cx="10698480" cy="365760"/>
+          </a:xfrm>
+          <a:prstGeom prst="rect">
+            <a:avLst/>
+          </a:prstGeom>
+          <a:noFill/>
+        </p:spPr>
+        <p:txBody>
+          <a:bodyPr wrap="none">
+            <a:spAutoFit/>
+          </a:bodyPr>
+          <a:lstStyle/>
+          <a:p>
+            <a:pPr>
+              <a:defRPr sz="1000">
+                <a:solidFill>
+                  <a:srgbClr val="64748B"/>
+                </a:solidFill>
+              </a:defRPr>
+            </a:pPr>
+            <a:r>
+              <a:t>Sentinel AI Surveillance Platform • 100% Self-Hosted • SDC Compliant</a:t>
+            </a:r>
+          </a:p>
+        </p:txBody>
+      </p:sp>
+      <p:sp>
+        <p:nvSpPr>
+          <p:cNvPr id="8" name="TextBox 7"/>
+          <p:cNvSpPr txBox="1"/>
+          <p:nvPr/>
+        </p:nvSpPr>
+        <p:spPr>
+          <a:xfrm>
+            <a:off x="10058400" y="6355080"/>
+            <a:ext cx="1371600" cy="365760"/>
+          </a:xfrm>
+          <a:prstGeom prst="rect">
+            <a:avLst/>
+          </a:prstGeom>
+          <a:noFill/>
+        </p:spPr>
+        <p:txBody>
+          <a:bodyPr wrap="none">
+            <a:spAutoFit/>
+          </a:bodyPr>
+          <a:lstStyle/>
+          <a:p>
+            <a:pPr algn="r">
+              <a:defRPr sz="1000" b="1">
+                <a:solidFill>
+                  <a:srgbClr val="64748B"/>
+                </a:solidFill>
+              </a:defRPr>
+            </a:pPr>
+            <a:r>
+              <a:t>Slide 7 / 8</a:t>
+            </a:r>
+          </a:p>
+        </p:txBody>
+      </p:sp>
+      <p:sp>
+        <p:nvSpPr>
+          <p:cNvPr id="9" name="Rounded Rectangle 8"/>
+          <p:cNvSpPr/>
+          <p:nvPr/>
+        </p:nvSpPr>
+        <p:spPr>
+          <a:xfrm>
+            <a:off x="731520" y="1554480"/>
+            <a:ext cx="2468880" cy="2560320"/>
+          </a:xfrm>
+          <a:prstGeom prst="roundRect">
+            <a:avLst/>
+          </a:prstGeom>
+          <a:solidFill>
+            <a:srgbClr val="131D31"/>
+          </a:solidFill>
+          <a:ln w="15240">
+            <a:solidFill>
+              <a:srgbClr val="1E293B"/>
+            </a:solidFill>
+          </a:ln>
+        </p:spPr>
+        <p:style>
+          <a:lnRef idx="1">
+            <a:schemeClr val="accent1"/>
+          </a:lnRef>
+          <a:fillRef idx="3">
+            <a:schemeClr val="accent1"/>
+          </a:fillRef>
+          <a:effectRef idx="2">
+            <a:schemeClr val="accent1"/>
+          </a:effectRef>
+          <a:fontRef idx="minor">
+            <a:schemeClr val="lt1"/>
+          </a:fontRef>
+        </p:style>
+        <p:txBody>
+          <a:bodyPr rtlCol="0" anchor="ctr"/>
+          <a:lstStyle/>
+          <a:p>
+            <a:pPr algn="ctr"/>
+          </a:p>
+        </p:txBody>
+      </p:sp>
+      <p:sp>
+        <p:nvSpPr>
+          <p:cNvPr id="10" name="Rounded Rectangle 9"/>
+          <p:cNvSpPr/>
+          <p:nvPr/>
+        </p:nvSpPr>
+        <p:spPr>
+          <a:xfrm>
+            <a:off x="731520" y="1554480"/>
+            <a:ext cx="2468880" cy="109728"/>
+          </a:xfrm>
+          <a:prstGeom prst="roundRect">
+            <a:avLst/>
+          </a:prstGeom>
+          <a:solidFill>
+            <a:srgbClr val="06B6D4"/>
+          </a:solidFill>
+          <a:ln>
+            <a:noFill/>
+          </a:ln>
+        </p:spPr>
+        <p:style>
+          <a:lnRef idx="1">
+            <a:schemeClr val="accent1"/>
+          </a:lnRef>
+          <a:fillRef idx="3">
+            <a:schemeClr val="accent1"/>
+          </a:fillRef>
+          <a:effectRef idx="2">
+            <a:schemeClr val="accent1"/>
+          </a:effectRef>
+          <a:fontRef idx="minor">
+            <a:schemeClr val="lt1"/>
+          </a:fontRef>
+        </p:style>
+        <p:txBody>
+          <a:bodyPr rtlCol="0" anchor="ctr"/>
+          <a:lstStyle/>
+          <a:p>
+            <a:pPr algn="ctr"/>
+          </a:p>
+        </p:txBody>
+      </p:sp>
+      <p:sp>
+        <p:nvSpPr>
+          <p:cNvPr id="11" name="TextBox 10"/>
+          <p:cNvSpPr txBox="1"/>
+          <p:nvPr/>
+        </p:nvSpPr>
+        <p:spPr>
+          <a:xfrm>
+            <a:off x="960120" y="1719072"/>
+            <a:ext cx="2011680" cy="2240279"/>
+          </a:xfrm>
+          <a:prstGeom prst="rect">
+            <a:avLst/>
+          </a:prstGeom>
+          <a:noFill/>
+        </p:spPr>
+        <p:txBody>
+          <a:bodyPr wrap="square">
+            <a:spAutoFit/>
+          </a:bodyPr>
+          <a:lstStyle/>
+          <a:p>
+            <a:pPr>
+              <a:defRPr sz="1500" b="1">
+                <a:solidFill>
+                  <a:srgbClr val="FFFFFF"/>
+                </a:solidFill>
+              </a:defRPr>
+            </a:pPr>
+            <a:r>
+              <a:t>📺 30 Live CCTV Grid</a:t>
+            </a:r>
+          </a:p>
+          <a:p>
+            <a:pPr>
+              <a:spcBef>
+                <a:spcPts val="800"/>
+              </a:spcBef>
+              <a:defRPr sz="1100">
+                <a:solidFill>
+                  <a:srgbClr val="F8FAFC"/>
+                </a:solidFill>
+              </a:defRPr>
+            </a:pPr>
+            <a:r>
+              <a:t>30 official Gujarat Police cameras with 60 FPS hardware HLS streams.</a:t>
+            </a:r>
+          </a:p>
+        </p:txBody>
+      </p:sp>
+      <p:sp>
+        <p:nvSpPr>
+          <p:cNvPr id="12" name="Rounded Rectangle 11"/>
+          <p:cNvSpPr/>
+          <p:nvPr/>
+        </p:nvSpPr>
+        <p:spPr>
+          <a:xfrm>
+            <a:off x="3474720" y="1554480"/>
+            <a:ext cx="2468880" cy="2560320"/>
+          </a:xfrm>
+          <a:prstGeom prst="roundRect">
+            <a:avLst/>
+          </a:prstGeom>
+          <a:solidFill>
+            <a:srgbClr val="131D31"/>
+          </a:solidFill>
+          <a:ln w="15240">
+            <a:solidFill>
+              <a:srgbClr val="1E293B"/>
+            </a:solidFill>
+          </a:ln>
+        </p:spPr>
+        <p:style>
+          <a:lnRef idx="1">
+            <a:schemeClr val="accent1"/>
+          </a:lnRef>
+          <a:fillRef idx="3">
+            <a:schemeClr val="accent1"/>
+          </a:fillRef>
+          <a:effectRef idx="2">
+            <a:schemeClr val="accent1"/>
+          </a:effectRef>
+          <a:fontRef idx="minor">
+            <a:schemeClr val="lt1"/>
+          </a:fontRef>
+        </p:style>
+        <p:txBody>
+          <a:bodyPr rtlCol="0" anchor="ctr"/>
+          <a:lstStyle/>
+          <a:p>
+            <a:pPr algn="ctr"/>
+          </a:p>
+        </p:txBody>
+      </p:sp>
+      <p:sp>
+        <p:nvSpPr>
+          <p:cNvPr id="13" name="Rounded Rectangle 12"/>
+          <p:cNvSpPr/>
+          <p:nvPr/>
+        </p:nvSpPr>
+        <p:spPr>
+          <a:xfrm>
+            <a:off x="3474720" y="1554480"/>
+            <a:ext cx="2468880" cy="109728"/>
+          </a:xfrm>
+          <a:prstGeom prst="roundRect">
+            <a:avLst/>
+          </a:prstGeom>
+          <a:solidFill>
+            <a:srgbClr val="10B981"/>
+          </a:solidFill>
+          <a:ln>
+            <a:noFill/>
+          </a:ln>
+        </p:spPr>
+        <p:style>
+          <a:lnRef idx="1">
+            <a:schemeClr val="accent1"/>
+          </a:lnRef>
+          <a:fillRef idx="3">
+            <a:schemeClr val="accent1"/>
+          </a:fillRef>
+          <a:effectRef idx="2">
+            <a:schemeClr val="accent1"/>
+          </a:effectRef>
+          <a:fontRef idx="minor">
+            <a:schemeClr val="lt1"/>
+          </a:fontRef>
+        </p:style>
+        <p:txBody>
+          <a:bodyPr rtlCol="0" anchor="ctr"/>
+          <a:lstStyle/>
+          <a:p>
+            <a:pPr algn="ctr"/>
+          </a:p>
+        </p:txBody>
+      </p:sp>
+      <p:sp>
+        <p:nvSpPr>
+          <p:cNvPr id="14" name="TextBox 13"/>
+          <p:cNvSpPr txBox="1"/>
+          <p:nvPr/>
+        </p:nvSpPr>
+        <p:spPr>
+          <a:xfrm>
+            <a:off x="3703320" y="1719072"/>
+            <a:ext cx="2011680" cy="2240279"/>
+          </a:xfrm>
+          <a:prstGeom prst="rect">
+            <a:avLst/>
+          </a:prstGeom>
+          <a:noFill/>
+        </p:spPr>
+        <p:txBody>
+          <a:bodyPr wrap="square">
+            <a:spAutoFit/>
+          </a:bodyPr>
+          <a:lstStyle/>
+          <a:p>
+            <a:pPr>
+              <a:defRPr sz="1500" b="1">
+                <a:solidFill>
+                  <a:srgbClr val="FFFFFF"/>
+                </a:solidFill>
+              </a:defRPr>
+            </a:pPr>
+            <a:r>
+              <a:t>🔒 Officer Security &amp; RBAC</a:t>
+            </a:r>
+          </a:p>
+          <a:p>
+            <a:pPr>
+              <a:spcBef>
+                <a:spcPts val="800"/>
+              </a:spcBef>
+              <a:defRPr sz="1100">
+                <a:solidFill>
+                  <a:srgbClr val="F8FAFC"/>
+                </a:solidFill>
+              </a:defRPr>
+            </a:pPr>
+            <a:r>
+              <a:t>Salted SHA-256 gated login: SP IT &amp; Cyber (Badge: GP-7829).</a:t>
+            </a:r>
+          </a:p>
+        </p:txBody>
+      </p:sp>
+      <p:sp>
+        <p:nvSpPr>
+          <p:cNvPr id="15" name="Rounded Rectangle 14"/>
+          <p:cNvSpPr/>
+          <p:nvPr/>
+        </p:nvSpPr>
+        <p:spPr>
+          <a:xfrm>
+            <a:off x="6217920" y="1554480"/>
+            <a:ext cx="2468880" cy="2560320"/>
+          </a:xfrm>
+          <a:prstGeom prst="roundRect">
+            <a:avLst/>
+          </a:prstGeom>
+          <a:solidFill>
+            <a:srgbClr val="131D31"/>
+          </a:solidFill>
+          <a:ln w="15240">
+            <a:solidFill>
+              <a:srgbClr val="1E293B"/>
+            </a:solidFill>
+          </a:ln>
+        </p:spPr>
+        <p:style>
+          <a:lnRef idx="1">
+            <a:schemeClr val="accent1"/>
+          </a:lnRef>
+          <a:fillRef idx="3">
+            <a:schemeClr val="accent1"/>
+          </a:fillRef>
+          <a:effectRef idx="2">
+            <a:schemeClr val="accent1"/>
+          </a:effectRef>
+          <a:fontRef idx="minor">
+            <a:schemeClr val="lt1"/>
+          </a:fontRef>
+        </p:style>
+        <p:txBody>
+          <a:bodyPr rtlCol="0" anchor="ctr"/>
+          <a:lstStyle/>
+          <a:p>
+            <a:pPr algn="ctr"/>
+          </a:p>
+        </p:txBody>
+      </p:sp>
+      <p:sp>
+        <p:nvSpPr>
+          <p:cNvPr id="16" name="Rounded Rectangle 15"/>
+          <p:cNvSpPr/>
+          <p:nvPr/>
+        </p:nvSpPr>
+        <p:spPr>
+          <a:xfrm>
+            <a:off x="6217920" y="1554480"/>
+            <a:ext cx="2468880" cy="109728"/>
+          </a:xfrm>
+          <a:prstGeom prst="roundRect">
+            <a:avLst/>
+          </a:prstGeom>
+          <a:solidFill>
+            <a:srgbClr val="EF4444"/>
+          </a:solidFill>
+          <a:ln>
+            <a:noFill/>
+          </a:ln>
+        </p:spPr>
+        <p:style>
+          <a:lnRef idx="1">
+            <a:schemeClr val="accent1"/>
+          </a:lnRef>
+          <a:fillRef idx="3">
+            <a:schemeClr val="accent1"/>
+          </a:fillRef>
+          <a:effectRef idx="2">
+            <a:schemeClr val="accent1"/>
+          </a:effectRef>
+          <a:fontRef idx="minor">
+            <a:schemeClr val="lt1"/>
+          </a:fontRef>
+        </p:style>
+        <p:txBody>
+          <a:bodyPr rtlCol="0" anchor="ctr"/>
+          <a:lstStyle/>
+          <a:p>
+            <a:pPr algn="ctr"/>
+          </a:p>
+        </p:txBody>
+      </p:sp>
+      <p:sp>
+        <p:nvSpPr>
+          <p:cNvPr id="17" name="TextBox 16"/>
+          <p:cNvSpPr txBox="1"/>
+          <p:nvPr/>
+        </p:nvSpPr>
+        <p:spPr>
+          <a:xfrm>
+            <a:off x="6446520" y="1719072"/>
+            <a:ext cx="2011680" cy="2240279"/>
+          </a:xfrm>
+          <a:prstGeom prst="rect">
+            <a:avLst/>
+          </a:prstGeom>
+          <a:noFill/>
+        </p:spPr>
+        <p:txBody>
+          <a:bodyPr wrap="square">
+            <a:spAutoFit/>
+          </a:bodyPr>
+          <a:lstStyle/>
+          <a:p>
+            <a:pPr>
+              <a:defRPr sz="1500" b="1">
+                <a:solidFill>
+                  <a:srgbClr val="FFFFFF"/>
+                </a:solidFill>
+              </a:defRPr>
+            </a:pPr>
+            <a:r>
+              <a:t>🚨 Instant Hotlist Alerts</a:t>
+            </a:r>
+          </a:p>
+          <a:p>
+            <a:pPr>
+              <a:spcBef>
+                <a:spcPts val="800"/>
+              </a:spcBef>
+              <a:defRPr sz="1100">
+                <a:solidFill>
+                  <a:srgbClr val="F8FAFC"/>
+                </a:solidFill>
+              </a:defRPr>
+            </a:pPr>
+            <a:r>
+              <a:t>Sub-second cross-reference against CCTNS stolen FIR watchlists.</a:t>
+            </a:r>
+          </a:p>
+        </p:txBody>
+      </p:sp>
+      <p:sp>
+        <p:nvSpPr>
+          <p:cNvPr id="18" name="Rounded Rectangle 17"/>
+          <p:cNvSpPr/>
+          <p:nvPr/>
+        </p:nvSpPr>
+        <p:spPr>
+          <a:xfrm>
+            <a:off x="8961120" y="1554480"/>
+            <a:ext cx="2468880" cy="2560320"/>
+          </a:xfrm>
+          <a:prstGeom prst="roundRect">
+            <a:avLst/>
+          </a:prstGeom>
+          <a:solidFill>
+            <a:srgbClr val="131D31"/>
+          </a:solidFill>
+          <a:ln w="15240">
+            <a:solidFill>
+              <a:srgbClr val="1E293B"/>
+            </a:solidFill>
+          </a:ln>
+        </p:spPr>
+        <p:style>
+          <a:lnRef idx="1">
+            <a:schemeClr val="accent1"/>
+          </a:lnRef>
+          <a:fillRef idx="3">
+            <a:schemeClr val="accent1"/>
+          </a:fillRef>
+          <a:effectRef idx="2">
+            <a:schemeClr val="accent1"/>
+          </a:effectRef>
+          <a:fontRef idx="minor">
+            <a:schemeClr val="lt1"/>
+          </a:fontRef>
+        </p:style>
+        <p:txBody>
+          <a:bodyPr rtlCol="0" anchor="ctr"/>
+          <a:lstStyle/>
+          <a:p>
+            <a:pPr algn="ctr"/>
+          </a:p>
+        </p:txBody>
+      </p:sp>
+      <p:sp>
+        <p:nvSpPr>
+          <p:cNvPr id="19" name="Rounded Rectangle 18"/>
+          <p:cNvSpPr/>
+          <p:nvPr/>
+        </p:nvSpPr>
+        <p:spPr>
+          <a:xfrm>
+            <a:off x="8961120" y="1554480"/>
+            <a:ext cx="2468880" cy="109728"/>
+          </a:xfrm>
+          <a:prstGeom prst="roundRect">
+            <a:avLst/>
+          </a:prstGeom>
+          <a:solidFill>
+            <a:srgbClr val="A855F7"/>
+          </a:solidFill>
+          <a:ln>
+            <a:noFill/>
+          </a:ln>
+        </p:spPr>
+        <p:style>
+          <a:lnRef idx="1">
+            <a:schemeClr val="accent1"/>
+          </a:lnRef>
+          <a:fillRef idx="3">
+            <a:schemeClr val="accent1"/>
+          </a:fillRef>
+          <a:effectRef idx="2">
+            <a:schemeClr val="accent1"/>
+          </a:effectRef>
+          <a:fontRef idx="minor">
+            <a:schemeClr val="lt1"/>
+          </a:fontRef>
+        </p:style>
+        <p:txBody>
+          <a:bodyPr rtlCol="0" anchor="ctr"/>
+          <a:lstStyle/>
+          <a:p>
+            <a:pPr algn="ctr"/>
+          </a:p>
+        </p:txBody>
+      </p:sp>
+      <p:sp>
+        <p:nvSpPr>
+          <p:cNvPr id="20" name="TextBox 19"/>
+          <p:cNvSpPr txBox="1"/>
+          <p:nvPr/>
+        </p:nvSpPr>
+        <p:spPr>
+          <a:xfrm>
+            <a:off x="9189720" y="1719072"/>
+            <a:ext cx="2011680" cy="2240279"/>
+          </a:xfrm>
+          <a:prstGeom prst="rect">
+            <a:avLst/>
+          </a:prstGeom>
+          <a:noFill/>
+        </p:spPr>
+        <p:txBody>
+          <a:bodyPr wrap="square">
+            <a:spAutoFit/>
+          </a:bodyPr>
+          <a:lstStyle/>
+          <a:p>
+            <a:pPr>
+              <a:defRPr sz="1500" b="1">
+                <a:solidFill>
+                  <a:srgbClr val="FFFFFF"/>
+                </a:solidFill>
+              </a:defRPr>
+            </a:pPr>
+            <a:r>
+              <a:t>🌐 Live Cloud Platform</a:t>
+            </a:r>
+          </a:p>
+          <a:p>
+            <a:pPr>
+              <a:spcBef>
+                <a:spcPts val="800"/>
+              </a:spcBef>
+              <a:defRPr sz="1100">
+                <a:solidFill>
+                  <a:srgbClr val="F8FAFC"/>
+                </a:solidFill>
+              </a:defRPr>
+            </a:pPr>
+            <a:r>
+              <a:t>sentinel.deventtechnology.com with 24/7 keep-alive monitoring.</a:t>
+            </a:r>
+          </a:p>
+        </p:txBody>
+      </p:sp>
+      <p:sp>
+        <p:nvSpPr>
+          <p:cNvPr id="21" name="Rounded Rectangle 20"/>
+          <p:cNvSpPr/>
+          <p:nvPr/>
+        </p:nvSpPr>
+        <p:spPr>
+          <a:xfrm>
+            <a:off x="731520" y="4389120"/>
+            <a:ext cx="10698480" cy="1645920"/>
+          </a:xfrm>
+          <a:prstGeom prst="roundRect">
+            <a:avLst/>
+          </a:prstGeom>
+          <a:solidFill>
+            <a:srgbClr val="0F172A"/>
+          </a:solidFill>
+          <a:ln>
+            <a:solidFill>
+              <a:srgbClr val="1E293B"/>
+            </a:solidFill>
+          </a:ln>
+        </p:spPr>
+        <p:style>
+          <a:lnRef idx="1">
+            <a:schemeClr val="accent1"/>
+          </a:lnRef>
+          <a:fillRef idx="3">
+            <a:schemeClr val="accent1"/>
+          </a:fillRef>
+          <a:effectRef idx="2">
+            <a:schemeClr val="accent1"/>
+          </a:effectRef>
+          <a:fontRef idx="minor">
+            <a:schemeClr val="lt1"/>
+          </a:fontRef>
+        </p:style>
+        <p:txBody>
+          <a:bodyPr rtlCol="0" anchor="ctr"/>
+          <a:lstStyle/>
+          <a:p>
+            <a:pPr algn="ctr"/>
+          </a:p>
+        </p:txBody>
+      </p:sp>
+      <p:sp>
+        <p:nvSpPr>
+          <p:cNvPr id="22" name="TextBox 21"/>
+          <p:cNvSpPr txBox="1"/>
+          <p:nvPr/>
+        </p:nvSpPr>
+        <p:spPr>
+          <a:xfrm>
+            <a:off x="731520" y="4572000"/>
+            <a:ext cx="2651760" cy="1188720"/>
+          </a:xfrm>
+          <a:prstGeom prst="rect">
+            <a:avLst/>
+          </a:prstGeom>
+          <a:noFill/>
+        </p:spPr>
+        <p:txBody>
+          <a:bodyPr wrap="none">
+            <a:spAutoFit/>
+          </a:bodyPr>
+          <a:lstStyle/>
+          <a:p>
+            <a:pPr algn="ctr">
+              <a:defRPr sz="2200" b="1">
+                <a:solidFill>
+                  <a:srgbClr val="38BDF8"/>
+                </a:solidFill>
+              </a:defRPr>
+            </a:pPr>
+            <a:r>
+              <a:t>30 Feeds</a:t>
+            </a:r>
+          </a:p>
+          <a:p>
+            <a:pPr algn="ctr">
+              <a:defRPr sz="1100">
+                <a:solidFill>
+                  <a:srgbClr val="94A3B8"/>
+                </a:solidFill>
+              </a:defRPr>
+            </a:pPr>
+            <a:r>
+              <a:t>Live Gujarat Police Cameras</a:t>
+            </a:r>
+          </a:p>
+        </p:txBody>
+      </p:sp>
+      <p:sp>
+        <p:nvSpPr>
+          <p:cNvPr id="23" name="TextBox 22"/>
+          <p:cNvSpPr txBox="1"/>
+          <p:nvPr/>
+        </p:nvSpPr>
+        <p:spPr>
+          <a:xfrm>
+            <a:off x="3383280" y="4572000"/>
+            <a:ext cx="2651760" cy="1188720"/>
+          </a:xfrm>
+          <a:prstGeom prst="rect">
+            <a:avLst/>
+          </a:prstGeom>
+          <a:noFill/>
+        </p:spPr>
+        <p:txBody>
+          <a:bodyPr wrap="none">
+            <a:spAutoFit/>
+          </a:bodyPr>
+          <a:lstStyle/>
+          <a:p>
+            <a:pPr algn="ctr">
+              <a:defRPr sz="2200" b="1">
+                <a:solidFill>
+                  <a:srgbClr val="34D399"/>
+                </a:solidFill>
+              </a:defRPr>
+            </a:pPr>
+            <a:r>
+              <a:t>SHA-256</a:t>
+            </a:r>
+          </a:p>
+          <a:p>
+            <a:pPr algn="ctr">
+              <a:defRPr sz="1100">
+                <a:solidFill>
+                  <a:srgbClr val="94A3B8"/>
+                </a:solidFill>
+              </a:defRPr>
+            </a:pPr>
+            <a:r>
+              <a:t>Officer Security Gateway</a:t>
+            </a:r>
+          </a:p>
+        </p:txBody>
+      </p:sp>
+      <p:sp>
+        <p:nvSpPr>
+          <p:cNvPr id="24" name="TextBox 23"/>
+          <p:cNvSpPr txBox="1"/>
+          <p:nvPr/>
+        </p:nvSpPr>
+        <p:spPr>
+          <a:xfrm>
+            <a:off x="6035040" y="4572000"/>
+            <a:ext cx="2651760" cy="1188720"/>
+          </a:xfrm>
+          <a:prstGeom prst="rect">
+            <a:avLst/>
+          </a:prstGeom>
+          <a:noFill/>
+        </p:spPr>
+        <p:txBody>
+          <a:bodyPr wrap="none">
+            <a:spAutoFit/>
+          </a:bodyPr>
+          <a:lstStyle/>
+          <a:p>
+            <a:pPr algn="ctr">
+              <a:defRPr sz="2200" b="1">
+                <a:solidFill>
+                  <a:srgbClr val="F87171"/>
+                </a:solidFill>
+              </a:defRPr>
+            </a:pPr>
+            <a:r>
+              <a:t>&lt; 1s</a:t>
+            </a:r>
+          </a:p>
+          <a:p>
+            <a:pPr algn="ctr">
+              <a:defRPr sz="1100">
+                <a:solidFill>
+                  <a:srgbClr val="94A3B8"/>
+                </a:solidFill>
+              </a:defRPr>
+            </a:pPr>
+            <a:r>
+              <a:t>Hotlist Alert Latency</a:t>
+            </a:r>
+          </a:p>
+        </p:txBody>
+      </p:sp>
+      <p:sp>
+        <p:nvSpPr>
+          <p:cNvPr id="25" name="TextBox 24"/>
+          <p:cNvSpPr txBox="1"/>
+          <p:nvPr/>
+        </p:nvSpPr>
+        <p:spPr>
+          <a:xfrm>
+            <a:off x="8686800" y="4572000"/>
+            <a:ext cx="2651760" cy="1188720"/>
+          </a:xfrm>
+          <a:prstGeom prst="rect">
+            <a:avLst/>
+          </a:prstGeom>
+          <a:noFill/>
+        </p:spPr>
+        <p:txBody>
+          <a:bodyPr wrap="none">
+            <a:spAutoFit/>
+          </a:bodyPr>
+          <a:lstStyle/>
+          <a:p>
+            <a:pPr algn="ctr">
+              <a:defRPr sz="2200" b="1">
+                <a:solidFill>
+                  <a:srgbClr val="FBBF24"/>
+                </a:solidFill>
+              </a:defRPr>
+            </a:pPr>
+            <a:r>
+              <a:t>24/7 Live</a:t>
+            </a:r>
+          </a:p>
+          <a:p>
+            <a:pPr algn="ctr">
+              <a:defRPr sz="1100">
+                <a:solidFill>
+                  <a:srgbClr val="94A3B8"/>
+                </a:solidFill>
+              </a:defRPr>
+            </a:pPr>
+            <a:r>
+              <a:t>Continuous Cloud Uptime</a:t>
+            </a:r>
+          </a:p>
+        </p:txBody>
+      </p:sp>
     </p:spTree>
   </p:cSld>
   <p:clrMapOvr>
@@ -3389,20 +9338,12 @@
         <p:nvPr/>
       </p:nvGrpSpPr>
       <p:grpSpPr/>
-      <p:pic>
-        <p:nvPicPr>
-          <p:cNvPr id="2" name="Picture 1" descr="slide_2.png"/>
-          <p:cNvPicPr>
-            <a:picLocks noChangeAspect="1"/>
-          </p:cNvPicPr>
-          <p:nvPr/>
-        </p:nvPicPr>
-        <p:blipFill>
-          <a:blip r:embed="rId2"/>
-          <a:stretch>
-            <a:fillRect/>
-          </a:stretch>
-        </p:blipFill>
+      <p:sp>
+        <p:nvSpPr>
+          <p:cNvPr id="2" name="Rectangle 1"/>
+          <p:cNvSpPr/>
+          <p:nvPr/>
+        </p:nvSpPr>
         <p:spPr>
           <a:xfrm>
             <a:off x="0" y="0"/>
@@ -3411,8 +9352,698 @@
           <a:prstGeom prst="rect">
             <a:avLst/>
           </a:prstGeom>
-        </p:spPr>
-      </p:pic>
+          <a:solidFill>
+            <a:srgbClr val="0B0F19"/>
+          </a:solidFill>
+          <a:ln>
+            <a:noFill/>
+          </a:ln>
+        </p:spPr>
+        <p:style>
+          <a:lnRef idx="1">
+            <a:schemeClr val="accent1"/>
+          </a:lnRef>
+          <a:fillRef idx="3">
+            <a:schemeClr val="accent1"/>
+          </a:fillRef>
+          <a:effectRef idx="2">
+            <a:schemeClr val="accent1"/>
+          </a:effectRef>
+          <a:fontRef idx="minor">
+            <a:schemeClr val="lt1"/>
+          </a:fontRef>
+        </p:style>
+        <p:txBody>
+          <a:bodyPr rtlCol="0" anchor="ctr"/>
+          <a:lstStyle/>
+          <a:p>
+            <a:pPr algn="ctr"/>
+          </a:p>
+        </p:txBody>
+      </p:sp>
+      <p:sp>
+        <p:nvSpPr>
+          <p:cNvPr id="3" name="Rounded Rectangle 2"/>
+          <p:cNvSpPr/>
+          <p:nvPr/>
+        </p:nvSpPr>
+        <p:spPr>
+          <a:xfrm>
+            <a:off x="731520" y="365760"/>
+            <a:ext cx="2926080" cy="292608"/>
+          </a:xfrm>
+          <a:prstGeom prst="roundRect">
+            <a:avLst/>
+          </a:prstGeom>
+          <a:solidFill>
+            <a:srgbClr val="0F1E30"/>
+          </a:solidFill>
+          <a:ln w="12700">
+            <a:solidFill>
+              <a:srgbClr val="06B6D4"/>
+            </a:solidFill>
+          </a:ln>
+        </p:spPr>
+        <p:style>
+          <a:lnRef idx="1">
+            <a:schemeClr val="accent1"/>
+          </a:lnRef>
+          <a:fillRef idx="3">
+            <a:schemeClr val="accent1"/>
+          </a:fillRef>
+          <a:effectRef idx="2">
+            <a:schemeClr val="accent1"/>
+          </a:effectRef>
+          <a:fontRef idx="minor">
+            <a:schemeClr val="lt1"/>
+          </a:fontRef>
+        </p:style>
+        <p:txBody>
+          <a:bodyPr rtlCol="0" anchor="ctr"/>
+          <a:lstStyle/>
+          <a:p>
+            <a:pPr algn="ctr">
+              <a:defRPr sz="1000" b="1">
+                <a:solidFill>
+                  <a:srgbClr val="06B6D4"/>
+                </a:solidFill>
+              </a:defRPr>
+            </a:pPr>
+            <a:r>
+              <a:t>🛡️ VALUE SUMMARY</a:t>
+            </a:r>
+          </a:p>
+        </p:txBody>
+      </p:sp>
+      <p:sp>
+        <p:nvSpPr>
+          <p:cNvPr id="4" name="TextBox 3"/>
+          <p:cNvSpPr txBox="1"/>
+          <p:nvPr/>
+        </p:nvSpPr>
+        <p:spPr>
+          <a:xfrm>
+            <a:off x="731520" y="685800"/>
+            <a:ext cx="10698480" cy="502920"/>
+          </a:xfrm>
+          <a:prstGeom prst="rect">
+            <a:avLst/>
+          </a:prstGeom>
+          <a:noFill/>
+        </p:spPr>
+        <p:txBody>
+          <a:bodyPr wrap="none">
+            <a:spAutoFit/>
+          </a:bodyPr>
+          <a:lstStyle/>
+          <a:p>
+            <a:pPr>
+              <a:defRPr sz="2200" b="1">
+                <a:solidFill>
+                  <a:srgbClr val="FFFFFF"/>
+                </a:solidFill>
+              </a:defRPr>
+            </a:pPr>
+            <a:r>
+              <a:t>Summary, Live Production Demo &amp; Next Steps</a:t>
+            </a:r>
+          </a:p>
+        </p:txBody>
+      </p:sp>
+      <p:sp>
+        <p:nvSpPr>
+          <p:cNvPr id="5" name="TextBox 4"/>
+          <p:cNvSpPr txBox="1"/>
+          <p:nvPr/>
+        </p:nvSpPr>
+        <p:spPr>
+          <a:xfrm>
+            <a:off x="731520" y="1188720"/>
+            <a:ext cx="10698480" cy="320040"/>
+          </a:xfrm>
+          <a:prstGeom prst="rect">
+            <a:avLst/>
+          </a:prstGeom>
+          <a:noFill/>
+        </p:spPr>
+        <p:txBody>
+          <a:bodyPr wrap="none">
+            <a:spAutoFit/>
+          </a:bodyPr>
+          <a:lstStyle/>
+          <a:p>
+            <a:pPr>
+              <a:defRPr sz="1200">
+                <a:solidFill>
+                  <a:srgbClr val="94A3B8"/>
+                </a:solidFill>
+              </a:defRPr>
+            </a:pPr>
+            <a:r>
+              <a:t>High operational impact with verified production cloud availability.</a:t>
+            </a:r>
+          </a:p>
+        </p:txBody>
+      </p:sp>
+      <p:sp>
+        <p:nvSpPr>
+          <p:cNvPr id="6" name="Rectangle 5"/>
+          <p:cNvSpPr/>
+          <p:nvPr/>
+        </p:nvSpPr>
+        <p:spPr>
+          <a:xfrm>
+            <a:off x="731520" y="6309360"/>
+            <a:ext cx="10698480" cy="18288"/>
+          </a:xfrm>
+          <a:prstGeom prst="rect">
+            <a:avLst/>
+          </a:prstGeom>
+          <a:solidFill>
+            <a:srgbClr val="1E293B"/>
+          </a:solidFill>
+          <a:ln>
+            <a:noFill/>
+          </a:ln>
+        </p:spPr>
+        <p:style>
+          <a:lnRef idx="1">
+            <a:schemeClr val="accent1"/>
+          </a:lnRef>
+          <a:fillRef idx="3">
+            <a:schemeClr val="accent1"/>
+          </a:fillRef>
+          <a:effectRef idx="2">
+            <a:schemeClr val="accent1"/>
+          </a:effectRef>
+          <a:fontRef idx="minor">
+            <a:schemeClr val="lt1"/>
+          </a:fontRef>
+        </p:style>
+        <p:txBody>
+          <a:bodyPr rtlCol="0" anchor="ctr"/>
+          <a:lstStyle/>
+          <a:p>
+            <a:pPr algn="ctr"/>
+          </a:p>
+        </p:txBody>
+      </p:sp>
+      <p:sp>
+        <p:nvSpPr>
+          <p:cNvPr id="7" name="TextBox 6"/>
+          <p:cNvSpPr txBox="1"/>
+          <p:nvPr/>
+        </p:nvSpPr>
+        <p:spPr>
+          <a:xfrm>
+            <a:off x="731520" y="6355080"/>
+            <a:ext cx="10698480" cy="365760"/>
+          </a:xfrm>
+          <a:prstGeom prst="rect">
+            <a:avLst/>
+          </a:prstGeom>
+          <a:noFill/>
+        </p:spPr>
+        <p:txBody>
+          <a:bodyPr wrap="none">
+            <a:spAutoFit/>
+          </a:bodyPr>
+          <a:lstStyle/>
+          <a:p>
+            <a:pPr>
+              <a:defRPr sz="1000">
+                <a:solidFill>
+                  <a:srgbClr val="64748B"/>
+                </a:solidFill>
+              </a:defRPr>
+            </a:pPr>
+            <a:r>
+              <a:t>Sentinel AI Surveillance Platform • 100% Self-Hosted • SDC Compliant</a:t>
+            </a:r>
+          </a:p>
+        </p:txBody>
+      </p:sp>
+      <p:sp>
+        <p:nvSpPr>
+          <p:cNvPr id="8" name="TextBox 7"/>
+          <p:cNvSpPr txBox="1"/>
+          <p:nvPr/>
+        </p:nvSpPr>
+        <p:spPr>
+          <a:xfrm>
+            <a:off x="10058400" y="6355080"/>
+            <a:ext cx="1371600" cy="365760"/>
+          </a:xfrm>
+          <a:prstGeom prst="rect">
+            <a:avLst/>
+          </a:prstGeom>
+          <a:noFill/>
+        </p:spPr>
+        <p:txBody>
+          <a:bodyPr wrap="none">
+            <a:spAutoFit/>
+          </a:bodyPr>
+          <a:lstStyle/>
+          <a:p>
+            <a:pPr algn="r">
+              <a:defRPr sz="1000" b="1">
+                <a:solidFill>
+                  <a:srgbClr val="64748B"/>
+                </a:solidFill>
+              </a:defRPr>
+            </a:pPr>
+            <a:r>
+              <a:t>Slide 8 / 8</a:t>
+            </a:r>
+          </a:p>
+        </p:txBody>
+      </p:sp>
+      <p:sp>
+        <p:nvSpPr>
+          <p:cNvPr id="9" name="Rounded Rectangle 8"/>
+          <p:cNvSpPr/>
+          <p:nvPr/>
+        </p:nvSpPr>
+        <p:spPr>
+          <a:xfrm>
+            <a:off x="731520" y="1554480"/>
+            <a:ext cx="5120640" cy="4480560"/>
+          </a:xfrm>
+          <a:prstGeom prst="roundRect">
+            <a:avLst/>
+          </a:prstGeom>
+          <a:solidFill>
+            <a:srgbClr val="131D31"/>
+          </a:solidFill>
+          <a:ln w="15240">
+            <a:solidFill>
+              <a:srgbClr val="1E293B"/>
+            </a:solidFill>
+          </a:ln>
+        </p:spPr>
+        <p:style>
+          <a:lnRef idx="1">
+            <a:schemeClr val="accent1"/>
+          </a:lnRef>
+          <a:fillRef idx="3">
+            <a:schemeClr val="accent1"/>
+          </a:fillRef>
+          <a:effectRef idx="2">
+            <a:schemeClr val="accent1"/>
+          </a:effectRef>
+          <a:fontRef idx="minor">
+            <a:schemeClr val="lt1"/>
+          </a:fontRef>
+        </p:style>
+        <p:txBody>
+          <a:bodyPr rtlCol="0" anchor="ctr"/>
+          <a:lstStyle/>
+          <a:p>
+            <a:pPr algn="ctr"/>
+          </a:p>
+        </p:txBody>
+      </p:sp>
+      <p:sp>
+        <p:nvSpPr>
+          <p:cNvPr id="10" name="Rounded Rectangle 9"/>
+          <p:cNvSpPr/>
+          <p:nvPr/>
+        </p:nvSpPr>
+        <p:spPr>
+          <a:xfrm>
+            <a:off x="731520" y="1554480"/>
+            <a:ext cx="5120640" cy="109728"/>
+          </a:xfrm>
+          <a:prstGeom prst="roundRect">
+            <a:avLst/>
+          </a:prstGeom>
+          <a:solidFill>
+            <a:srgbClr val="10B981"/>
+          </a:solidFill>
+          <a:ln>
+            <a:noFill/>
+          </a:ln>
+        </p:spPr>
+        <p:style>
+          <a:lnRef idx="1">
+            <a:schemeClr val="accent1"/>
+          </a:lnRef>
+          <a:fillRef idx="3">
+            <a:schemeClr val="accent1"/>
+          </a:fillRef>
+          <a:effectRef idx="2">
+            <a:schemeClr val="accent1"/>
+          </a:effectRef>
+          <a:fontRef idx="minor">
+            <a:schemeClr val="lt1"/>
+          </a:fontRef>
+        </p:style>
+        <p:txBody>
+          <a:bodyPr rtlCol="0" anchor="ctr"/>
+          <a:lstStyle/>
+          <a:p>
+            <a:pPr algn="ctr"/>
+          </a:p>
+        </p:txBody>
+      </p:sp>
+      <p:sp>
+        <p:nvSpPr>
+          <p:cNvPr id="11" name="TextBox 10"/>
+          <p:cNvSpPr txBox="1"/>
+          <p:nvPr/>
+        </p:nvSpPr>
+        <p:spPr>
+          <a:xfrm>
+            <a:off x="960120" y="1719072"/>
+            <a:ext cx="4663440" cy="4160520"/>
+          </a:xfrm>
+          <a:prstGeom prst="rect">
+            <a:avLst/>
+          </a:prstGeom>
+          <a:noFill/>
+        </p:spPr>
+        <p:txBody>
+          <a:bodyPr wrap="square">
+            <a:spAutoFit/>
+          </a:bodyPr>
+          <a:lstStyle/>
+          <a:p>
+            <a:pPr>
+              <a:defRPr sz="1500" b="1">
+                <a:solidFill>
+                  <a:srgbClr val="FFFFFF"/>
+                </a:solidFill>
+              </a:defRPr>
+            </a:pPr>
+            <a:r>
+              <a:t>💰 Massive Cost &amp; Infrastructure ROI</a:t>
+            </a:r>
+          </a:p>
+          <a:p>
+            <a:pPr>
+              <a:spcBef>
+                <a:spcPts val="300"/>
+              </a:spcBef>
+              <a:defRPr sz="1050">
+                <a:solidFill>
+                  <a:srgbClr val="94A3B8"/>
+                </a:solidFill>
+              </a:defRPr>
+            </a:pPr>
+            <a:r>
+              <a:t>Zero Recurring SaaS Fees</a:t>
+            </a:r>
+          </a:p>
+          <a:p>
+            <a:pPr>
+              <a:spcBef>
+                <a:spcPts val="1000"/>
+              </a:spcBef>
+              <a:defRPr sz="1100">
+                <a:solidFill>
+                  <a:srgbClr val="F8FAFC"/>
+                </a:solidFill>
+              </a:defRPr>
+            </a:pPr>
+            <a:r>
+              <a:t>• Zero Recurring SaaS Costs: No per-camera licensing fees; saves crores annually compared to proprietary suites.</a:t>
+            </a:r>
+          </a:p>
+          <a:p>
+            <a:pPr>
+              <a:spcBef>
+                <a:spcPts val="1000"/>
+              </a:spcBef>
+              <a:defRPr sz="1100">
+                <a:solidFill>
+                  <a:srgbClr val="F8FAFC"/>
+                </a:solidFill>
+              </a:defRPr>
+            </a:pPr>
+            <a:r>
+              <a:t>• Multi-Vendor Reusability: Works with existing legacy CCTV hardware across Gujarat without costly replacements.</a:t>
+            </a:r>
+          </a:p>
+          <a:p>
+            <a:pPr>
+              <a:spcBef>
+                <a:spcPts val="1000"/>
+              </a:spcBef>
+              <a:defRPr sz="1100">
+                <a:solidFill>
+                  <a:srgbClr val="F8FAFC"/>
+                </a:solidFill>
+              </a:defRPr>
+            </a:pPr>
+            <a:r>
+              <a:t>• 100% Data Sovereignty: Video footage and criminal records remain strictly inside the State Data Centre.</a:t>
+            </a:r>
+          </a:p>
+          <a:p>
+            <a:pPr>
+              <a:spcBef>
+                <a:spcPts val="1000"/>
+              </a:spcBef>
+              <a:defRPr sz="1100">
+                <a:solidFill>
+                  <a:srgbClr val="F8FAFC"/>
+                </a:solidFill>
+              </a:defRPr>
+            </a:pPr>
+            <a:r>
+              <a:t>• Rapid Resolution: Cuts forensic tracking time from several hours down to a few seconds.</a:t>
+            </a:r>
+          </a:p>
+        </p:txBody>
+      </p:sp>
+      <p:sp>
+        <p:nvSpPr>
+          <p:cNvPr id="12" name="Rounded Rectangle 11"/>
+          <p:cNvSpPr/>
+          <p:nvPr/>
+        </p:nvSpPr>
+        <p:spPr>
+          <a:xfrm>
+            <a:off x="6217920" y="1554480"/>
+            <a:ext cx="5212080" cy="4480560"/>
+          </a:xfrm>
+          <a:prstGeom prst="roundRect">
+            <a:avLst/>
+          </a:prstGeom>
+          <a:solidFill>
+            <a:srgbClr val="131D31"/>
+          </a:solidFill>
+          <a:ln w="15240">
+            <a:solidFill>
+              <a:srgbClr val="1E293B"/>
+            </a:solidFill>
+          </a:ln>
+        </p:spPr>
+        <p:style>
+          <a:lnRef idx="1">
+            <a:schemeClr val="accent1"/>
+          </a:lnRef>
+          <a:fillRef idx="3">
+            <a:schemeClr val="accent1"/>
+          </a:fillRef>
+          <a:effectRef idx="2">
+            <a:schemeClr val="accent1"/>
+          </a:effectRef>
+          <a:fontRef idx="minor">
+            <a:schemeClr val="lt1"/>
+          </a:fontRef>
+        </p:style>
+        <p:txBody>
+          <a:bodyPr rtlCol="0" anchor="ctr"/>
+          <a:lstStyle/>
+          <a:p>
+            <a:pPr algn="ctr"/>
+          </a:p>
+        </p:txBody>
+      </p:sp>
+      <p:sp>
+        <p:nvSpPr>
+          <p:cNvPr id="13" name="Rounded Rectangle 12"/>
+          <p:cNvSpPr/>
+          <p:nvPr/>
+        </p:nvSpPr>
+        <p:spPr>
+          <a:xfrm>
+            <a:off x="6217920" y="1554480"/>
+            <a:ext cx="5212080" cy="109728"/>
+          </a:xfrm>
+          <a:prstGeom prst="roundRect">
+            <a:avLst/>
+          </a:prstGeom>
+          <a:solidFill>
+            <a:srgbClr val="06B6D4"/>
+          </a:solidFill>
+          <a:ln>
+            <a:noFill/>
+          </a:ln>
+        </p:spPr>
+        <p:style>
+          <a:lnRef idx="1">
+            <a:schemeClr val="accent1"/>
+          </a:lnRef>
+          <a:fillRef idx="3">
+            <a:schemeClr val="accent1"/>
+          </a:fillRef>
+          <a:effectRef idx="2">
+            <a:schemeClr val="accent1"/>
+          </a:effectRef>
+          <a:fontRef idx="minor">
+            <a:schemeClr val="lt1"/>
+          </a:fontRef>
+        </p:style>
+        <p:txBody>
+          <a:bodyPr rtlCol="0" anchor="ctr"/>
+          <a:lstStyle/>
+          <a:p>
+            <a:pPr algn="ctr"/>
+          </a:p>
+        </p:txBody>
+      </p:sp>
+      <p:sp>
+        <p:nvSpPr>
+          <p:cNvPr id="14" name="TextBox 13"/>
+          <p:cNvSpPr txBox="1"/>
+          <p:nvPr/>
+        </p:nvSpPr>
+        <p:spPr>
+          <a:xfrm>
+            <a:off x="6446520" y="1719072"/>
+            <a:ext cx="4754880" cy="4160520"/>
+          </a:xfrm>
+          <a:prstGeom prst="rect">
+            <a:avLst/>
+          </a:prstGeom>
+          <a:noFill/>
+        </p:spPr>
+        <p:txBody>
+          <a:bodyPr wrap="square">
+            <a:spAutoFit/>
+          </a:bodyPr>
+          <a:lstStyle/>
+          <a:p>
+            <a:pPr>
+              <a:defRPr sz="1500" b="1">
+                <a:solidFill>
+                  <a:srgbClr val="FFFFFF"/>
+                </a:solidFill>
+              </a:defRPr>
+            </a:pPr>
+            <a:r>
+              <a:t>🌐 Live Production Demo Access</a:t>
+            </a:r>
+          </a:p>
+          <a:p>
+            <a:pPr>
+              <a:spcBef>
+                <a:spcPts val="300"/>
+              </a:spcBef>
+              <a:defRPr sz="1050">
+                <a:solidFill>
+                  <a:srgbClr val="94A3B8"/>
+                </a:solidFill>
+              </a:defRPr>
+            </a:pPr>
+            <a:r>
+              <a:t>Direct Evaluation Access</a:t>
+            </a:r>
+          </a:p>
+          <a:p>
+            <a:pPr>
+              <a:spcBef>
+                <a:spcPts val="800"/>
+              </a:spcBef>
+              <a:defRPr sz="1100">
+                <a:solidFill>
+                  <a:srgbClr val="F8FAFC"/>
+                </a:solidFill>
+              </a:defRPr>
+            </a:pPr>
+            <a:r>
+              <a:t>• Live Web Dashboard: https://sentinel.deventtechnology.com</a:t>
+            </a:r>
+          </a:p>
+          <a:p>
+            <a:pPr>
+              <a:spcBef>
+                <a:spcPts val="800"/>
+              </a:spcBef>
+              <a:defRPr sz="1100">
+                <a:solidFill>
+                  <a:srgbClr val="F8FAFC"/>
+                </a:solidFill>
+              </a:defRPr>
+            </a:pPr>
+            <a:r>
+              <a:t>• Live API Backend: https://sentinel-api-bqfm.onrender.com/docs</a:t>
+            </a:r>
+          </a:p>
+          <a:p>
+            <a:pPr>
+              <a:spcBef>
+                <a:spcPts val="800"/>
+              </a:spcBef>
+              <a:defRPr sz="1100">
+                <a:solidFill>
+                  <a:srgbClr val="F8FAFC"/>
+                </a:solidFill>
+              </a:defRPr>
+            </a:pPr>
+            <a:r>
+              <a:t>• Officer Login Email: jyoti@deventtechnology.com (Superintendent of Police)</a:t>
+            </a:r>
+          </a:p>
+          <a:p>
+            <a:pPr>
+              <a:spcBef>
+                <a:spcPts val="800"/>
+              </a:spcBef>
+              <a:defRPr sz="1100">
+                <a:solidFill>
+                  <a:srgbClr val="F8FAFC"/>
+                </a:solidFill>
+              </a:defRPr>
+            </a:pPr>
+            <a:r>
+              <a:t>• Officer Password: 123456 (Badge Number: GP-7829)</a:t>
+            </a:r>
+          </a:p>
+          <a:p>
+            <a:pPr>
+              <a:spcBef>
+                <a:spcPts val="800"/>
+              </a:spcBef>
+              <a:defRPr sz="1100">
+                <a:solidFill>
+                  <a:srgbClr val="F8FAFC"/>
+                </a:solidFill>
+              </a:defRPr>
+            </a:pPr>
+            <a:r>
+              <a:t>• Active Feeds: 30 Official Gujarat Police Cameras (cam01 - cam30)</a:t>
+            </a:r>
+          </a:p>
+          <a:p>
+            <a:pPr>
+              <a:spcBef>
+                <a:spcPts val="800"/>
+              </a:spcBef>
+              <a:defRPr sz="1100">
+                <a:solidFill>
+                  <a:srgbClr val="F8FAFC"/>
+                </a:solidFill>
+              </a:defRPr>
+            </a:pPr>
+            <a:r>
+              <a:t>• Uptime Monitoring: Automated 24/7 keep-alive monitor enabled.</a:t>
+            </a:r>
+          </a:p>
+        </p:txBody>
+      </p:sp>
     </p:spTree>
   </p:cSld>
   <p:clrMapOvr>
